--- a/topic02-understanding-class-definitions/unit-1/talk-2/class-definitions-methods.pptx
+++ b/topic02-understanding-class-definitions/unit-1/talk-2/class-definitions-methods.pptx
@@ -2,7 +2,7 @@
 <file path=ppt/presentation.xml><?xml version="1.0" encoding="utf-8"?>
 <p:presentation xmlns:a="http://schemas.openxmlformats.org/drawingml/2006/main" xmlns:r="http://schemas.openxmlformats.org/officeDocument/2006/relationships" xmlns:p="http://schemas.openxmlformats.org/presentationml/2006/main" saveSubsetFonts="1">
   <p:sldMasterIdLst>
-    <p:sldMasterId id="2147483940" r:id="rId1"/>
+    <p:sldMasterId id="2147483957" r:id="rId1"/>
   </p:sldMasterIdLst>
   <p:notesMasterIdLst>
     <p:notesMasterId r:id="rId29"/>
@@ -507,14 +507,14 @@
           </a:ln>
           <a:extLst>
             <a:ext uri="{909E8E84-426E-40dd-AFC4-6F175D3DCCD1}">
-              <a14:hiddenFill xmlns:a14="http://schemas.microsoft.com/office/drawing/2010/main" xmlns="">
+              <a14:hiddenFill xmlns="" xmlns:a14="http://schemas.microsoft.com/office/drawing/2010/main">
                 <a:solidFill>
                   <a:srgbClr val="FFFFFF"/>
                 </a:solidFill>
               </a14:hiddenFill>
             </a:ext>
             <a:ext uri="{FAA26D3D-D897-4be2-8F04-BA451C77F1D7}">
-              <ma14:placeholderFlag xmlns:ma14="http://schemas.microsoft.com/office/mac/drawingml/2011/main" xmlns="" val="1"/>
+              <ma14:placeholderFlag xmlns="" xmlns:ma14="http://schemas.microsoft.com/office/mac/drawingml/2011/main" val="1"/>
             </a:ext>
           </a:extLst>
         </p:spPr>
@@ -858,14 +858,14 @@
           <a:noFill/>
           <a:extLst>
             <a:ext uri="{909E8E84-426E-40dd-AFC4-6F175D3DCCD1}">
-              <a14:hiddenFill xmlns:a14="http://schemas.microsoft.com/office/drawing/2010/main" xmlns="">
+              <a14:hiddenFill xmlns="" xmlns:a14="http://schemas.microsoft.com/office/drawing/2010/main">
                 <a:solidFill>
                   <a:srgbClr val="FFFFFF"/>
                 </a:solidFill>
               </a14:hiddenFill>
             </a:ext>
             <a:ext uri="{91240B29-F687-4f45-9708-019B960494DF}">
-              <a14:hiddenLine xmlns:a14="http://schemas.microsoft.com/office/drawing/2010/main" xmlns="" w="9525">
+              <a14:hiddenLine xmlns="" xmlns:a14="http://schemas.microsoft.com/office/drawing/2010/main" w="9525">
                 <a:solidFill>
                   <a:srgbClr val="000000"/>
                 </a:solidFill>
@@ -1013,14 +1013,14 @@
           <a:noFill/>
           <a:extLst>
             <a:ext uri="{909E8E84-426E-40dd-AFC4-6F175D3DCCD1}">
-              <a14:hiddenFill xmlns:a14="http://schemas.microsoft.com/office/drawing/2010/main" xmlns="">
+              <a14:hiddenFill xmlns="" xmlns:a14="http://schemas.microsoft.com/office/drawing/2010/main">
                 <a:solidFill>
                   <a:srgbClr val="FFFFFF"/>
                 </a:solidFill>
               </a14:hiddenFill>
             </a:ext>
             <a:ext uri="{91240B29-F687-4f45-9708-019B960494DF}">
-              <a14:hiddenLine xmlns:a14="http://schemas.microsoft.com/office/drawing/2010/main" xmlns="" w="9525">
+              <a14:hiddenLine xmlns="" xmlns:a14="http://schemas.microsoft.com/office/drawing/2010/main" w="9525">
                 <a:solidFill>
                   <a:srgbClr val="000000"/>
                 </a:solidFill>
@@ -1168,14 +1168,14 @@
           <a:noFill/>
           <a:extLst>
             <a:ext uri="{909E8E84-426E-40dd-AFC4-6F175D3DCCD1}">
-              <a14:hiddenFill xmlns:a14="http://schemas.microsoft.com/office/drawing/2010/main" xmlns="">
+              <a14:hiddenFill xmlns="" xmlns:a14="http://schemas.microsoft.com/office/drawing/2010/main">
                 <a:solidFill>
                   <a:srgbClr val="FFFFFF"/>
                 </a:solidFill>
               </a14:hiddenFill>
             </a:ext>
             <a:ext uri="{91240B29-F687-4f45-9708-019B960494DF}">
-              <a14:hiddenLine xmlns:a14="http://schemas.microsoft.com/office/drawing/2010/main" xmlns="" w="9525">
+              <a14:hiddenLine xmlns="" xmlns:a14="http://schemas.microsoft.com/office/drawing/2010/main" w="9525">
                 <a:solidFill>
                   <a:srgbClr val="000000"/>
                 </a:solidFill>
@@ -1347,7 +1347,7 @@
         <p:spPr>
           <a:extLst>
             <a:ext uri="{FAA26D3D-D897-4be2-8F04-BA451C77F1D7}">
-              <ma14:placeholderFlag xmlns:ma14="http://schemas.microsoft.com/office/mac/drawingml/2011/main" xmlns="" val="1"/>
+              <ma14:placeholderFlag xmlns="" xmlns:ma14="http://schemas.microsoft.com/office/mac/drawingml/2011/main" val="1"/>
             </a:ext>
           </a:extLst>
         </p:spPr>
@@ -1421,14 +1421,14 @@
           <a:noFill/>
           <a:extLst>
             <a:ext uri="{909E8E84-426E-40dd-AFC4-6F175D3DCCD1}">
-              <a14:hiddenFill xmlns:a14="http://schemas.microsoft.com/office/drawing/2010/main" xmlns="">
+              <a14:hiddenFill xmlns="" xmlns:a14="http://schemas.microsoft.com/office/drawing/2010/main">
                 <a:solidFill>
                   <a:srgbClr val="FFFFFF"/>
                 </a:solidFill>
               </a14:hiddenFill>
             </a:ext>
             <a:ext uri="{91240B29-F687-4f45-9708-019B960494DF}">
-              <a14:hiddenLine xmlns:a14="http://schemas.microsoft.com/office/drawing/2010/main" xmlns="" w="9525">
+              <a14:hiddenLine xmlns="" xmlns:a14="http://schemas.microsoft.com/office/drawing/2010/main" w="9525">
                 <a:solidFill>
                   <a:srgbClr val="000000"/>
                 </a:solidFill>
@@ -1582,14 +1582,14 @@
           <a:noFill/>
           <a:extLst>
             <a:ext uri="{909E8E84-426E-40dd-AFC4-6F175D3DCCD1}">
-              <a14:hiddenFill xmlns:a14="http://schemas.microsoft.com/office/drawing/2010/main" xmlns="">
+              <a14:hiddenFill xmlns="" xmlns:a14="http://schemas.microsoft.com/office/drawing/2010/main">
                 <a:solidFill>
                   <a:srgbClr val="FFFFFF"/>
                 </a:solidFill>
               </a14:hiddenFill>
             </a:ext>
             <a:ext uri="{91240B29-F687-4f45-9708-019B960494DF}">
-              <a14:hiddenLine xmlns:a14="http://schemas.microsoft.com/office/drawing/2010/main" xmlns="" w="9525">
+              <a14:hiddenLine xmlns="" xmlns:a14="http://schemas.microsoft.com/office/drawing/2010/main" w="9525">
                 <a:solidFill>
                   <a:srgbClr val="000000"/>
                 </a:solidFill>
@@ -1743,14 +1743,14 @@
           <a:noFill/>
           <a:extLst>
             <a:ext uri="{909E8E84-426E-40dd-AFC4-6F175D3DCCD1}">
-              <a14:hiddenFill xmlns:a14="http://schemas.microsoft.com/office/drawing/2010/main" xmlns="">
+              <a14:hiddenFill xmlns="" xmlns:a14="http://schemas.microsoft.com/office/drawing/2010/main">
                 <a:solidFill>
                   <a:srgbClr val="FFFFFF"/>
                 </a:solidFill>
               </a14:hiddenFill>
             </a:ext>
             <a:ext uri="{91240B29-F687-4f45-9708-019B960494DF}">
-              <a14:hiddenLine xmlns:a14="http://schemas.microsoft.com/office/drawing/2010/main" xmlns="" w="9525">
+              <a14:hiddenLine xmlns="" xmlns:a14="http://schemas.microsoft.com/office/drawing/2010/main" w="9525">
                 <a:solidFill>
                   <a:srgbClr val="000000"/>
                 </a:solidFill>
@@ -1942,14 +1942,14 @@
           <a:noFill/>
           <a:extLst>
             <a:ext uri="{909E8E84-426E-40dd-AFC4-6F175D3DCCD1}">
-              <a14:hiddenFill xmlns:a14="http://schemas.microsoft.com/office/drawing/2010/main" xmlns="">
+              <a14:hiddenFill xmlns="" xmlns:a14="http://schemas.microsoft.com/office/drawing/2010/main">
                 <a:solidFill>
                   <a:srgbClr val="FFFFFF"/>
                 </a:solidFill>
               </a14:hiddenFill>
             </a:ext>
             <a:ext uri="{91240B29-F687-4f45-9708-019B960494DF}">
-              <a14:hiddenLine xmlns:a14="http://schemas.microsoft.com/office/drawing/2010/main" xmlns="" w="9525">
+              <a14:hiddenLine xmlns="" xmlns:a14="http://schemas.microsoft.com/office/drawing/2010/main" w="9525">
                 <a:solidFill>
                   <a:srgbClr val="000000"/>
                 </a:solidFill>
@@ -1959,7 +1959,7 @@
               </a14:hiddenLine>
             </a:ext>
             <a:ext uri="{AF507438-7753-43e0-B8FC-AC1667EBCBE1}">
-              <a14:hiddenEffects xmlns:a14="http://schemas.microsoft.com/office/drawing/2010/main" xmlns="">
+              <a14:hiddenEffects xmlns="" xmlns:a14="http://schemas.microsoft.com/office/drawing/2010/main">
                 <a:effectLst>
                   <a:outerShdw dist="35921" dir="2700000" algn="ctr" rotWithShape="0">
                     <a:srgbClr val="808080"/>
@@ -1968,10 +1968,10 @@
               </a14:hiddenEffects>
             </a:ext>
             <a:ext uri="{53640926-AAD7-44d8-BBD7-CCE9431645EC}">
-              <a14:shadowObscured xmlns:a14="http://schemas.microsoft.com/office/drawing/2010/main" xmlns="" val="1"/>
+              <a14:shadowObscured xmlns="" xmlns:a14="http://schemas.microsoft.com/office/drawing/2010/main" val="1"/>
             </a:ext>
             <a:ext uri="{FAA26D3D-D897-4be2-8F04-BA451C77F1D7}">
-              <ma14:placeholderFlag xmlns:ma14="http://schemas.microsoft.com/office/mac/drawingml/2011/main" xmlns="" val="1"/>
+              <ma14:placeholderFlag xmlns="" xmlns:ma14="http://schemas.microsoft.com/office/mac/drawingml/2011/main" val="1"/>
             </a:ext>
           </a:extLst>
         </p:spPr>
@@ -2031,14 +2031,14 @@
           <a:noFill/>
           <a:extLst>
             <a:ext uri="{909E8E84-426E-40dd-AFC4-6F175D3DCCD1}">
-              <a14:hiddenFill xmlns:a14="http://schemas.microsoft.com/office/drawing/2010/main" xmlns="">
+              <a14:hiddenFill xmlns="" xmlns:a14="http://schemas.microsoft.com/office/drawing/2010/main">
                 <a:solidFill>
                   <a:srgbClr val="FFFFFF"/>
                 </a:solidFill>
               </a14:hiddenFill>
             </a:ext>
             <a:ext uri="{91240B29-F687-4f45-9708-019B960494DF}">
-              <a14:hiddenLine xmlns:a14="http://schemas.microsoft.com/office/drawing/2010/main" xmlns="" w="9525">
+              <a14:hiddenLine xmlns="" xmlns:a14="http://schemas.microsoft.com/office/drawing/2010/main" w="9525">
                 <a:solidFill>
                   <a:srgbClr val="000000"/>
                 </a:solidFill>
@@ -2186,14 +2186,14 @@
           <a:noFill/>
           <a:extLst>
             <a:ext uri="{909E8E84-426E-40dd-AFC4-6F175D3DCCD1}">
-              <a14:hiddenFill xmlns:a14="http://schemas.microsoft.com/office/drawing/2010/main" xmlns="">
+              <a14:hiddenFill xmlns="" xmlns:a14="http://schemas.microsoft.com/office/drawing/2010/main">
                 <a:solidFill>
                   <a:srgbClr val="FFFFFF"/>
                 </a:solidFill>
               </a14:hiddenFill>
             </a:ext>
             <a:ext uri="{91240B29-F687-4f45-9708-019B960494DF}">
-              <a14:hiddenLine xmlns:a14="http://schemas.microsoft.com/office/drawing/2010/main" xmlns="" w="9525">
+              <a14:hiddenLine xmlns="" xmlns:a14="http://schemas.microsoft.com/office/drawing/2010/main" w="9525">
                 <a:solidFill>
                   <a:srgbClr val="000000"/>
                 </a:solidFill>
@@ -2341,14 +2341,14 @@
           <a:noFill/>
           <a:extLst>
             <a:ext uri="{909E8E84-426E-40dd-AFC4-6F175D3DCCD1}">
-              <a14:hiddenFill xmlns:a14="http://schemas.microsoft.com/office/drawing/2010/main" xmlns="">
+              <a14:hiddenFill xmlns="" xmlns:a14="http://schemas.microsoft.com/office/drawing/2010/main">
                 <a:solidFill>
                   <a:srgbClr val="FFFFFF"/>
                 </a:solidFill>
               </a14:hiddenFill>
             </a:ext>
             <a:ext uri="{91240B29-F687-4f45-9708-019B960494DF}">
-              <a14:hiddenLine xmlns:a14="http://schemas.microsoft.com/office/drawing/2010/main" xmlns="" w="9525">
+              <a14:hiddenLine xmlns="" xmlns:a14="http://schemas.microsoft.com/office/drawing/2010/main" w="9525">
                 <a:solidFill>
                   <a:srgbClr val="000000"/>
                 </a:solidFill>
@@ -2528,14 +2528,14 @@
           <a:noFill/>
           <a:extLst>
             <a:ext uri="{909E8E84-426E-40dd-AFC4-6F175D3DCCD1}">
-              <a14:hiddenFill xmlns:a14="http://schemas.microsoft.com/office/drawing/2010/main" xmlns="">
+              <a14:hiddenFill xmlns="" xmlns:a14="http://schemas.microsoft.com/office/drawing/2010/main">
                 <a:solidFill>
                   <a:srgbClr val="FFFFFF"/>
                 </a:solidFill>
               </a14:hiddenFill>
             </a:ext>
             <a:ext uri="{91240B29-F687-4f45-9708-019B960494DF}">
-              <a14:hiddenLine xmlns:a14="http://schemas.microsoft.com/office/drawing/2010/main" xmlns="" w="9525">
+              <a14:hiddenLine xmlns="" xmlns:a14="http://schemas.microsoft.com/office/drawing/2010/main" w="9525">
                 <a:solidFill>
                   <a:srgbClr val="000000"/>
                 </a:solidFill>
@@ -2545,7 +2545,7 @@
               </a14:hiddenLine>
             </a:ext>
             <a:ext uri="{AF507438-7753-43e0-B8FC-AC1667EBCBE1}">
-              <a14:hiddenEffects xmlns:a14="http://schemas.microsoft.com/office/drawing/2010/main" xmlns="">
+              <a14:hiddenEffects xmlns="" xmlns:a14="http://schemas.microsoft.com/office/drawing/2010/main">
                 <a:effectLst>
                   <a:outerShdw dist="35921" dir="2700000" algn="ctr" rotWithShape="0">
                     <a:srgbClr val="808080"/>
@@ -2554,10 +2554,10 @@
               </a14:hiddenEffects>
             </a:ext>
             <a:ext uri="{53640926-AAD7-44d8-BBD7-CCE9431645EC}">
-              <a14:shadowObscured xmlns:a14="http://schemas.microsoft.com/office/drawing/2010/main" xmlns="" val="1"/>
+              <a14:shadowObscured xmlns="" xmlns:a14="http://schemas.microsoft.com/office/drawing/2010/main" val="1"/>
             </a:ext>
             <a:ext uri="{FAA26D3D-D897-4be2-8F04-BA451C77F1D7}">
-              <ma14:placeholderFlag xmlns:ma14="http://schemas.microsoft.com/office/mac/drawingml/2011/main" xmlns="" val="1"/>
+              <ma14:placeholderFlag xmlns="" xmlns:ma14="http://schemas.microsoft.com/office/mac/drawingml/2011/main" val="1"/>
             </a:ext>
           </a:extLst>
         </p:spPr>
@@ -2617,14 +2617,14 @@
           <a:noFill/>
           <a:extLst>
             <a:ext uri="{909E8E84-426E-40dd-AFC4-6F175D3DCCD1}">
-              <a14:hiddenFill xmlns:a14="http://schemas.microsoft.com/office/drawing/2010/main" xmlns="">
+              <a14:hiddenFill xmlns="" xmlns:a14="http://schemas.microsoft.com/office/drawing/2010/main">
                 <a:solidFill>
                   <a:srgbClr val="FFFFFF"/>
                 </a:solidFill>
               </a14:hiddenFill>
             </a:ext>
             <a:ext uri="{91240B29-F687-4f45-9708-019B960494DF}">
-              <a14:hiddenLine xmlns:a14="http://schemas.microsoft.com/office/drawing/2010/main" xmlns="" w="9525">
+              <a14:hiddenLine xmlns="" xmlns:a14="http://schemas.microsoft.com/office/drawing/2010/main" w="9525">
                 <a:solidFill>
                   <a:srgbClr val="000000"/>
                 </a:solidFill>
@@ -2772,14 +2772,14 @@
           <a:noFill/>
           <a:extLst>
             <a:ext uri="{909E8E84-426E-40dd-AFC4-6F175D3DCCD1}">
-              <a14:hiddenFill xmlns:a14="http://schemas.microsoft.com/office/drawing/2010/main" xmlns="">
+              <a14:hiddenFill xmlns="" xmlns:a14="http://schemas.microsoft.com/office/drawing/2010/main">
                 <a:solidFill>
                   <a:srgbClr val="FFFFFF"/>
                 </a:solidFill>
               </a14:hiddenFill>
             </a:ext>
             <a:ext uri="{91240B29-F687-4f45-9708-019B960494DF}">
-              <a14:hiddenLine xmlns:a14="http://schemas.microsoft.com/office/drawing/2010/main" xmlns="" w="9525">
+              <a14:hiddenLine xmlns="" xmlns:a14="http://schemas.microsoft.com/office/drawing/2010/main" w="9525">
                 <a:solidFill>
                   <a:srgbClr val="000000"/>
                 </a:solidFill>
@@ -2927,14 +2927,14 @@
           <a:noFill/>
           <a:extLst>
             <a:ext uri="{909E8E84-426E-40dd-AFC4-6F175D3DCCD1}">
-              <a14:hiddenFill xmlns:a14="http://schemas.microsoft.com/office/drawing/2010/main" xmlns="">
+              <a14:hiddenFill xmlns="" xmlns:a14="http://schemas.microsoft.com/office/drawing/2010/main">
                 <a:solidFill>
                   <a:srgbClr val="FFFFFF"/>
                 </a:solidFill>
               </a14:hiddenFill>
             </a:ext>
             <a:ext uri="{91240B29-F687-4f45-9708-019B960494DF}">
-              <a14:hiddenLine xmlns:a14="http://schemas.microsoft.com/office/drawing/2010/main" xmlns="" w="9525">
+              <a14:hiddenLine xmlns="" xmlns:a14="http://schemas.microsoft.com/office/drawing/2010/main" w="9525">
                 <a:solidFill>
                   <a:srgbClr val="000000"/>
                 </a:solidFill>
@@ -3106,7 +3106,7 @@
         <p:spPr>
           <a:extLst>
             <a:ext uri="{FAA26D3D-D897-4be2-8F04-BA451C77F1D7}">
-              <ma14:placeholderFlag xmlns:ma14="http://schemas.microsoft.com/office/mac/drawingml/2011/main" xmlns="" val="1"/>
+              <ma14:placeholderFlag xmlns="" xmlns:ma14="http://schemas.microsoft.com/office/mac/drawingml/2011/main" val="1"/>
             </a:ext>
           </a:extLst>
         </p:spPr>
@@ -3168,14 +3168,14 @@
           <a:noFill/>
           <a:extLst>
             <a:ext uri="{909E8E84-426E-40dd-AFC4-6F175D3DCCD1}">
-              <a14:hiddenFill xmlns:a14="http://schemas.microsoft.com/office/drawing/2010/main" xmlns="">
+              <a14:hiddenFill xmlns="" xmlns:a14="http://schemas.microsoft.com/office/drawing/2010/main">
                 <a:solidFill>
                   <a:srgbClr val="FFFFFF"/>
                 </a:solidFill>
               </a14:hiddenFill>
             </a:ext>
             <a:ext uri="{91240B29-F687-4f45-9708-019B960494DF}">
-              <a14:hiddenLine xmlns:a14="http://schemas.microsoft.com/office/drawing/2010/main" xmlns="" w="9525">
+              <a14:hiddenLine xmlns="" xmlns:a14="http://schemas.microsoft.com/office/drawing/2010/main" w="9525">
                 <a:solidFill>
                   <a:srgbClr val="000000"/>
                 </a:solidFill>
@@ -3323,14 +3323,14 @@
           <a:noFill/>
           <a:extLst>
             <a:ext uri="{909E8E84-426E-40dd-AFC4-6F175D3DCCD1}">
-              <a14:hiddenFill xmlns:a14="http://schemas.microsoft.com/office/drawing/2010/main" xmlns="">
+              <a14:hiddenFill xmlns="" xmlns:a14="http://schemas.microsoft.com/office/drawing/2010/main">
                 <a:solidFill>
                   <a:srgbClr val="FFFFFF"/>
                 </a:solidFill>
               </a14:hiddenFill>
             </a:ext>
             <a:ext uri="{91240B29-F687-4f45-9708-019B960494DF}">
-              <a14:hiddenLine xmlns:a14="http://schemas.microsoft.com/office/drawing/2010/main" xmlns="" w="9525">
+              <a14:hiddenLine xmlns="" xmlns:a14="http://schemas.microsoft.com/office/drawing/2010/main" w="9525">
                 <a:solidFill>
                   <a:srgbClr val="000000"/>
                 </a:solidFill>
@@ -3478,14 +3478,14 @@
           <a:noFill/>
           <a:extLst>
             <a:ext uri="{909E8E84-426E-40dd-AFC4-6F175D3DCCD1}">
-              <a14:hiddenFill xmlns:a14="http://schemas.microsoft.com/office/drawing/2010/main" xmlns="">
+              <a14:hiddenFill xmlns="" xmlns:a14="http://schemas.microsoft.com/office/drawing/2010/main">
                 <a:solidFill>
                   <a:srgbClr val="FFFFFF"/>
                 </a:solidFill>
               </a14:hiddenFill>
             </a:ext>
             <a:ext uri="{91240B29-F687-4f45-9708-019B960494DF}">
-              <a14:hiddenLine xmlns:a14="http://schemas.microsoft.com/office/drawing/2010/main" xmlns="" w="9525">
+              <a14:hiddenLine xmlns="" xmlns:a14="http://schemas.microsoft.com/office/drawing/2010/main" w="9525">
                 <a:solidFill>
                   <a:srgbClr val="000000"/>
                 </a:solidFill>
@@ -3657,7 +3657,7 @@
         <p:spPr>
           <a:extLst>
             <a:ext uri="{FAA26D3D-D897-4be2-8F04-BA451C77F1D7}">
-              <ma14:placeholderFlag xmlns:ma14="http://schemas.microsoft.com/office/mac/drawingml/2011/main" xmlns="" val="1"/>
+              <ma14:placeholderFlag xmlns="" xmlns:ma14="http://schemas.microsoft.com/office/mac/drawingml/2011/main" val="1"/>
             </a:ext>
           </a:extLst>
         </p:spPr>
@@ -3719,14 +3719,14 @@
           <a:noFill/>
           <a:extLst>
             <a:ext uri="{909E8E84-426E-40dd-AFC4-6F175D3DCCD1}">
-              <a14:hiddenFill xmlns:a14="http://schemas.microsoft.com/office/drawing/2010/main" xmlns="">
+              <a14:hiddenFill xmlns="" xmlns:a14="http://schemas.microsoft.com/office/drawing/2010/main">
                 <a:solidFill>
                   <a:srgbClr val="FFFFFF"/>
                 </a:solidFill>
               </a14:hiddenFill>
             </a:ext>
             <a:ext uri="{91240B29-F687-4f45-9708-019B960494DF}">
-              <a14:hiddenLine xmlns:a14="http://schemas.microsoft.com/office/drawing/2010/main" xmlns="" w="9525">
+              <a14:hiddenLine xmlns="" xmlns:a14="http://schemas.microsoft.com/office/drawing/2010/main" w="9525">
                 <a:solidFill>
                   <a:srgbClr val="000000"/>
                 </a:solidFill>
@@ -3874,14 +3874,14 @@
           <a:noFill/>
           <a:extLst>
             <a:ext uri="{909E8E84-426E-40dd-AFC4-6F175D3DCCD1}">
-              <a14:hiddenFill xmlns:a14="http://schemas.microsoft.com/office/drawing/2010/main" xmlns="">
+              <a14:hiddenFill xmlns="" xmlns:a14="http://schemas.microsoft.com/office/drawing/2010/main">
                 <a:solidFill>
                   <a:srgbClr val="FFFFFF"/>
                 </a:solidFill>
               </a14:hiddenFill>
             </a:ext>
             <a:ext uri="{91240B29-F687-4f45-9708-019B960494DF}">
-              <a14:hiddenLine xmlns:a14="http://schemas.microsoft.com/office/drawing/2010/main" xmlns="" w="9525">
+              <a14:hiddenLine xmlns="" xmlns:a14="http://schemas.microsoft.com/office/drawing/2010/main" w="9525">
                 <a:solidFill>
                   <a:srgbClr val="000000"/>
                 </a:solidFill>
@@ -4029,14 +4029,14 @@
           <a:noFill/>
           <a:extLst>
             <a:ext uri="{909E8E84-426E-40dd-AFC4-6F175D3DCCD1}">
-              <a14:hiddenFill xmlns:a14="http://schemas.microsoft.com/office/drawing/2010/main" xmlns="">
+              <a14:hiddenFill xmlns="" xmlns:a14="http://schemas.microsoft.com/office/drawing/2010/main">
                 <a:solidFill>
                   <a:srgbClr val="FFFFFF"/>
                 </a:solidFill>
               </a14:hiddenFill>
             </a:ext>
             <a:ext uri="{91240B29-F687-4f45-9708-019B960494DF}">
-              <a14:hiddenLine xmlns:a14="http://schemas.microsoft.com/office/drawing/2010/main" xmlns="" w="9525">
+              <a14:hiddenLine xmlns="" xmlns:a14="http://schemas.microsoft.com/office/drawing/2010/main" w="9525">
                 <a:solidFill>
                   <a:srgbClr val="000000"/>
                 </a:solidFill>
@@ -4208,7 +4208,7 @@
         <p:spPr>
           <a:extLst>
             <a:ext uri="{FAA26D3D-D897-4be2-8F04-BA451C77F1D7}">
-              <ma14:placeholderFlag xmlns:ma14="http://schemas.microsoft.com/office/mac/drawingml/2011/main" xmlns="" val="1"/>
+              <ma14:placeholderFlag xmlns="" xmlns:ma14="http://schemas.microsoft.com/office/mac/drawingml/2011/main" val="1"/>
             </a:ext>
           </a:extLst>
         </p:spPr>
@@ -4270,14 +4270,14 @@
           <a:noFill/>
           <a:extLst>
             <a:ext uri="{909E8E84-426E-40dd-AFC4-6F175D3DCCD1}">
-              <a14:hiddenFill xmlns:a14="http://schemas.microsoft.com/office/drawing/2010/main" xmlns="">
+              <a14:hiddenFill xmlns="" xmlns:a14="http://schemas.microsoft.com/office/drawing/2010/main">
                 <a:solidFill>
                   <a:srgbClr val="FFFFFF"/>
                 </a:solidFill>
               </a14:hiddenFill>
             </a:ext>
             <a:ext uri="{91240B29-F687-4f45-9708-019B960494DF}">
-              <a14:hiddenLine xmlns:a14="http://schemas.microsoft.com/office/drawing/2010/main" xmlns="" w="9525">
+              <a14:hiddenLine xmlns="" xmlns:a14="http://schemas.microsoft.com/office/drawing/2010/main" w="9525">
                 <a:solidFill>
                   <a:srgbClr val="000000"/>
                 </a:solidFill>
@@ -4425,14 +4425,14 @@
           <a:noFill/>
           <a:extLst>
             <a:ext uri="{909E8E84-426E-40dd-AFC4-6F175D3DCCD1}">
-              <a14:hiddenFill xmlns:a14="http://schemas.microsoft.com/office/drawing/2010/main" xmlns="">
+              <a14:hiddenFill xmlns="" xmlns:a14="http://schemas.microsoft.com/office/drawing/2010/main">
                 <a:solidFill>
                   <a:srgbClr val="FFFFFF"/>
                 </a:solidFill>
               </a14:hiddenFill>
             </a:ext>
             <a:ext uri="{91240B29-F687-4f45-9708-019B960494DF}">
-              <a14:hiddenLine xmlns:a14="http://schemas.microsoft.com/office/drawing/2010/main" xmlns="" w="9525">
+              <a14:hiddenLine xmlns="" xmlns:a14="http://schemas.microsoft.com/office/drawing/2010/main" w="9525">
                 <a:solidFill>
                   <a:srgbClr val="000000"/>
                 </a:solidFill>
@@ -4580,14 +4580,14 @@
           <a:noFill/>
           <a:extLst>
             <a:ext uri="{909E8E84-426E-40dd-AFC4-6F175D3DCCD1}">
-              <a14:hiddenFill xmlns:a14="http://schemas.microsoft.com/office/drawing/2010/main" xmlns="">
+              <a14:hiddenFill xmlns="" xmlns:a14="http://schemas.microsoft.com/office/drawing/2010/main">
                 <a:solidFill>
                   <a:srgbClr val="FFFFFF"/>
                 </a:solidFill>
               </a14:hiddenFill>
             </a:ext>
             <a:ext uri="{91240B29-F687-4f45-9708-019B960494DF}">
-              <a14:hiddenLine xmlns:a14="http://schemas.microsoft.com/office/drawing/2010/main" xmlns="" w="9525">
+              <a14:hiddenLine xmlns="" xmlns:a14="http://schemas.microsoft.com/office/drawing/2010/main" w="9525">
                 <a:solidFill>
                   <a:srgbClr val="000000"/>
                 </a:solidFill>
@@ -4759,7 +4759,7 @@
         <p:spPr>
           <a:extLst>
             <a:ext uri="{FAA26D3D-D897-4be2-8F04-BA451C77F1D7}">
-              <ma14:placeholderFlag xmlns:ma14="http://schemas.microsoft.com/office/mac/drawingml/2011/main" xmlns="" val="1"/>
+              <ma14:placeholderFlag xmlns="" xmlns:ma14="http://schemas.microsoft.com/office/mac/drawingml/2011/main" val="1"/>
             </a:ext>
           </a:extLst>
         </p:spPr>
@@ -4821,14 +4821,14 @@
           <a:noFill/>
           <a:extLst>
             <a:ext uri="{909E8E84-426E-40dd-AFC4-6F175D3DCCD1}">
-              <a14:hiddenFill xmlns:a14="http://schemas.microsoft.com/office/drawing/2010/main" xmlns="">
+              <a14:hiddenFill xmlns="" xmlns:a14="http://schemas.microsoft.com/office/drawing/2010/main">
                 <a:solidFill>
                   <a:srgbClr val="FFFFFF"/>
                 </a:solidFill>
               </a14:hiddenFill>
             </a:ext>
             <a:ext uri="{91240B29-F687-4f45-9708-019B960494DF}">
-              <a14:hiddenLine xmlns:a14="http://schemas.microsoft.com/office/drawing/2010/main" xmlns="" w="9525">
+              <a14:hiddenLine xmlns="" xmlns:a14="http://schemas.microsoft.com/office/drawing/2010/main" w="9525">
                 <a:solidFill>
                   <a:srgbClr val="000000"/>
                 </a:solidFill>
@@ -4976,14 +4976,14 @@
           <a:noFill/>
           <a:extLst>
             <a:ext uri="{909E8E84-426E-40dd-AFC4-6F175D3DCCD1}">
-              <a14:hiddenFill xmlns:a14="http://schemas.microsoft.com/office/drawing/2010/main" xmlns="">
+              <a14:hiddenFill xmlns="" xmlns:a14="http://schemas.microsoft.com/office/drawing/2010/main">
                 <a:solidFill>
                   <a:srgbClr val="FFFFFF"/>
                 </a:solidFill>
               </a14:hiddenFill>
             </a:ext>
             <a:ext uri="{91240B29-F687-4f45-9708-019B960494DF}">
-              <a14:hiddenLine xmlns:a14="http://schemas.microsoft.com/office/drawing/2010/main" xmlns="" w="9525">
+              <a14:hiddenLine xmlns="" xmlns:a14="http://schemas.microsoft.com/office/drawing/2010/main" w="9525">
                 <a:solidFill>
                   <a:srgbClr val="000000"/>
                 </a:solidFill>
@@ -5131,14 +5131,14 @@
           <a:noFill/>
           <a:extLst>
             <a:ext uri="{909E8E84-426E-40dd-AFC4-6F175D3DCCD1}">
-              <a14:hiddenFill xmlns:a14="http://schemas.microsoft.com/office/drawing/2010/main" xmlns="">
+              <a14:hiddenFill xmlns="" xmlns:a14="http://schemas.microsoft.com/office/drawing/2010/main">
                 <a:solidFill>
                   <a:srgbClr val="FFFFFF"/>
                 </a:solidFill>
               </a14:hiddenFill>
             </a:ext>
             <a:ext uri="{91240B29-F687-4f45-9708-019B960494DF}">
-              <a14:hiddenLine xmlns:a14="http://schemas.microsoft.com/office/drawing/2010/main" xmlns="" w="9525">
+              <a14:hiddenLine xmlns="" xmlns:a14="http://schemas.microsoft.com/office/drawing/2010/main" w="9525">
                 <a:solidFill>
                   <a:srgbClr val="000000"/>
                 </a:solidFill>
@@ -5310,7 +5310,7 @@
         <p:spPr>
           <a:extLst>
             <a:ext uri="{FAA26D3D-D897-4be2-8F04-BA451C77F1D7}">
-              <ma14:placeholderFlag xmlns:ma14="http://schemas.microsoft.com/office/mac/drawingml/2011/main" xmlns="" val="1"/>
+              <ma14:placeholderFlag xmlns="" xmlns:ma14="http://schemas.microsoft.com/office/mac/drawingml/2011/main" val="1"/>
             </a:ext>
           </a:extLst>
         </p:spPr>
@@ -5372,14 +5372,14 @@
           <a:noFill/>
           <a:extLst>
             <a:ext uri="{909E8E84-426E-40dd-AFC4-6F175D3DCCD1}">
-              <a14:hiddenFill xmlns:a14="http://schemas.microsoft.com/office/drawing/2010/main" xmlns="">
+              <a14:hiddenFill xmlns="" xmlns:a14="http://schemas.microsoft.com/office/drawing/2010/main">
                 <a:solidFill>
                   <a:srgbClr val="FFFFFF"/>
                 </a:solidFill>
               </a14:hiddenFill>
             </a:ext>
             <a:ext uri="{91240B29-F687-4f45-9708-019B960494DF}">
-              <a14:hiddenLine xmlns:a14="http://schemas.microsoft.com/office/drawing/2010/main" xmlns="" w="9525">
+              <a14:hiddenLine xmlns="" xmlns:a14="http://schemas.microsoft.com/office/drawing/2010/main" w="9525">
                 <a:solidFill>
                   <a:srgbClr val="000000"/>
                 </a:solidFill>
@@ -5527,14 +5527,14 @@
           <a:noFill/>
           <a:extLst>
             <a:ext uri="{909E8E84-426E-40dd-AFC4-6F175D3DCCD1}">
-              <a14:hiddenFill xmlns:a14="http://schemas.microsoft.com/office/drawing/2010/main" xmlns="">
+              <a14:hiddenFill xmlns="" xmlns:a14="http://schemas.microsoft.com/office/drawing/2010/main">
                 <a:solidFill>
                   <a:srgbClr val="FFFFFF"/>
                 </a:solidFill>
               </a14:hiddenFill>
             </a:ext>
             <a:ext uri="{91240B29-F687-4f45-9708-019B960494DF}">
-              <a14:hiddenLine xmlns:a14="http://schemas.microsoft.com/office/drawing/2010/main" xmlns="" w="9525">
+              <a14:hiddenLine xmlns="" xmlns:a14="http://schemas.microsoft.com/office/drawing/2010/main" w="9525">
                 <a:solidFill>
                   <a:srgbClr val="000000"/>
                 </a:solidFill>
@@ -5682,14 +5682,14 @@
           <a:noFill/>
           <a:extLst>
             <a:ext uri="{909E8E84-426E-40dd-AFC4-6F175D3DCCD1}">
-              <a14:hiddenFill xmlns:a14="http://schemas.microsoft.com/office/drawing/2010/main" xmlns="">
+              <a14:hiddenFill xmlns="" xmlns:a14="http://schemas.microsoft.com/office/drawing/2010/main">
                 <a:solidFill>
                   <a:srgbClr val="FFFFFF"/>
                 </a:solidFill>
               </a14:hiddenFill>
             </a:ext>
             <a:ext uri="{91240B29-F687-4f45-9708-019B960494DF}">
-              <a14:hiddenLine xmlns:a14="http://schemas.microsoft.com/office/drawing/2010/main" xmlns="" w="9525">
+              <a14:hiddenLine xmlns="" xmlns:a14="http://schemas.microsoft.com/office/drawing/2010/main" w="9525">
                 <a:solidFill>
                   <a:srgbClr val="000000"/>
                 </a:solidFill>
@@ -5861,7 +5861,7 @@
         <p:spPr>
           <a:extLst>
             <a:ext uri="{FAA26D3D-D897-4be2-8F04-BA451C77F1D7}">
-              <ma14:placeholderFlag xmlns:ma14="http://schemas.microsoft.com/office/mac/drawingml/2011/main" xmlns="" val="1"/>
+              <ma14:placeholderFlag xmlns="" xmlns:ma14="http://schemas.microsoft.com/office/mac/drawingml/2011/main" val="1"/>
             </a:ext>
           </a:extLst>
         </p:spPr>
@@ -5935,14 +5935,14 @@
           <a:noFill/>
           <a:extLst>
             <a:ext uri="{909E8E84-426E-40dd-AFC4-6F175D3DCCD1}">
-              <a14:hiddenFill xmlns="" xmlns:a14="http://schemas.microsoft.com/office/drawing/2010/main">
+              <a14:hiddenFill xmlns:a14="http://schemas.microsoft.com/office/drawing/2010/main" xmlns="">
                 <a:solidFill>
                   <a:srgbClr val="FFFFFF"/>
                 </a:solidFill>
               </a14:hiddenFill>
             </a:ext>
             <a:ext uri="{91240B29-F687-4f45-9708-019B960494DF}">
-              <a14:hiddenLine xmlns="" xmlns:a14="http://schemas.microsoft.com/office/drawing/2010/main" w="9525">
+              <a14:hiddenLine xmlns:a14="http://schemas.microsoft.com/office/drawing/2010/main" xmlns="" w="9525">
                 <a:solidFill>
                   <a:srgbClr val="000000"/>
                 </a:solidFill>
@@ -6096,14 +6096,14 @@
           <a:noFill/>
           <a:extLst>
             <a:ext uri="{909E8E84-426E-40dd-AFC4-6F175D3DCCD1}">
-              <a14:hiddenFill xmlns="" xmlns:a14="http://schemas.microsoft.com/office/drawing/2010/main">
+              <a14:hiddenFill xmlns:a14="http://schemas.microsoft.com/office/drawing/2010/main" xmlns="">
                 <a:solidFill>
                   <a:srgbClr val="FFFFFF"/>
                 </a:solidFill>
               </a14:hiddenFill>
             </a:ext>
             <a:ext uri="{91240B29-F687-4f45-9708-019B960494DF}">
-              <a14:hiddenLine xmlns="" xmlns:a14="http://schemas.microsoft.com/office/drawing/2010/main" w="9525">
+              <a14:hiddenLine xmlns:a14="http://schemas.microsoft.com/office/drawing/2010/main" xmlns="" w="9525">
                 <a:solidFill>
                   <a:srgbClr val="000000"/>
                 </a:solidFill>
@@ -6257,14 +6257,14 @@
           <a:noFill/>
           <a:extLst>
             <a:ext uri="{909E8E84-426E-40dd-AFC4-6F175D3DCCD1}">
-              <a14:hiddenFill xmlns="" xmlns:a14="http://schemas.microsoft.com/office/drawing/2010/main">
+              <a14:hiddenFill xmlns:a14="http://schemas.microsoft.com/office/drawing/2010/main" xmlns="">
                 <a:solidFill>
                   <a:srgbClr val="FFFFFF"/>
                 </a:solidFill>
               </a14:hiddenFill>
             </a:ext>
             <a:ext uri="{91240B29-F687-4f45-9708-019B960494DF}">
-              <a14:hiddenLine xmlns="" xmlns:a14="http://schemas.microsoft.com/office/drawing/2010/main" w="9525">
+              <a14:hiddenLine xmlns:a14="http://schemas.microsoft.com/office/drawing/2010/main" xmlns="" w="9525">
                 <a:solidFill>
                   <a:srgbClr val="000000"/>
                 </a:solidFill>
@@ -6448,7 +6448,7 @@
         <p:spPr>
           <a:extLst>
             <a:ext uri="{FAA26D3D-D897-4be2-8F04-BA451C77F1D7}">
-              <ma14:placeholderFlag xmlns="" xmlns:ma14="http://schemas.microsoft.com/office/mac/drawingml/2011/main" val="1"/>
+              <ma14:placeholderFlag xmlns:ma14="http://schemas.microsoft.com/office/mac/drawingml/2011/main" xmlns="" val="1"/>
             </a:ext>
           </a:extLst>
         </p:spPr>
@@ -6510,14 +6510,14 @@
           <a:noFill/>
           <a:extLst>
             <a:ext uri="{909E8E84-426E-40dd-AFC4-6F175D3DCCD1}">
-              <a14:hiddenFill xmlns:a14="http://schemas.microsoft.com/office/drawing/2010/main" xmlns="">
+              <a14:hiddenFill xmlns="" xmlns:a14="http://schemas.microsoft.com/office/drawing/2010/main">
                 <a:solidFill>
                   <a:srgbClr val="FFFFFF"/>
                 </a:solidFill>
               </a14:hiddenFill>
             </a:ext>
             <a:ext uri="{91240B29-F687-4f45-9708-019B960494DF}">
-              <a14:hiddenLine xmlns:a14="http://schemas.microsoft.com/office/drawing/2010/main" xmlns="" w="9525">
+              <a14:hiddenLine xmlns="" xmlns:a14="http://schemas.microsoft.com/office/drawing/2010/main" w="9525">
                 <a:solidFill>
                   <a:srgbClr val="000000"/>
                 </a:solidFill>
@@ -6665,14 +6665,14 @@
           <a:noFill/>
           <a:extLst>
             <a:ext uri="{909E8E84-426E-40dd-AFC4-6F175D3DCCD1}">
-              <a14:hiddenFill xmlns:a14="http://schemas.microsoft.com/office/drawing/2010/main" xmlns="">
+              <a14:hiddenFill xmlns="" xmlns:a14="http://schemas.microsoft.com/office/drawing/2010/main">
                 <a:solidFill>
                   <a:srgbClr val="FFFFFF"/>
                 </a:solidFill>
               </a14:hiddenFill>
             </a:ext>
             <a:ext uri="{91240B29-F687-4f45-9708-019B960494DF}">
-              <a14:hiddenLine xmlns:a14="http://schemas.microsoft.com/office/drawing/2010/main" xmlns="" w="9525">
+              <a14:hiddenLine xmlns="" xmlns:a14="http://schemas.microsoft.com/office/drawing/2010/main" w="9525">
                 <a:solidFill>
                   <a:srgbClr val="000000"/>
                 </a:solidFill>
@@ -6820,14 +6820,14 @@
           <a:noFill/>
           <a:extLst>
             <a:ext uri="{909E8E84-426E-40dd-AFC4-6F175D3DCCD1}">
-              <a14:hiddenFill xmlns:a14="http://schemas.microsoft.com/office/drawing/2010/main" xmlns="">
+              <a14:hiddenFill xmlns="" xmlns:a14="http://schemas.microsoft.com/office/drawing/2010/main">
                 <a:solidFill>
                   <a:srgbClr val="FFFFFF"/>
                 </a:solidFill>
               </a14:hiddenFill>
             </a:ext>
             <a:ext uri="{91240B29-F687-4f45-9708-019B960494DF}">
-              <a14:hiddenLine xmlns:a14="http://schemas.microsoft.com/office/drawing/2010/main" xmlns="" w="9525">
+              <a14:hiddenLine xmlns="" xmlns:a14="http://schemas.microsoft.com/office/drawing/2010/main" w="9525">
                 <a:solidFill>
                   <a:srgbClr val="000000"/>
                 </a:solidFill>
@@ -6999,7 +6999,7 @@
         <p:spPr>
           <a:extLst>
             <a:ext uri="{FAA26D3D-D897-4be2-8F04-BA451C77F1D7}">
-              <ma14:placeholderFlag xmlns:ma14="http://schemas.microsoft.com/office/mac/drawingml/2011/main" xmlns="" val="1"/>
+              <ma14:placeholderFlag xmlns="" xmlns:ma14="http://schemas.microsoft.com/office/mac/drawingml/2011/main" val="1"/>
             </a:ext>
           </a:extLst>
         </p:spPr>
@@ -7061,14 +7061,14 @@
           <a:noFill/>
           <a:extLst>
             <a:ext uri="{909E8E84-426E-40dd-AFC4-6F175D3DCCD1}">
-              <a14:hiddenFill xmlns:a14="http://schemas.microsoft.com/office/drawing/2010/main" xmlns="">
+              <a14:hiddenFill xmlns="" xmlns:a14="http://schemas.microsoft.com/office/drawing/2010/main">
                 <a:solidFill>
                   <a:srgbClr val="FFFFFF"/>
                 </a:solidFill>
               </a14:hiddenFill>
             </a:ext>
             <a:ext uri="{91240B29-F687-4f45-9708-019B960494DF}">
-              <a14:hiddenLine xmlns:a14="http://schemas.microsoft.com/office/drawing/2010/main" xmlns="" w="9525">
+              <a14:hiddenLine xmlns="" xmlns:a14="http://schemas.microsoft.com/office/drawing/2010/main" w="9525">
                 <a:solidFill>
                   <a:srgbClr val="000000"/>
                 </a:solidFill>
@@ -7216,14 +7216,14 @@
           <a:noFill/>
           <a:extLst>
             <a:ext uri="{909E8E84-426E-40dd-AFC4-6F175D3DCCD1}">
-              <a14:hiddenFill xmlns:a14="http://schemas.microsoft.com/office/drawing/2010/main" xmlns="">
+              <a14:hiddenFill xmlns="" xmlns:a14="http://schemas.microsoft.com/office/drawing/2010/main">
                 <a:solidFill>
                   <a:srgbClr val="FFFFFF"/>
                 </a:solidFill>
               </a14:hiddenFill>
             </a:ext>
             <a:ext uri="{91240B29-F687-4f45-9708-019B960494DF}">
-              <a14:hiddenLine xmlns:a14="http://schemas.microsoft.com/office/drawing/2010/main" xmlns="" w="9525">
+              <a14:hiddenLine xmlns="" xmlns:a14="http://schemas.microsoft.com/office/drawing/2010/main" w="9525">
                 <a:solidFill>
                   <a:srgbClr val="000000"/>
                 </a:solidFill>
@@ -7371,14 +7371,14 @@
           <a:noFill/>
           <a:extLst>
             <a:ext uri="{909E8E84-426E-40dd-AFC4-6F175D3DCCD1}">
-              <a14:hiddenFill xmlns:a14="http://schemas.microsoft.com/office/drawing/2010/main" xmlns="">
+              <a14:hiddenFill xmlns="" xmlns:a14="http://schemas.microsoft.com/office/drawing/2010/main">
                 <a:solidFill>
                   <a:srgbClr val="FFFFFF"/>
                 </a:solidFill>
               </a14:hiddenFill>
             </a:ext>
             <a:ext uri="{91240B29-F687-4f45-9708-019B960494DF}">
-              <a14:hiddenLine xmlns:a14="http://schemas.microsoft.com/office/drawing/2010/main" xmlns="" w="9525">
+              <a14:hiddenLine xmlns="" xmlns:a14="http://schemas.microsoft.com/office/drawing/2010/main" w="9525">
                 <a:solidFill>
                   <a:srgbClr val="000000"/>
                 </a:solidFill>
@@ -7550,7 +7550,7 @@
         <p:spPr>
           <a:extLst>
             <a:ext uri="{FAA26D3D-D897-4be2-8F04-BA451C77F1D7}">
-              <ma14:placeholderFlag xmlns:ma14="http://schemas.microsoft.com/office/mac/drawingml/2011/main" xmlns="" val="1"/>
+              <ma14:placeholderFlag xmlns="" xmlns:ma14="http://schemas.microsoft.com/office/mac/drawingml/2011/main" val="1"/>
             </a:ext>
           </a:extLst>
         </p:spPr>
@@ -7612,14 +7612,14 @@
           <a:noFill/>
           <a:extLst>
             <a:ext uri="{909E8E84-426E-40dd-AFC4-6F175D3DCCD1}">
-              <a14:hiddenFill xmlns:a14="http://schemas.microsoft.com/office/drawing/2010/main" xmlns="">
+              <a14:hiddenFill xmlns="" xmlns:a14="http://schemas.microsoft.com/office/drawing/2010/main">
                 <a:solidFill>
                   <a:srgbClr val="FFFFFF"/>
                 </a:solidFill>
               </a14:hiddenFill>
             </a:ext>
             <a:ext uri="{91240B29-F687-4f45-9708-019B960494DF}">
-              <a14:hiddenLine xmlns:a14="http://schemas.microsoft.com/office/drawing/2010/main" xmlns="" w="9525">
+              <a14:hiddenLine xmlns="" xmlns:a14="http://schemas.microsoft.com/office/drawing/2010/main" w="9525">
                 <a:solidFill>
                   <a:srgbClr val="000000"/>
                 </a:solidFill>
@@ -7767,14 +7767,14 @@
           <a:noFill/>
           <a:extLst>
             <a:ext uri="{909E8E84-426E-40dd-AFC4-6F175D3DCCD1}">
-              <a14:hiddenFill xmlns:a14="http://schemas.microsoft.com/office/drawing/2010/main" xmlns="">
+              <a14:hiddenFill xmlns="" xmlns:a14="http://schemas.microsoft.com/office/drawing/2010/main">
                 <a:solidFill>
                   <a:srgbClr val="FFFFFF"/>
                 </a:solidFill>
               </a14:hiddenFill>
             </a:ext>
             <a:ext uri="{91240B29-F687-4f45-9708-019B960494DF}">
-              <a14:hiddenLine xmlns:a14="http://schemas.microsoft.com/office/drawing/2010/main" xmlns="" w="9525">
+              <a14:hiddenLine xmlns="" xmlns:a14="http://schemas.microsoft.com/office/drawing/2010/main" w="9525">
                 <a:solidFill>
                   <a:srgbClr val="000000"/>
                 </a:solidFill>
@@ -7922,14 +7922,14 @@
           <a:noFill/>
           <a:extLst>
             <a:ext uri="{909E8E84-426E-40dd-AFC4-6F175D3DCCD1}">
-              <a14:hiddenFill xmlns:a14="http://schemas.microsoft.com/office/drawing/2010/main" xmlns="">
+              <a14:hiddenFill xmlns="" xmlns:a14="http://schemas.microsoft.com/office/drawing/2010/main">
                 <a:solidFill>
                   <a:srgbClr val="FFFFFF"/>
                 </a:solidFill>
               </a14:hiddenFill>
             </a:ext>
             <a:ext uri="{91240B29-F687-4f45-9708-019B960494DF}">
-              <a14:hiddenLine xmlns:a14="http://schemas.microsoft.com/office/drawing/2010/main" xmlns="" w="9525">
+              <a14:hiddenLine xmlns="" xmlns:a14="http://schemas.microsoft.com/office/drawing/2010/main" w="9525">
                 <a:solidFill>
                   <a:srgbClr val="000000"/>
                 </a:solidFill>
@@ -8101,7 +8101,7 @@
         <p:spPr>
           <a:extLst>
             <a:ext uri="{FAA26D3D-D897-4be2-8F04-BA451C77F1D7}">
-              <ma14:placeholderFlag xmlns:ma14="http://schemas.microsoft.com/office/mac/drawingml/2011/main" xmlns="" val="1"/>
+              <ma14:placeholderFlag xmlns="" xmlns:ma14="http://schemas.microsoft.com/office/mac/drawingml/2011/main" val="1"/>
             </a:ext>
           </a:extLst>
         </p:spPr>
@@ -8163,14 +8163,14 @@
           <a:noFill/>
           <a:extLst>
             <a:ext uri="{909E8E84-426E-40dd-AFC4-6F175D3DCCD1}">
-              <a14:hiddenFill xmlns:a14="http://schemas.microsoft.com/office/drawing/2010/main" xmlns="">
+              <a14:hiddenFill xmlns="" xmlns:a14="http://schemas.microsoft.com/office/drawing/2010/main">
                 <a:solidFill>
                   <a:srgbClr val="FFFFFF"/>
                 </a:solidFill>
               </a14:hiddenFill>
             </a:ext>
             <a:ext uri="{91240B29-F687-4f45-9708-019B960494DF}">
-              <a14:hiddenLine xmlns:a14="http://schemas.microsoft.com/office/drawing/2010/main" xmlns="" w="9525">
+              <a14:hiddenLine xmlns="" xmlns:a14="http://schemas.microsoft.com/office/drawing/2010/main" w="9525">
                 <a:solidFill>
                   <a:srgbClr val="000000"/>
                 </a:solidFill>
@@ -8318,14 +8318,14 @@
           <a:noFill/>
           <a:extLst>
             <a:ext uri="{909E8E84-426E-40dd-AFC4-6F175D3DCCD1}">
-              <a14:hiddenFill xmlns:a14="http://schemas.microsoft.com/office/drawing/2010/main" xmlns="">
+              <a14:hiddenFill xmlns="" xmlns:a14="http://schemas.microsoft.com/office/drawing/2010/main">
                 <a:solidFill>
                   <a:srgbClr val="FFFFFF"/>
                 </a:solidFill>
               </a14:hiddenFill>
             </a:ext>
             <a:ext uri="{91240B29-F687-4f45-9708-019B960494DF}">
-              <a14:hiddenLine xmlns:a14="http://schemas.microsoft.com/office/drawing/2010/main" xmlns="" w="9525">
+              <a14:hiddenLine xmlns="" xmlns:a14="http://schemas.microsoft.com/office/drawing/2010/main" w="9525">
                 <a:solidFill>
                   <a:srgbClr val="000000"/>
                 </a:solidFill>
@@ -8473,14 +8473,14 @@
           <a:noFill/>
           <a:extLst>
             <a:ext uri="{909E8E84-426E-40dd-AFC4-6F175D3DCCD1}">
-              <a14:hiddenFill xmlns:a14="http://schemas.microsoft.com/office/drawing/2010/main" xmlns="">
+              <a14:hiddenFill xmlns="" xmlns:a14="http://schemas.microsoft.com/office/drawing/2010/main">
                 <a:solidFill>
                   <a:srgbClr val="FFFFFF"/>
                 </a:solidFill>
               </a14:hiddenFill>
             </a:ext>
             <a:ext uri="{91240B29-F687-4f45-9708-019B960494DF}">
-              <a14:hiddenLine xmlns:a14="http://schemas.microsoft.com/office/drawing/2010/main" xmlns="" w="9525">
+              <a14:hiddenLine xmlns="" xmlns:a14="http://schemas.microsoft.com/office/drawing/2010/main" w="9525">
                 <a:solidFill>
                   <a:srgbClr val="000000"/>
                 </a:solidFill>
@@ -8660,14 +8660,14 @@
           <a:noFill/>
           <a:extLst>
             <a:ext uri="{909E8E84-426E-40dd-AFC4-6F175D3DCCD1}">
-              <a14:hiddenFill xmlns:a14="http://schemas.microsoft.com/office/drawing/2010/main" xmlns="">
+              <a14:hiddenFill xmlns="" xmlns:a14="http://schemas.microsoft.com/office/drawing/2010/main">
                 <a:solidFill>
                   <a:srgbClr val="FFFFFF"/>
                 </a:solidFill>
               </a14:hiddenFill>
             </a:ext>
             <a:ext uri="{91240B29-F687-4f45-9708-019B960494DF}">
-              <a14:hiddenLine xmlns:a14="http://schemas.microsoft.com/office/drawing/2010/main" xmlns="" w="9525">
+              <a14:hiddenLine xmlns="" xmlns:a14="http://schemas.microsoft.com/office/drawing/2010/main" w="9525">
                 <a:solidFill>
                   <a:srgbClr val="000000"/>
                 </a:solidFill>
@@ -8677,7 +8677,7 @@
               </a14:hiddenLine>
             </a:ext>
             <a:ext uri="{AF507438-7753-43e0-B8FC-AC1667EBCBE1}">
-              <a14:hiddenEffects xmlns:a14="http://schemas.microsoft.com/office/drawing/2010/main" xmlns="">
+              <a14:hiddenEffects xmlns="" xmlns:a14="http://schemas.microsoft.com/office/drawing/2010/main">
                 <a:effectLst>
                   <a:outerShdw dist="35921" dir="2700000" algn="ctr" rotWithShape="0">
                     <a:srgbClr val="808080"/>
@@ -8686,7 +8686,7 @@
               </a14:hiddenEffects>
             </a:ext>
             <a:ext uri="{53640926-AAD7-44d8-BBD7-CCE9431645EC}">
-              <a14:shadowObscured xmlns:a14="http://schemas.microsoft.com/office/drawing/2010/main" xmlns="" val="1"/>
+              <a14:shadowObscured xmlns="" xmlns:a14="http://schemas.microsoft.com/office/drawing/2010/main" val="1"/>
             </a:ext>
           </a:extLst>
         </p:spPr>
@@ -8756,7 +8756,7 @@
           <a:lstStyle/>
           <a:p>
             <a:r>
-              <a:rPr lang="en-US"/>
+              <a:rPr lang="en-GB"/>
               <a:t>Click to edit Master title style</a:t>
             </a:r>
             <a:endParaRPr lang="en-US" dirty="0"/>
@@ -8875,7 +8875,7 @@
           </a:lstStyle>
           <a:p>
             <a:r>
-              <a:rPr lang="en-US"/>
+              <a:rPr lang="en-GB"/>
               <a:t>Click to edit Master subtitle style</a:t>
             </a:r>
             <a:endParaRPr lang="en-US" dirty="0"/>
@@ -8899,7 +8899,7 @@
           <a:p>
             <a:fld id="{C764DE79-268F-4C1A-8933-263129D2AF90}" type="datetimeFigureOut">
               <a:rPr lang="en-US" smtClean="0"/>
-              <a:t>9/16/2025</a:t>
+              <a:t>9/19/25</a:t>
             </a:fld>
             <a:endParaRPr lang="en-US" dirty="0"/>
           </a:p>
@@ -8950,7 +8950,7 @@
     </p:spTree>
     <p:extLst>
       <p:ext uri="{BB962C8B-B14F-4D97-AF65-F5344CB8AC3E}">
-        <p14:creationId xmlns:p14="http://schemas.microsoft.com/office/powerpoint/2010/main" val="1157150146"/>
+        <p14:creationId xmlns:p14="http://schemas.microsoft.com/office/powerpoint/2010/main" val="2563088531"/>
       </p:ext>
     </p:extLst>
   </p:cSld>
@@ -8994,9 +8994,10 @@
           <a:lstStyle/>
           <a:p>
             <a:r>
-              <a:rPr lang="en-US"/>
+              <a:rPr lang="en-GB"/>
               <a:t>Click to edit Master title style</a:t>
             </a:r>
+            <a:endParaRPr lang="en-US"/>
           </a:p>
         </p:txBody>
       </p:sp>
@@ -9017,37 +9018,38 @@
           <a:p>
             <a:pPr lvl="0"/>
             <a:r>
-              <a:rPr lang="en-US"/>
+              <a:rPr lang="en-GB"/>
               <a:t>Click to edit Master text styles</a:t>
             </a:r>
           </a:p>
           <a:p>
             <a:pPr lvl="1"/>
             <a:r>
-              <a:rPr lang="en-US"/>
+              <a:rPr lang="en-GB"/>
               <a:t>Second level</a:t>
             </a:r>
           </a:p>
           <a:p>
             <a:pPr lvl="2"/>
             <a:r>
-              <a:rPr lang="en-US"/>
+              <a:rPr lang="en-GB"/>
               <a:t>Third level</a:t>
             </a:r>
           </a:p>
           <a:p>
             <a:pPr lvl="3"/>
             <a:r>
-              <a:rPr lang="en-US"/>
+              <a:rPr lang="en-GB"/>
               <a:t>Fourth level</a:t>
             </a:r>
           </a:p>
           <a:p>
             <a:pPr lvl="4"/>
             <a:r>
-              <a:rPr lang="en-US"/>
+              <a:rPr lang="en-GB"/>
               <a:t>Fifth level</a:t>
             </a:r>
+            <a:endParaRPr lang="en-US"/>
           </a:p>
         </p:txBody>
       </p:sp>
@@ -9068,7 +9070,7 @@
           <a:p>
             <a:fld id="{C764DE79-268F-4C1A-8933-263129D2AF90}" type="datetimeFigureOut">
               <a:rPr lang="en-US" smtClean="0"/>
-              <a:t>9/16/2025</a:t>
+              <a:t>9/19/25</a:t>
             </a:fld>
             <a:endParaRPr lang="en-US" dirty="0"/>
           </a:p>
@@ -9119,7 +9121,7 @@
     </p:spTree>
     <p:extLst>
       <p:ext uri="{BB962C8B-B14F-4D97-AF65-F5344CB8AC3E}">
-        <p14:creationId xmlns:p14="http://schemas.microsoft.com/office/powerpoint/2010/main" val="1388628586"/>
+        <p14:creationId xmlns:p14="http://schemas.microsoft.com/office/powerpoint/2010/main" val="248822263"/>
       </p:ext>
     </p:extLst>
   </p:cSld>
@@ -9168,9 +9170,10 @@
           <a:lstStyle/>
           <a:p>
             <a:r>
-              <a:rPr lang="en-US"/>
+              <a:rPr lang="en-GB"/>
               <a:t>Click to edit Master title style</a:t>
             </a:r>
+            <a:endParaRPr lang="en-US"/>
           </a:p>
         </p:txBody>
       </p:sp>
@@ -9196,37 +9199,38 @@
           <a:p>
             <a:pPr lvl="0"/>
             <a:r>
-              <a:rPr lang="en-US"/>
+              <a:rPr lang="en-GB"/>
               <a:t>Click to edit Master text styles</a:t>
             </a:r>
           </a:p>
           <a:p>
             <a:pPr lvl="1"/>
             <a:r>
-              <a:rPr lang="en-US"/>
+              <a:rPr lang="en-GB"/>
               <a:t>Second level</a:t>
             </a:r>
           </a:p>
           <a:p>
             <a:pPr lvl="2"/>
             <a:r>
-              <a:rPr lang="en-US"/>
+              <a:rPr lang="en-GB"/>
               <a:t>Third level</a:t>
             </a:r>
           </a:p>
           <a:p>
             <a:pPr lvl="3"/>
             <a:r>
-              <a:rPr lang="en-US"/>
+              <a:rPr lang="en-GB"/>
               <a:t>Fourth level</a:t>
             </a:r>
           </a:p>
           <a:p>
             <a:pPr lvl="4"/>
             <a:r>
-              <a:rPr lang="en-US"/>
+              <a:rPr lang="en-GB"/>
               <a:t>Fifth level</a:t>
             </a:r>
+            <a:endParaRPr lang="en-US"/>
           </a:p>
         </p:txBody>
       </p:sp>
@@ -9247,7 +9251,7 @@
           <a:p>
             <a:fld id="{C764DE79-268F-4C1A-8933-263129D2AF90}" type="datetimeFigureOut">
               <a:rPr lang="en-US" smtClean="0"/>
-              <a:t>9/16/2025</a:t>
+              <a:t>9/19/25</a:t>
             </a:fld>
             <a:endParaRPr lang="en-US" dirty="0"/>
           </a:p>
@@ -9298,7 +9302,7 @@
     </p:spTree>
     <p:extLst>
       <p:ext uri="{BB962C8B-B14F-4D97-AF65-F5344CB8AC3E}">
-        <p14:creationId xmlns:p14="http://schemas.microsoft.com/office/powerpoint/2010/main" val="1011809980"/>
+        <p14:creationId xmlns:p14="http://schemas.microsoft.com/office/powerpoint/2010/main" val="3921653910"/>
       </p:ext>
     </p:extLst>
   </p:cSld>
@@ -9346,7 +9350,7 @@
           <a:lstStyle/>
           <a:p>
             <a:r>
-              <a:rPr lang="en-US"/>
+              <a:rPr lang="en-GB"/>
               <a:t>Click to edit Master title style</a:t>
             </a:r>
             <a:endParaRPr/>
@@ -9374,35 +9378,35 @@
           <a:p>
             <a:pPr lvl="0"/>
             <a:r>
-              <a:rPr lang="en-US"/>
+              <a:rPr lang="en-GB"/>
               <a:t>Click to edit Master text styles</a:t>
             </a:r>
           </a:p>
           <a:p>
             <a:pPr lvl="1"/>
             <a:r>
-              <a:rPr lang="en-US"/>
+              <a:rPr lang="en-GB"/>
               <a:t>Second level</a:t>
             </a:r>
           </a:p>
           <a:p>
             <a:pPr lvl="2"/>
             <a:r>
-              <a:rPr lang="en-US"/>
+              <a:rPr lang="en-GB"/>
               <a:t>Third level</a:t>
             </a:r>
           </a:p>
           <a:p>
             <a:pPr lvl="3"/>
             <a:r>
-              <a:rPr lang="en-US"/>
+              <a:rPr lang="en-GB"/>
               <a:t>Fourth level</a:t>
             </a:r>
           </a:p>
           <a:p>
             <a:pPr lvl="4"/>
             <a:r>
-              <a:rPr lang="en-US"/>
+              <a:rPr lang="en-GB"/>
               <a:t>Fifth level</a:t>
             </a:r>
             <a:endParaRPr/>
@@ -9439,7 +9443,7 @@
     </p:spTree>
     <p:extLst>
       <p:ext uri="{BB962C8B-B14F-4D97-AF65-F5344CB8AC3E}">
-        <p14:creationId xmlns:p14="http://schemas.microsoft.com/office/powerpoint/2010/main" val="1876850764"/>
+        <p14:creationId xmlns:p14="http://schemas.microsoft.com/office/powerpoint/2010/main" val="3246685827"/>
       </p:ext>
     </p:extLst>
   </p:cSld>
@@ -9451,6 +9455,151 @@
 </file>
 
 <file path=ppt/slideLayouts/slideLayout13.xml><?xml version="1.0" encoding="utf-8"?>
+<p:sldLayout xmlns:a="http://schemas.openxmlformats.org/drawingml/2006/main" xmlns:r="http://schemas.openxmlformats.org/officeDocument/2006/relationships" xmlns:p="http://schemas.openxmlformats.org/presentationml/2006/main" showMasterSp="0">
+  <p:cSld name="1_Title Slide">
+    <p:spTree>
+      <p:nvGrpSpPr>
+        <p:cNvPr id="1" name=""/>
+        <p:cNvGrpSpPr/>
+        <p:nvPr/>
+      </p:nvGrpSpPr>
+      <p:grpSpPr>
+        <a:xfrm>
+          <a:off x="0" y="0"/>
+          <a:ext cx="0" cy="0"/>
+          <a:chOff x="0" y="0"/>
+          <a:chExt cx="0" cy="0"/>
+        </a:xfrm>
+      </p:grpSpPr>
+      <p:sp>
+        <p:nvSpPr>
+          <p:cNvPr id="15" name="Title Text"/>
+          <p:cNvSpPr txBox="1">
+            <a:spLocks noGrp="1"/>
+          </p:cNvSpPr>
+          <p:nvPr>
+            <p:ph type="title"/>
+          </p:nvPr>
+        </p:nvSpPr>
+        <p:spPr>
+          <a:xfrm>
+            <a:off x="863600" y="2286000"/>
+            <a:ext cx="10464801" cy="1143001"/>
+          </a:xfrm>
+          <a:prstGeom prst="rect">
+            <a:avLst/>
+          </a:prstGeom>
+        </p:spPr>
+        <p:txBody>
+          <a:bodyPr/>
+          <a:lstStyle/>
+          <a:p>
+            <a:r>
+              <a:rPr lang="en-GB"/>
+              <a:t>Click to edit Master title style</a:t>
+            </a:r>
+            <a:endParaRPr dirty="0"/>
+          </a:p>
+        </p:txBody>
+      </p:sp>
+      <p:sp>
+        <p:nvSpPr>
+          <p:cNvPr id="16" name="Subtitle"/>
+          <p:cNvSpPr txBox="1">
+            <a:spLocks noGrp="1"/>
+          </p:cNvSpPr>
+          <p:nvPr>
+            <p:ph type="body" sz="quarter" idx="22"/>
+          </p:nvPr>
+        </p:nvSpPr>
+        <p:spPr>
+          <a:xfrm>
+            <a:off x="957115" y="3465604"/>
+            <a:ext cx="10134430" cy="846384"/>
+          </a:xfrm>
+          <a:prstGeom prst="rect">
+            <a:avLst/>
+          </a:prstGeom>
+        </p:spPr>
+        <p:txBody>
+          <a:bodyPr anchor="ctr">
+            <a:spAutoFit/>
+          </a:bodyPr>
+          <a:lstStyle>
+            <a:lvl1pPr marL="0" indent="0" algn="ctr">
+              <a:spcBef>
+                <a:spcPts val="0"/>
+              </a:spcBef>
+              <a:buClrTx/>
+              <a:buSzTx/>
+              <a:buFontTx/>
+              <a:buNone/>
+              <a:defRPr>
+                <a:solidFill>
+                  <a:srgbClr val="2F4468"/>
+                </a:solidFill>
+              </a:defRPr>
+            </a:lvl1pPr>
+          </a:lstStyle>
+          <a:p>
+            <a:pPr lvl="0"/>
+            <a:r>
+              <a:rPr lang="en-GB"/>
+              <a:t>Click to edit Master text styles</a:t>
+            </a:r>
+          </a:p>
+        </p:txBody>
+      </p:sp>
+      <p:sp>
+        <p:nvSpPr>
+          <p:cNvPr id="17" name="Slide Number"/>
+          <p:cNvSpPr txBox="1">
+            <a:spLocks noGrp="1"/>
+          </p:cNvSpPr>
+          <p:nvPr>
+            <p:ph type="sldNum" sz="quarter" idx="2"/>
+          </p:nvPr>
+        </p:nvSpPr>
+        <p:spPr>
+          <a:xfrm>
+            <a:off x="11091544" y="6360984"/>
+            <a:ext cx="495649" cy="492440"/>
+          </a:xfrm>
+          <a:prstGeom prst="rect">
+            <a:avLst/>
+          </a:prstGeom>
+        </p:spPr>
+        <p:txBody>
+          <a:bodyPr/>
+          <a:lstStyle>
+            <a:lvl1pPr>
+              <a:defRPr sz="2000"/>
+            </a:lvl1pPr>
+          </a:lstStyle>
+          <a:p>
+            <a:fld id="{86CB4B4D-7CA3-9044-876B-883B54F8677D}" type="slidenum">
+              <a:rPr lang="en-GB" smtClean="0"/>
+              <a:t>‹#›</a:t>
+            </a:fld>
+            <a:endParaRPr lang="en-GB"/>
+          </a:p>
+        </p:txBody>
+      </p:sp>
+    </p:spTree>
+    <p:extLst>
+      <p:ext uri="{BB962C8B-B14F-4D97-AF65-F5344CB8AC3E}">
+        <p14:creationId xmlns:p14="http://schemas.microsoft.com/office/powerpoint/2010/main" val="501815427"/>
+      </p:ext>
+    </p:extLst>
+  </p:cSld>
+  <p:clrMapOvr>
+    <a:masterClrMapping/>
+  </p:clrMapOvr>
+  <p:transition spd="med"/>
+</p:sldLayout>
+</file>
+
+<file path=ppt/slideLayouts/slideLayout14.xml><?xml version="1.0" encoding="utf-8"?>
 <p:sldLayout xmlns:a="http://schemas.openxmlformats.org/drawingml/2006/main" xmlns:r="http://schemas.openxmlformats.org/officeDocument/2006/relationships" xmlns:p="http://schemas.openxmlformats.org/presentationml/2006/main" type="tx">
   <p:cSld name="Title and Box">
     <p:spTree>
@@ -9522,7 +9671,7 @@
           <a:lstStyle/>
           <a:p>
             <a:r>
-              <a:rPr lang="en-US"/>
+              <a:rPr lang="en-GB"/>
               <a:t>Click to edit Master title style</a:t>
             </a:r>
             <a:endParaRPr/>
@@ -9532,7 +9681,7 @@
     </p:spTree>
     <p:extLst>
       <p:ext uri="{BB962C8B-B14F-4D97-AF65-F5344CB8AC3E}">
-        <p14:creationId xmlns:p14="http://schemas.microsoft.com/office/powerpoint/2010/main" val="2097884205"/>
+        <p14:creationId xmlns:p14="http://schemas.microsoft.com/office/powerpoint/2010/main" val="3930058374"/>
       </p:ext>
     </p:extLst>
   </p:cSld>
@@ -9543,9 +9692,9 @@
 </p:sldLayout>
 </file>
 
-<file path=ppt/slideLayouts/slideLayout14.xml><?xml version="1.0" encoding="utf-8"?>
-<p:sldLayout xmlns:a="http://schemas.openxmlformats.org/drawingml/2006/main" xmlns:r="http://schemas.openxmlformats.org/officeDocument/2006/relationships" xmlns:p="http://schemas.openxmlformats.org/presentationml/2006/main" showMasterSp="0">
-  <p:cSld name="1_Title Slide">
+<file path=ppt/slideLayouts/slideLayout15.xml><?xml version="1.0" encoding="utf-8"?>
+<p:sldLayout xmlns:a="http://schemas.openxmlformats.org/drawingml/2006/main" xmlns:r="http://schemas.openxmlformats.org/officeDocument/2006/relationships" xmlns:p="http://schemas.openxmlformats.org/presentationml/2006/main" type="txAndChart">
+  <p:cSld name="Title, Text and Chart">
     <p:spTree>
       <p:nvGrpSpPr>
         <p:cNvPr id="1" name=""/>
@@ -9562,8 +9711,8 @@
       </p:grpSpPr>
       <p:sp>
         <p:nvSpPr>
-          <p:cNvPr id="15" name="Title Text"/>
-          <p:cNvSpPr txBox="1">
+          <p:cNvPr id="2" name="Title 1"/>
+          <p:cNvSpPr>
             <a:spLocks noGrp="1"/>
           </p:cNvSpPr>
           <p:nvPr>
@@ -9572,12 +9721,9 @@
         </p:nvSpPr>
         <p:spPr>
           <a:xfrm>
-            <a:off x="863600" y="2286000"/>
-            <a:ext cx="10464801" cy="1143001"/>
+            <a:off x="1320800" y="381000"/>
+            <a:ext cx="10363200" cy="1143000"/>
           </a:xfrm>
-          <a:prstGeom prst="rect">
-            <a:avLst/>
-          </a:prstGeom>
         </p:spPr>
         <p:txBody>
           <a:bodyPr/>
@@ -9587,108 +9733,136 @@
               <a:rPr lang="en-GB"/>
               <a:t>Click to edit Master title style</a:t>
             </a:r>
-            <a:endParaRPr dirty="0"/>
+            <a:endParaRPr lang="en-US"/>
           </a:p>
         </p:txBody>
       </p:sp>
       <p:sp>
         <p:nvSpPr>
-          <p:cNvPr id="16" name="Subtitle"/>
-          <p:cNvSpPr txBox="1">
+          <p:cNvPr id="3" name="Text Placeholder 2"/>
+          <p:cNvSpPr>
             <a:spLocks noGrp="1"/>
           </p:cNvSpPr>
           <p:nvPr>
-            <p:ph type="body" sz="quarter" idx="22"/>
+            <p:ph type="body" sz="half" idx="1"/>
           </p:nvPr>
         </p:nvSpPr>
         <p:spPr>
           <a:xfrm>
-            <a:off x="957115" y="3465604"/>
-            <a:ext cx="10134430" cy="846384"/>
+            <a:off x="1625600" y="1828800"/>
+            <a:ext cx="4876800" cy="4267200"/>
           </a:xfrm>
-          <a:prstGeom prst="rect">
-            <a:avLst/>
-          </a:prstGeom>
         </p:spPr>
         <p:txBody>
-          <a:bodyPr anchor="ctr">
-            <a:spAutoFit/>
-          </a:bodyPr>
-          <a:lstStyle>
-            <a:lvl1pPr marL="0" indent="0" algn="ctr">
-              <a:spcBef>
-                <a:spcPts val="0"/>
-              </a:spcBef>
-              <a:buClrTx/>
-              <a:buSzTx/>
-              <a:buFontTx/>
-              <a:buNone/>
-              <a:defRPr>
-                <a:solidFill>
-                  <a:srgbClr val="2F4468"/>
-                </a:solidFill>
-              </a:defRPr>
-            </a:lvl1pPr>
-          </a:lstStyle>
+          <a:bodyPr/>
+          <a:lstStyle/>
           <a:p>
             <a:pPr lvl="0"/>
             <a:r>
               <a:rPr lang="en-GB"/>
               <a:t>Click to edit Master text styles</a:t>
             </a:r>
+          </a:p>
+          <a:p>
+            <a:pPr lvl="1"/>
+            <a:r>
+              <a:rPr lang="en-GB"/>
+              <a:t>Second level</a:t>
+            </a:r>
+          </a:p>
+          <a:p>
+            <a:pPr lvl="2"/>
+            <a:r>
+              <a:rPr lang="en-GB"/>
+              <a:t>Third level</a:t>
+            </a:r>
+          </a:p>
+          <a:p>
+            <a:pPr lvl="3"/>
+            <a:r>
+              <a:rPr lang="en-GB"/>
+              <a:t>Fourth level</a:t>
+            </a:r>
+          </a:p>
+          <a:p>
+            <a:pPr lvl="4"/>
+            <a:r>
+              <a:rPr lang="en-GB"/>
+              <a:t>Fifth level</a:t>
+            </a:r>
+            <a:endParaRPr lang="en-US"/>
           </a:p>
         </p:txBody>
       </p:sp>
       <p:sp>
         <p:nvSpPr>
-          <p:cNvPr id="17" name="Slide Number"/>
-          <p:cNvSpPr txBox="1">
+          <p:cNvPr id="4" name="Chart Placeholder 3"/>
+          <p:cNvSpPr>
             <a:spLocks noGrp="1"/>
           </p:cNvSpPr>
           <p:nvPr>
-            <p:ph type="sldNum" sz="quarter" idx="2"/>
+            <p:ph type="chart" sz="half" idx="2"/>
           </p:nvPr>
         </p:nvSpPr>
         <p:spPr>
           <a:xfrm>
-            <a:off x="11091544" y="6360984"/>
-            <a:ext cx="495649" cy="492440"/>
+            <a:off x="6705600" y="1828800"/>
+            <a:ext cx="4876800" cy="4267200"/>
           </a:xfrm>
-          <a:prstGeom prst="rect">
-            <a:avLst/>
-          </a:prstGeom>
+        </p:spPr>
+        <p:txBody>
+          <a:bodyPr/>
+          <a:lstStyle/>
+          <a:p>
+            <a:pPr lvl="0"/>
+            <a:r>
+              <a:rPr lang="en-GB" noProof="0"/>
+              <a:t>Click icon to add chart</a:t>
+            </a:r>
+            <a:endParaRPr lang="en-US" noProof="0"/>
+          </a:p>
+        </p:txBody>
+      </p:sp>
+      <p:sp>
+        <p:nvSpPr>
+          <p:cNvPr id="5" name="Rectangle 1028"/>
+          <p:cNvSpPr>
+            <a:spLocks noGrp="1" noChangeArrowheads="1"/>
+          </p:cNvSpPr>
+          <p:nvPr>
+            <p:ph type="ftr" sz="quarter" idx="10"/>
+          </p:nvPr>
+        </p:nvSpPr>
+        <p:spPr>
+          <a:ln/>
         </p:spPr>
         <p:txBody>
           <a:bodyPr/>
           <a:lstStyle>
             <a:lvl1pPr>
-              <a:defRPr sz="2000"/>
+              <a:defRPr/>
             </a:lvl1pPr>
           </a:lstStyle>
           <a:p>
-            <a:fld id="{86CB4B4D-7CA3-9044-876B-883B54F8677D}" type="slidenum">
-              <a:rPr lang="en-GB" smtClean="0"/>
-              <a:t>‹#›</a:t>
-            </a:fld>
-            <a:endParaRPr lang="en-GB"/>
+            <a:endParaRPr lang="en-US" dirty="0"/>
           </a:p>
         </p:txBody>
       </p:sp>
     </p:spTree>
     <p:extLst>
       <p:ext uri="{BB962C8B-B14F-4D97-AF65-F5344CB8AC3E}">
-        <p14:creationId xmlns:p14="http://schemas.microsoft.com/office/powerpoint/2010/main" val="548164564"/>
+        <p14:creationId xmlns:p14="http://schemas.microsoft.com/office/powerpoint/2010/main" val="3244636371"/>
       </p:ext>
     </p:extLst>
   </p:cSld>
   <p:clrMapOvr>
     <a:masterClrMapping/>
   </p:clrMapOvr>
-  <p:transition spd="med"/>
+  <p:hf sldNum="0" hdr="0" dt="0"/>
 </p:sldLayout>
 </file>
 
-<file path=ppt/slideLayouts/slideLayout15.xml><?xml version="1.0" encoding="utf-8"?>
+<file path=ppt/slideLayouts/slideLayout16.xml><?xml version="1.0" encoding="utf-8"?>
 <p:sldLayout xmlns:a="http://schemas.openxmlformats.org/drawingml/2006/main" xmlns:r="http://schemas.openxmlformats.org/officeDocument/2006/relationships" xmlns:p="http://schemas.openxmlformats.org/presentationml/2006/main" type="dgm">
   <p:cSld name="Title and Diagram or Organization Chart">
     <p:spTree>
@@ -9788,7 +9962,7 @@
     </p:spTree>
     <p:extLst>
       <p:ext uri="{BB962C8B-B14F-4D97-AF65-F5344CB8AC3E}">
-        <p14:creationId xmlns:p14="http://schemas.microsoft.com/office/powerpoint/2010/main" val="480851502"/>
+        <p14:creationId xmlns:p14="http://schemas.microsoft.com/office/powerpoint/2010/main" val="3849611333"/>
       </p:ext>
     </p:extLst>
   </p:cSld>
@@ -9842,7 +10016,7 @@
           </a:lstStyle>
           <a:p>
             <a:r>
-              <a:rPr lang="en-US"/>
+              <a:rPr lang="en-GB"/>
               <a:t>Click to edit Master title style</a:t>
             </a:r>
             <a:endParaRPr lang="en-US" dirty="0"/>
@@ -9866,37 +10040,38 @@
           <a:p>
             <a:pPr lvl="0"/>
             <a:r>
-              <a:rPr lang="en-US"/>
+              <a:rPr lang="en-GB"/>
               <a:t>Click to edit Master text styles</a:t>
             </a:r>
           </a:p>
           <a:p>
             <a:pPr lvl="1"/>
             <a:r>
-              <a:rPr lang="en-US"/>
+              <a:rPr lang="en-GB"/>
               <a:t>Second level</a:t>
             </a:r>
           </a:p>
           <a:p>
             <a:pPr lvl="2"/>
             <a:r>
-              <a:rPr lang="en-US"/>
+              <a:rPr lang="en-GB"/>
               <a:t>Third level</a:t>
             </a:r>
           </a:p>
           <a:p>
             <a:pPr lvl="3"/>
             <a:r>
-              <a:rPr lang="en-US"/>
+              <a:rPr lang="en-GB"/>
               <a:t>Fourth level</a:t>
             </a:r>
           </a:p>
           <a:p>
             <a:pPr lvl="4"/>
             <a:r>
-              <a:rPr lang="en-US"/>
+              <a:rPr lang="en-GB"/>
               <a:t>Fifth level</a:t>
             </a:r>
+            <a:endParaRPr lang="en-US"/>
           </a:p>
         </p:txBody>
       </p:sp>
@@ -9917,7 +10092,7 @@
           <a:p>
             <a:fld id="{C764DE79-268F-4C1A-8933-263129D2AF90}" type="datetimeFigureOut">
               <a:rPr lang="en-US" smtClean="0"/>
-              <a:t>9/16/2025</a:t>
+              <a:t>9/19/25</a:t>
             </a:fld>
             <a:endParaRPr lang="en-US" dirty="0"/>
           </a:p>
@@ -10047,10 +10222,54 @@
           </a:fontRef>
         </p:style>
       </p:cxnSp>
+      <p:cxnSp>
+        <p:nvCxnSpPr>
+          <p:cNvPr id="9" name="Straight Connector 8">
+            <a:extLst>
+              <a:ext uri="{FF2B5EF4-FFF2-40B4-BE49-F238E27FC236}">
+                <a16:creationId xmlns:a16="http://schemas.microsoft.com/office/drawing/2014/main" id="{9C51F014-A304-3672-EB37-723E4843A104}"/>
+              </a:ext>
+            </a:extLst>
+          </p:cNvPr>
+          <p:cNvCxnSpPr/>
+          <p:nvPr/>
+        </p:nvCxnSpPr>
+        <p:spPr>
+          <a:xfrm>
+            <a:off x="609600" y="1447800"/>
+            <a:ext cx="11074400" cy="0"/>
+          </a:xfrm>
+          <a:prstGeom prst="line">
+            <a:avLst/>
+          </a:prstGeom>
+          <a:ln w="12700">
+            <a:solidFill>
+              <a:schemeClr val="tx1">
+                <a:lumMod val="50000"/>
+                <a:lumOff val="50000"/>
+              </a:schemeClr>
+            </a:solidFill>
+          </a:ln>
+        </p:spPr>
+        <p:style>
+          <a:lnRef idx="1">
+            <a:schemeClr val="accent1"/>
+          </a:lnRef>
+          <a:fillRef idx="0">
+            <a:schemeClr val="accent1"/>
+          </a:fillRef>
+          <a:effectRef idx="0">
+            <a:schemeClr val="accent1"/>
+          </a:effectRef>
+          <a:fontRef idx="minor">
+            <a:schemeClr val="tx1"/>
+          </a:fontRef>
+        </p:style>
+      </p:cxnSp>
     </p:spTree>
     <p:extLst>
       <p:ext uri="{BB962C8B-B14F-4D97-AF65-F5344CB8AC3E}">
-        <p14:creationId xmlns:p14="http://schemas.microsoft.com/office/powerpoint/2010/main" val="932266326"/>
+        <p14:creationId xmlns:p14="http://schemas.microsoft.com/office/powerpoint/2010/main" val="3788710805"/>
       </p:ext>
     </p:extLst>
   </p:cSld>
@@ -10102,9 +10321,10 @@
           </a:lstStyle>
           <a:p>
             <a:r>
-              <a:rPr lang="en-US"/>
+              <a:rPr lang="en-GB"/>
               <a:t>Click to edit Master title style</a:t>
             </a:r>
+            <a:endParaRPr lang="en-US"/>
           </a:p>
         </p:txBody>
       </p:sp>
@@ -10221,7 +10441,7 @@
           <a:p>
             <a:pPr lvl="0"/>
             <a:r>
-              <a:rPr lang="en-US"/>
+              <a:rPr lang="en-GB"/>
               <a:t>Click to edit Master text styles</a:t>
             </a:r>
           </a:p>
@@ -10244,7 +10464,7 @@
           <a:p>
             <a:fld id="{C764DE79-268F-4C1A-8933-263129D2AF90}" type="datetimeFigureOut">
               <a:rPr lang="en-US" smtClean="0"/>
-              <a:t>9/16/2025</a:t>
+              <a:t>9/19/25</a:t>
             </a:fld>
             <a:endParaRPr lang="en-US" dirty="0"/>
           </a:p>
@@ -10295,7 +10515,7 @@
     </p:spTree>
     <p:extLst>
       <p:ext uri="{BB962C8B-B14F-4D97-AF65-F5344CB8AC3E}">
-        <p14:creationId xmlns:p14="http://schemas.microsoft.com/office/powerpoint/2010/main" val="3574567067"/>
+        <p14:creationId xmlns:p14="http://schemas.microsoft.com/office/powerpoint/2010/main" val="2753234847"/>
       </p:ext>
     </p:extLst>
   </p:cSld>
@@ -10350,7 +10570,7 @@
           </a:lstStyle>
           <a:p>
             <a:r>
-              <a:rPr lang="en-US"/>
+              <a:rPr lang="en-GB"/>
               <a:t>Click to edit Master title style</a:t>
             </a:r>
             <a:endParaRPr lang="en-US" dirty="0"/>
@@ -10407,37 +10627,38 @@
           <a:p>
             <a:pPr lvl="0"/>
             <a:r>
-              <a:rPr lang="en-US"/>
+              <a:rPr lang="en-GB"/>
               <a:t>Click to edit Master text styles</a:t>
             </a:r>
           </a:p>
           <a:p>
             <a:pPr lvl="1"/>
             <a:r>
-              <a:rPr lang="en-US"/>
+              <a:rPr lang="en-GB"/>
               <a:t>Second level</a:t>
             </a:r>
           </a:p>
           <a:p>
             <a:pPr lvl="2"/>
             <a:r>
-              <a:rPr lang="en-US"/>
+              <a:rPr lang="en-GB"/>
               <a:t>Third level</a:t>
             </a:r>
           </a:p>
           <a:p>
             <a:pPr lvl="3"/>
             <a:r>
-              <a:rPr lang="en-US"/>
+              <a:rPr lang="en-GB"/>
               <a:t>Fourth level</a:t>
             </a:r>
           </a:p>
           <a:p>
             <a:pPr lvl="4"/>
             <a:r>
-              <a:rPr lang="en-US"/>
+              <a:rPr lang="en-GB"/>
               <a:t>Fifth level</a:t>
             </a:r>
+            <a:endParaRPr lang="en-US"/>
           </a:p>
         </p:txBody>
       </p:sp>
@@ -10491,37 +10712,38 @@
           <a:p>
             <a:pPr lvl="0"/>
             <a:r>
-              <a:rPr lang="en-US"/>
+              <a:rPr lang="en-GB"/>
               <a:t>Click to edit Master text styles</a:t>
             </a:r>
           </a:p>
           <a:p>
             <a:pPr lvl="1"/>
             <a:r>
-              <a:rPr lang="en-US"/>
+              <a:rPr lang="en-GB"/>
               <a:t>Second level</a:t>
             </a:r>
           </a:p>
           <a:p>
             <a:pPr lvl="2"/>
             <a:r>
-              <a:rPr lang="en-US"/>
+              <a:rPr lang="en-GB"/>
               <a:t>Third level</a:t>
             </a:r>
           </a:p>
           <a:p>
             <a:pPr lvl="3"/>
             <a:r>
-              <a:rPr lang="en-US"/>
+              <a:rPr lang="en-GB"/>
               <a:t>Fourth level</a:t>
             </a:r>
           </a:p>
           <a:p>
             <a:pPr lvl="4"/>
             <a:r>
-              <a:rPr lang="en-US"/>
+              <a:rPr lang="en-GB"/>
               <a:t>Fifth level</a:t>
             </a:r>
+            <a:endParaRPr lang="en-US"/>
           </a:p>
         </p:txBody>
       </p:sp>
@@ -10542,7 +10764,7 @@
           <a:p>
             <a:fld id="{C764DE79-268F-4C1A-8933-263129D2AF90}" type="datetimeFigureOut">
               <a:rPr lang="en-US" smtClean="0"/>
-              <a:t>9/16/2025</a:t>
+              <a:t>9/19/25</a:t>
             </a:fld>
             <a:endParaRPr lang="en-US" dirty="0"/>
           </a:p>
@@ -10666,10 +10888,51 @@
           </a:fontRef>
         </p:style>
       </p:cxnSp>
+      <p:cxnSp>
+        <p:nvCxnSpPr>
+          <p:cNvPr id="10" name="Straight Connector 9">
+            <a:extLst>
+              <a:ext uri="{FF2B5EF4-FFF2-40B4-BE49-F238E27FC236}">
+                <a16:creationId xmlns:a16="http://schemas.microsoft.com/office/drawing/2014/main" id="{9B64861E-C2E3-2C0F-0C43-CF6F042CC211}"/>
+              </a:ext>
+            </a:extLst>
+          </p:cNvPr>
+          <p:cNvCxnSpPr/>
+          <p:nvPr/>
+        </p:nvCxnSpPr>
+        <p:spPr>
+          <a:xfrm>
+            <a:off x="609600" y="1447800"/>
+            <a:ext cx="11074400" cy="0"/>
+          </a:xfrm>
+          <a:prstGeom prst="line">
+            <a:avLst/>
+          </a:prstGeom>
+          <a:ln w="12700">
+            <a:solidFill>
+              <a:schemeClr val="tx1"/>
+            </a:solidFill>
+          </a:ln>
+        </p:spPr>
+        <p:style>
+          <a:lnRef idx="1">
+            <a:schemeClr val="accent1"/>
+          </a:lnRef>
+          <a:fillRef idx="0">
+            <a:schemeClr val="accent1"/>
+          </a:fillRef>
+          <a:effectRef idx="0">
+            <a:schemeClr val="accent1"/>
+          </a:effectRef>
+          <a:fontRef idx="minor">
+            <a:schemeClr val="tx1"/>
+          </a:fontRef>
+        </p:style>
+      </p:cxnSp>
     </p:spTree>
     <p:extLst>
       <p:ext uri="{BB962C8B-B14F-4D97-AF65-F5344CB8AC3E}">
-        <p14:creationId xmlns:p14="http://schemas.microsoft.com/office/powerpoint/2010/main" val="1478703938"/>
+        <p14:creationId xmlns:p14="http://schemas.microsoft.com/office/powerpoint/2010/main" val="4230898188"/>
       </p:ext>
     </p:extLst>
   </p:cSld>
@@ -10724,7 +10987,7 @@
           </a:lstStyle>
           <a:p>
             <a:r>
-              <a:rPr lang="en-US"/>
+              <a:rPr lang="en-GB"/>
               <a:t>Click to edit Master title style</a:t>
             </a:r>
             <a:endParaRPr lang="en-US" dirty="0"/>
@@ -10790,7 +11053,7 @@
           <a:p>
             <a:pPr lvl="0"/>
             <a:r>
-              <a:rPr lang="en-US"/>
+              <a:rPr lang="en-GB"/>
               <a:t>Click to edit Master text styles</a:t>
             </a:r>
           </a:p>
@@ -10846,37 +11109,38 @@
           <a:p>
             <a:pPr lvl="0"/>
             <a:r>
-              <a:rPr lang="en-US"/>
+              <a:rPr lang="en-GB"/>
               <a:t>Click to edit Master text styles</a:t>
             </a:r>
           </a:p>
           <a:p>
             <a:pPr lvl="1"/>
             <a:r>
-              <a:rPr lang="en-US"/>
+              <a:rPr lang="en-GB"/>
               <a:t>Second level</a:t>
             </a:r>
           </a:p>
           <a:p>
             <a:pPr lvl="2"/>
             <a:r>
-              <a:rPr lang="en-US"/>
+              <a:rPr lang="en-GB"/>
               <a:t>Third level</a:t>
             </a:r>
           </a:p>
           <a:p>
             <a:pPr lvl="3"/>
             <a:r>
-              <a:rPr lang="en-US"/>
+              <a:rPr lang="en-GB"/>
               <a:t>Fourth level</a:t>
             </a:r>
           </a:p>
           <a:p>
             <a:pPr lvl="4"/>
             <a:r>
-              <a:rPr lang="en-US"/>
+              <a:rPr lang="en-GB"/>
               <a:t>Fifth level</a:t>
             </a:r>
+            <a:endParaRPr lang="en-US"/>
           </a:p>
         </p:txBody>
       </p:sp>
@@ -10939,7 +11203,7 @@
           <a:p>
             <a:pPr lvl="0"/>
             <a:r>
-              <a:rPr lang="en-US"/>
+              <a:rPr lang="en-GB"/>
               <a:t>Click to edit Master text styles</a:t>
             </a:r>
           </a:p>
@@ -10995,37 +11259,38 @@
           <a:p>
             <a:pPr lvl="0"/>
             <a:r>
-              <a:rPr lang="en-US"/>
+              <a:rPr lang="en-GB"/>
               <a:t>Click to edit Master text styles</a:t>
             </a:r>
           </a:p>
           <a:p>
             <a:pPr lvl="1"/>
             <a:r>
-              <a:rPr lang="en-US"/>
+              <a:rPr lang="en-GB"/>
               <a:t>Second level</a:t>
             </a:r>
           </a:p>
           <a:p>
             <a:pPr lvl="2"/>
             <a:r>
-              <a:rPr lang="en-US"/>
+              <a:rPr lang="en-GB"/>
               <a:t>Third level</a:t>
             </a:r>
           </a:p>
           <a:p>
             <a:pPr lvl="3"/>
             <a:r>
-              <a:rPr lang="en-US"/>
+              <a:rPr lang="en-GB"/>
               <a:t>Fourth level</a:t>
             </a:r>
           </a:p>
           <a:p>
             <a:pPr lvl="4"/>
             <a:r>
-              <a:rPr lang="en-US"/>
+              <a:rPr lang="en-GB"/>
               <a:t>Fifth level</a:t>
             </a:r>
+            <a:endParaRPr lang="en-US"/>
           </a:p>
         </p:txBody>
       </p:sp>
@@ -11046,7 +11311,7 @@
           <a:p>
             <a:fld id="{C764DE79-268F-4C1A-8933-263129D2AF90}" type="datetimeFigureOut">
               <a:rPr lang="en-US" smtClean="0"/>
-              <a:t>9/16/2025</a:t>
+              <a:t>9/19/25</a:t>
             </a:fld>
             <a:endParaRPr lang="en-US" dirty="0"/>
           </a:p>
@@ -11129,10 +11394,51 @@
           </a:fontRef>
         </p:style>
       </p:cxnSp>
+      <p:cxnSp>
+        <p:nvCxnSpPr>
+          <p:cNvPr id="11" name="Straight Connector 10">
+            <a:extLst>
+              <a:ext uri="{FF2B5EF4-FFF2-40B4-BE49-F238E27FC236}">
+                <a16:creationId xmlns:a16="http://schemas.microsoft.com/office/drawing/2014/main" id="{F3436290-11E2-F20B-966B-F18296CC48D7}"/>
+              </a:ext>
+            </a:extLst>
+          </p:cNvPr>
+          <p:cNvCxnSpPr/>
+          <p:nvPr/>
+        </p:nvCxnSpPr>
+        <p:spPr>
+          <a:xfrm>
+            <a:off x="609600" y="1447800"/>
+            <a:ext cx="11074400" cy="0"/>
+          </a:xfrm>
+          <a:prstGeom prst="line">
+            <a:avLst/>
+          </a:prstGeom>
+          <a:ln w="12700">
+            <a:solidFill>
+              <a:schemeClr val="tx1"/>
+            </a:solidFill>
+          </a:ln>
+        </p:spPr>
+        <p:style>
+          <a:lnRef idx="1">
+            <a:schemeClr val="accent1"/>
+          </a:lnRef>
+          <a:fillRef idx="0">
+            <a:schemeClr val="accent1"/>
+          </a:fillRef>
+          <a:effectRef idx="0">
+            <a:schemeClr val="accent1"/>
+          </a:effectRef>
+          <a:fontRef idx="minor">
+            <a:schemeClr val="tx1"/>
+          </a:fontRef>
+        </p:style>
+      </p:cxnSp>
     </p:spTree>
     <p:extLst>
       <p:ext uri="{BB962C8B-B14F-4D97-AF65-F5344CB8AC3E}">
-        <p14:creationId xmlns:p14="http://schemas.microsoft.com/office/powerpoint/2010/main" val="2457998779"/>
+        <p14:creationId xmlns:p14="http://schemas.microsoft.com/office/powerpoint/2010/main" val="1702271219"/>
       </p:ext>
     </p:extLst>
   </p:cSld>
@@ -11187,7 +11493,7 @@
           </a:lstStyle>
           <a:p>
             <a:r>
-              <a:rPr lang="en-US"/>
+              <a:rPr lang="en-GB"/>
               <a:t>Click to edit Master title style</a:t>
             </a:r>
             <a:endParaRPr lang="en-US" dirty="0"/>
@@ -11211,7 +11517,7 @@
           <a:p>
             <a:fld id="{C764DE79-268F-4C1A-8933-263129D2AF90}" type="datetimeFigureOut">
               <a:rPr lang="en-US" smtClean="0"/>
-              <a:t>9/16/2025</a:t>
+              <a:t>9/19/25</a:t>
             </a:fld>
             <a:endParaRPr lang="en-US" dirty="0"/>
           </a:p>
@@ -11335,10 +11641,51 @@
           </a:fontRef>
         </p:style>
       </p:cxnSp>
+      <p:cxnSp>
+        <p:nvCxnSpPr>
+          <p:cNvPr id="8" name="Straight Connector 7">
+            <a:extLst>
+              <a:ext uri="{FF2B5EF4-FFF2-40B4-BE49-F238E27FC236}">
+                <a16:creationId xmlns:a16="http://schemas.microsoft.com/office/drawing/2014/main" id="{CCF61A43-37C0-D158-13BE-1753663F3BEC}"/>
+              </a:ext>
+            </a:extLst>
+          </p:cNvPr>
+          <p:cNvCxnSpPr/>
+          <p:nvPr/>
+        </p:nvCxnSpPr>
+        <p:spPr>
+          <a:xfrm>
+            <a:off x="609600" y="1447800"/>
+            <a:ext cx="11074400" cy="0"/>
+          </a:xfrm>
+          <a:prstGeom prst="line">
+            <a:avLst/>
+          </a:prstGeom>
+          <a:ln w="12700">
+            <a:solidFill>
+              <a:schemeClr val="tx1"/>
+            </a:solidFill>
+          </a:ln>
+        </p:spPr>
+        <p:style>
+          <a:lnRef idx="1">
+            <a:schemeClr val="accent1"/>
+          </a:lnRef>
+          <a:fillRef idx="0">
+            <a:schemeClr val="accent1"/>
+          </a:fillRef>
+          <a:effectRef idx="0">
+            <a:schemeClr val="accent1"/>
+          </a:effectRef>
+          <a:fontRef idx="minor">
+            <a:schemeClr val="tx1"/>
+          </a:fontRef>
+        </p:style>
+      </p:cxnSp>
     </p:spTree>
     <p:extLst>
       <p:ext uri="{BB962C8B-B14F-4D97-AF65-F5344CB8AC3E}">
-        <p14:creationId xmlns:p14="http://schemas.microsoft.com/office/powerpoint/2010/main" val="509315919"/>
+        <p14:creationId xmlns:p14="http://schemas.microsoft.com/office/powerpoint/2010/main" val="1096419811"/>
       </p:ext>
     </p:extLst>
   </p:cSld>
@@ -11382,7 +11729,7 @@
           <a:p>
             <a:fld id="{C764DE79-268F-4C1A-8933-263129D2AF90}" type="datetimeFigureOut">
               <a:rPr lang="en-US" smtClean="0"/>
-              <a:t>9/16/2025</a:t>
+              <a:t>9/19/25</a:t>
             </a:fld>
             <a:endParaRPr lang="en-US" dirty="0"/>
           </a:p>
@@ -11433,7 +11780,7 @@
     </p:spTree>
     <p:extLst>
       <p:ext uri="{BB962C8B-B14F-4D97-AF65-F5344CB8AC3E}">
-        <p14:creationId xmlns:p14="http://schemas.microsoft.com/office/powerpoint/2010/main" val="4017000230"/>
+        <p14:creationId xmlns:p14="http://schemas.microsoft.com/office/powerpoint/2010/main" val="3613556823"/>
       </p:ext>
     </p:extLst>
   </p:cSld>
@@ -11485,9 +11832,10 @@
           </a:lstStyle>
           <a:p>
             <a:r>
-              <a:rPr lang="en-US"/>
+              <a:rPr lang="en-GB"/>
               <a:t>Click to edit Master title style</a:t>
             </a:r>
+            <a:endParaRPr lang="en-US"/>
           </a:p>
         </p:txBody>
       </p:sp>
@@ -11541,37 +11889,38 @@
           <a:p>
             <a:pPr lvl="0"/>
             <a:r>
-              <a:rPr lang="en-US"/>
+              <a:rPr lang="en-GB"/>
               <a:t>Click to edit Master text styles</a:t>
             </a:r>
           </a:p>
           <a:p>
             <a:pPr lvl="1"/>
             <a:r>
-              <a:rPr lang="en-US"/>
+              <a:rPr lang="en-GB"/>
               <a:t>Second level</a:t>
             </a:r>
           </a:p>
           <a:p>
             <a:pPr lvl="2"/>
             <a:r>
-              <a:rPr lang="en-US"/>
+              <a:rPr lang="en-GB"/>
               <a:t>Third level</a:t>
             </a:r>
           </a:p>
           <a:p>
             <a:pPr lvl="3"/>
             <a:r>
-              <a:rPr lang="en-US"/>
+              <a:rPr lang="en-GB"/>
               <a:t>Fourth level</a:t>
             </a:r>
           </a:p>
           <a:p>
             <a:pPr lvl="4"/>
             <a:r>
-              <a:rPr lang="en-US"/>
+              <a:rPr lang="en-GB"/>
               <a:t>Fifth level</a:t>
             </a:r>
+            <a:endParaRPr lang="en-US"/>
           </a:p>
         </p:txBody>
       </p:sp>
@@ -11634,7 +11983,7 @@
           <a:p>
             <a:pPr lvl="0"/>
             <a:r>
-              <a:rPr lang="en-US"/>
+              <a:rPr lang="en-GB"/>
               <a:t>Click to edit Master text styles</a:t>
             </a:r>
           </a:p>
@@ -11657,7 +12006,7 @@
           <a:p>
             <a:fld id="{C764DE79-268F-4C1A-8933-263129D2AF90}" type="datetimeFigureOut">
               <a:rPr lang="en-US" smtClean="0"/>
-              <a:t>9/16/2025</a:t>
+              <a:t>9/19/25</a:t>
             </a:fld>
             <a:endParaRPr lang="en-US" dirty="0"/>
           </a:p>
@@ -11708,7 +12057,7 @@
     </p:spTree>
     <p:extLst>
       <p:ext uri="{BB962C8B-B14F-4D97-AF65-F5344CB8AC3E}">
-        <p14:creationId xmlns:p14="http://schemas.microsoft.com/office/powerpoint/2010/main" val="1553569111"/>
+        <p14:creationId xmlns:p14="http://schemas.microsoft.com/office/powerpoint/2010/main" val="3417293640"/>
       </p:ext>
     </p:extLst>
   </p:cSld>
@@ -11761,9 +12110,10 @@
           </a:lstStyle>
           <a:p>
             <a:r>
-              <a:rPr lang="en-US"/>
+              <a:rPr lang="en-GB"/>
               <a:t>Click to edit Master title style</a:t>
             </a:r>
+            <a:endParaRPr lang="en-US"/>
           </a:p>
         </p:txBody>
       </p:sp>
@@ -11825,9 +12175,10 @@
           </a:lstStyle>
           <a:p>
             <a:r>
-              <a:rPr lang="en-US"/>
+              <a:rPr lang="en-GB"/>
               <a:t>Click icon to add picture</a:t>
             </a:r>
+            <a:endParaRPr lang="en-US"/>
           </a:p>
         </p:txBody>
       </p:sp>
@@ -11890,7 +12241,7 @@
           <a:p>
             <a:pPr lvl="0"/>
             <a:r>
-              <a:rPr lang="en-US"/>
+              <a:rPr lang="en-GB"/>
               <a:t>Click to edit Master text styles</a:t>
             </a:r>
           </a:p>
@@ -11913,7 +12264,7 @@
           <a:p>
             <a:fld id="{C764DE79-268F-4C1A-8933-263129D2AF90}" type="datetimeFigureOut">
               <a:rPr lang="en-US" smtClean="0"/>
-              <a:t>9/16/2025</a:t>
+              <a:t>9/19/25</a:t>
             </a:fld>
             <a:endParaRPr lang="en-US" dirty="0"/>
           </a:p>
@@ -11964,7 +12315,7 @@
     </p:spTree>
     <p:extLst>
       <p:ext uri="{BB962C8B-B14F-4D97-AF65-F5344CB8AC3E}">
-        <p14:creationId xmlns:p14="http://schemas.microsoft.com/office/powerpoint/2010/main" val="1805252568"/>
+        <p14:creationId xmlns:p14="http://schemas.microsoft.com/office/powerpoint/2010/main" val="2897161385"/>
       </p:ext>
     </p:extLst>
   </p:cSld>
@@ -11979,9 +12330,14 @@
 <p:sldMaster xmlns:a="http://schemas.openxmlformats.org/drawingml/2006/main" xmlns:r="http://schemas.openxmlformats.org/officeDocument/2006/relationships" xmlns:p="http://schemas.openxmlformats.org/presentationml/2006/main">
   <p:cSld>
     <p:bg>
-      <p:bgRef idx="1001">
-        <a:schemeClr val="bg1"/>
-      </p:bgRef>
+      <p:bgPr>
+        <a:solidFill>
+          <a:schemeClr val="bg1">
+            <a:lumMod val="85000"/>
+          </a:schemeClr>
+        </a:solidFill>
+        <a:effectLst/>
+      </p:bgPr>
     </p:bg>
     <p:spTree>
       <p:nvGrpSpPr>
@@ -12023,9 +12379,10 @@
           <a:lstStyle/>
           <a:p>
             <a:r>
-              <a:rPr lang="en-US"/>
+              <a:rPr lang="en-GB"/>
               <a:t>Click to edit Master title style</a:t>
             </a:r>
+            <a:endParaRPr lang="en-US"/>
           </a:p>
         </p:txBody>
       </p:sp>
@@ -12056,37 +12413,38 @@
           <a:p>
             <a:pPr lvl="0"/>
             <a:r>
-              <a:rPr lang="en-US"/>
+              <a:rPr lang="en-GB"/>
               <a:t>Click to edit Master text styles</a:t>
             </a:r>
           </a:p>
           <a:p>
             <a:pPr lvl="1"/>
             <a:r>
-              <a:rPr lang="en-US"/>
+              <a:rPr lang="en-GB"/>
               <a:t>Second level</a:t>
             </a:r>
           </a:p>
           <a:p>
             <a:pPr lvl="2"/>
             <a:r>
-              <a:rPr lang="en-US"/>
+              <a:rPr lang="en-GB"/>
               <a:t>Third level</a:t>
             </a:r>
           </a:p>
           <a:p>
             <a:pPr lvl="3"/>
             <a:r>
-              <a:rPr lang="en-US"/>
+              <a:rPr lang="en-GB"/>
               <a:t>Fourth level</a:t>
             </a:r>
           </a:p>
           <a:p>
             <a:pPr lvl="4"/>
             <a:r>
-              <a:rPr lang="en-US"/>
+              <a:rPr lang="en-GB"/>
               <a:t>Fifth level</a:t>
             </a:r>
+            <a:endParaRPr lang="en-US"/>
           </a:p>
         </p:txBody>
       </p:sp>
@@ -12125,7 +12483,7 @@
           <a:p>
             <a:fld id="{C764DE79-268F-4C1A-8933-263129D2AF90}" type="datetimeFigureOut">
               <a:rPr lang="en-US" smtClean="0"/>
-              <a:t>9/16/2025</a:t>
+              <a:t>9/19/25</a:t>
             </a:fld>
             <a:endParaRPr lang="en-US" dirty="0"/>
           </a:p>
@@ -12212,27 +12570,28 @@
     </p:spTree>
     <p:extLst>
       <p:ext uri="{BB962C8B-B14F-4D97-AF65-F5344CB8AC3E}">
-        <p14:creationId xmlns:p14="http://schemas.microsoft.com/office/powerpoint/2010/main" val="2677633553"/>
+        <p14:creationId xmlns:p14="http://schemas.microsoft.com/office/powerpoint/2010/main" val="3090816742"/>
       </p:ext>
     </p:extLst>
   </p:cSld>
   <p:clrMap bg1="lt1" tx1="dk1" bg2="lt2" tx2="dk2" accent1="accent1" accent2="accent2" accent3="accent3" accent4="accent4" accent5="accent5" accent6="accent6" hlink="hlink" folHlink="folHlink"/>
   <p:sldLayoutIdLst>
-    <p:sldLayoutId id="2147483941" r:id="rId1"/>
-    <p:sldLayoutId id="2147483942" r:id="rId2"/>
-    <p:sldLayoutId id="2147483943" r:id="rId3"/>
-    <p:sldLayoutId id="2147483944" r:id="rId4"/>
-    <p:sldLayoutId id="2147483945" r:id="rId5"/>
-    <p:sldLayoutId id="2147483946" r:id="rId6"/>
-    <p:sldLayoutId id="2147483947" r:id="rId7"/>
-    <p:sldLayoutId id="2147483948" r:id="rId8"/>
-    <p:sldLayoutId id="2147483949" r:id="rId9"/>
-    <p:sldLayoutId id="2147483950" r:id="rId10"/>
-    <p:sldLayoutId id="2147483951" r:id="rId11"/>
-    <p:sldLayoutId id="2147483952" r:id="rId12"/>
-    <p:sldLayoutId id="2147483953" r:id="rId13"/>
-    <p:sldLayoutId id="2147483954" r:id="rId14"/>
-    <p:sldLayoutId id="2147483956" r:id="rId15"/>
+    <p:sldLayoutId id="2147483958" r:id="rId1"/>
+    <p:sldLayoutId id="2147483959" r:id="rId2"/>
+    <p:sldLayoutId id="2147483960" r:id="rId3"/>
+    <p:sldLayoutId id="2147483961" r:id="rId4"/>
+    <p:sldLayoutId id="2147483962" r:id="rId5"/>
+    <p:sldLayoutId id="2147483963" r:id="rId6"/>
+    <p:sldLayoutId id="2147483964" r:id="rId7"/>
+    <p:sldLayoutId id="2147483965" r:id="rId8"/>
+    <p:sldLayoutId id="2147483966" r:id="rId9"/>
+    <p:sldLayoutId id="2147483967" r:id="rId10"/>
+    <p:sldLayoutId id="2147483968" r:id="rId11"/>
+    <p:sldLayoutId id="2147483969" r:id="rId12"/>
+    <p:sldLayoutId id="2147483970" r:id="rId13"/>
+    <p:sldLayoutId id="2147483971" r:id="rId14"/>
+    <p:sldLayoutId id="2147483972" r:id="rId15"/>
+    <p:sldLayoutId id="2147483973" r:id="rId16"/>
   </p:sldLayoutIdLst>
   <p:hf sldNum="0" hdr="0" dt="0"/>
   <p:txStyles>
@@ -12595,14 +12954,14 @@
           </a:ln>
           <a:extLst>
             <a:ext uri="{909E8E84-426E-40dd-AFC4-6F175D3DCCD1}">
-              <a14:hiddenFill xmlns:a14="http://schemas.microsoft.com/office/drawing/2010/main" xmlns="">
+              <a14:hiddenFill xmlns="" xmlns:a14="http://schemas.microsoft.com/office/drawing/2010/main">
                 <a:solidFill>
                   <a:srgbClr val="FFFFFF"/>
                 </a:solidFill>
               </a14:hiddenFill>
             </a:ext>
             <a:ext uri="{91240B29-F687-4f45-9708-019B960494DF}">
-              <a14:hiddenLine xmlns:a14="http://schemas.microsoft.com/office/drawing/2010/main" xmlns="" w="9525">
+              <a14:hiddenLine xmlns="" xmlns:a14="http://schemas.microsoft.com/office/drawing/2010/main" w="9525">
                 <a:solidFill>
                   <a:srgbClr val="000000"/>
                 </a:solidFill>
@@ -14009,14 +14368,14 @@
           </a:ln>
           <a:extLst>
             <a:ext uri="{909E8E84-426E-40dd-AFC4-6F175D3DCCD1}">
-              <a14:hiddenFill xmlns:a14="http://schemas.microsoft.com/office/drawing/2010/main" xmlns="">
+              <a14:hiddenFill xmlns="" xmlns:a14="http://schemas.microsoft.com/office/drawing/2010/main">
                 <a:solidFill>
                   <a:srgbClr val="FFFFFF"/>
                 </a:solidFill>
               </a14:hiddenFill>
             </a:ext>
             <a:ext uri="{91240B29-F687-4f45-9708-019B960494DF}">
-              <a14:hiddenLine xmlns:a14="http://schemas.microsoft.com/office/drawing/2010/main" xmlns="" w="9525">
+              <a14:hiddenLine xmlns="" xmlns:a14="http://schemas.microsoft.com/office/drawing/2010/main" w="9525">
                 <a:solidFill>
                   <a:srgbClr val="000000"/>
                 </a:solidFill>
@@ -14210,14 +14569,14 @@
           </a:ln>
           <a:extLst>
             <a:ext uri="{909E8E84-426E-40dd-AFC4-6F175D3DCCD1}">
-              <a14:hiddenFill xmlns:a14="http://schemas.microsoft.com/office/drawing/2010/main" xmlns="">
+              <a14:hiddenFill xmlns="" xmlns:a14="http://schemas.microsoft.com/office/drawing/2010/main">
                 <a:solidFill>
                   <a:srgbClr val="FFFFFF"/>
                 </a:solidFill>
               </a14:hiddenFill>
             </a:ext>
             <a:ext uri="{91240B29-F687-4f45-9708-019B960494DF}">
-              <a14:hiddenLine xmlns:a14="http://schemas.microsoft.com/office/drawing/2010/main" xmlns="" w="9525">
+              <a14:hiddenLine xmlns="" xmlns:a14="http://schemas.microsoft.com/office/drawing/2010/main" w="9525">
                 <a:solidFill>
                   <a:srgbClr val="000000"/>
                 </a:solidFill>
@@ -14501,7 +14860,16 @@
               <a:rPr lang="en-US" altLang="en-US" dirty="0">
                 <a:ea typeface="MS PGothic" charset="-128"/>
               </a:rPr>
-              <a:t>The parameter may be checked for validity and rejected if inappropriate.</a:t>
+              <a:t>The parameter may be checked for validity and rejected if inappropriate.  </a:t>
+            </a:r>
+          </a:p>
+          <a:p>
+            <a:pPr lvl="1"/>
+            <a:r>
+              <a:rPr lang="en-US" altLang="en-US" dirty="0">
+                <a:ea typeface="MS PGothic" charset="-128"/>
+              </a:rPr>
+              <a:t>e.g. only update field if new value is &gt;=10</a:t>
             </a:r>
           </a:p>
           <a:p>
@@ -14551,6 +14919,430 @@
   <p:clrMapOvr>
     <a:masterClrMapping/>
   </p:clrMapOvr>
+  <p:timing>
+    <p:tnLst>
+      <p:par>
+        <p:cTn id="1" dur="indefinite" restart="never" nodeType="tmRoot">
+          <p:childTnLst>
+            <p:seq concurrent="1" nextAc="seek">
+              <p:cTn id="2" dur="indefinite" nodeType="mainSeq">
+                <p:childTnLst>
+                  <p:par>
+                    <p:cTn id="3" fill="hold">
+                      <p:stCondLst>
+                        <p:cond delay="indefinite"/>
+                      </p:stCondLst>
+                      <p:childTnLst>
+                        <p:par>
+                          <p:cTn id="4" fill="hold">
+                            <p:stCondLst>
+                              <p:cond delay="0"/>
+                            </p:stCondLst>
+                            <p:childTnLst>
+                              <p:par>
+                                <p:cTn id="5" presetID="2" presetClass="entr" presetSubtype="4" fill="hold" nodeType="clickEffect">
+                                  <p:stCondLst>
+                                    <p:cond delay="0"/>
+                                  </p:stCondLst>
+                                  <p:childTnLst>
+                                    <p:set>
+                                      <p:cBhvr>
+                                        <p:cTn id="6" dur="1" fill="hold">
+                                          <p:stCondLst>
+                                            <p:cond delay="0"/>
+                                          </p:stCondLst>
+                                        </p:cTn>
+                                        <p:tgtEl>
+                                          <p:spTgt spid="58370">
+                                            <p:txEl>
+                                              <p:pRg st="1" end="1"/>
+                                            </p:txEl>
+                                          </p:spTgt>
+                                        </p:tgtEl>
+                                        <p:attrNameLst>
+                                          <p:attrName>style.visibility</p:attrName>
+                                        </p:attrNameLst>
+                                      </p:cBhvr>
+                                      <p:to>
+                                        <p:strVal val="visible"/>
+                                      </p:to>
+                                    </p:set>
+                                    <p:anim calcmode="lin" valueType="num">
+                                      <p:cBhvr additive="base">
+                                        <p:cTn id="7" dur="500" fill="hold"/>
+                                        <p:tgtEl>
+                                          <p:spTgt spid="58370">
+                                            <p:txEl>
+                                              <p:pRg st="1" end="1"/>
+                                            </p:txEl>
+                                          </p:spTgt>
+                                        </p:tgtEl>
+                                        <p:attrNameLst>
+                                          <p:attrName>ppt_x</p:attrName>
+                                        </p:attrNameLst>
+                                      </p:cBhvr>
+                                      <p:tavLst>
+                                        <p:tav tm="0">
+                                          <p:val>
+                                            <p:strVal val="#ppt_x"/>
+                                          </p:val>
+                                        </p:tav>
+                                        <p:tav tm="100000">
+                                          <p:val>
+                                            <p:strVal val="#ppt_x"/>
+                                          </p:val>
+                                        </p:tav>
+                                      </p:tavLst>
+                                    </p:anim>
+                                    <p:anim calcmode="lin" valueType="num">
+                                      <p:cBhvr additive="base">
+                                        <p:cTn id="8" dur="500" fill="hold"/>
+                                        <p:tgtEl>
+                                          <p:spTgt spid="58370">
+                                            <p:txEl>
+                                              <p:pRg st="1" end="1"/>
+                                            </p:txEl>
+                                          </p:spTgt>
+                                        </p:tgtEl>
+                                        <p:attrNameLst>
+                                          <p:attrName>ppt_y</p:attrName>
+                                        </p:attrNameLst>
+                                      </p:cBhvr>
+                                      <p:tavLst>
+                                        <p:tav tm="0">
+                                          <p:val>
+                                            <p:strVal val="1+#ppt_h/2"/>
+                                          </p:val>
+                                        </p:tav>
+                                        <p:tav tm="100000">
+                                          <p:val>
+                                            <p:strVal val="#ppt_y"/>
+                                          </p:val>
+                                        </p:tav>
+                                      </p:tavLst>
+                                    </p:anim>
+                                  </p:childTnLst>
+                                </p:cTn>
+                              </p:par>
+                              <p:par>
+                                <p:cTn id="9" presetID="2" presetClass="entr" presetSubtype="4" fill="hold" nodeType="withEffect">
+                                  <p:stCondLst>
+                                    <p:cond delay="0"/>
+                                  </p:stCondLst>
+                                  <p:childTnLst>
+                                    <p:set>
+                                      <p:cBhvr>
+                                        <p:cTn id="10" dur="1" fill="hold">
+                                          <p:stCondLst>
+                                            <p:cond delay="0"/>
+                                          </p:stCondLst>
+                                        </p:cTn>
+                                        <p:tgtEl>
+                                          <p:spTgt spid="58370">
+                                            <p:txEl>
+                                              <p:pRg st="2" end="2"/>
+                                            </p:txEl>
+                                          </p:spTgt>
+                                        </p:tgtEl>
+                                        <p:attrNameLst>
+                                          <p:attrName>style.visibility</p:attrName>
+                                        </p:attrNameLst>
+                                      </p:cBhvr>
+                                      <p:to>
+                                        <p:strVal val="visible"/>
+                                      </p:to>
+                                    </p:set>
+                                    <p:anim calcmode="lin" valueType="num">
+                                      <p:cBhvr additive="base">
+                                        <p:cTn id="11" dur="500" fill="hold"/>
+                                        <p:tgtEl>
+                                          <p:spTgt spid="58370">
+                                            <p:txEl>
+                                              <p:pRg st="2" end="2"/>
+                                            </p:txEl>
+                                          </p:spTgt>
+                                        </p:tgtEl>
+                                        <p:attrNameLst>
+                                          <p:attrName>ppt_x</p:attrName>
+                                        </p:attrNameLst>
+                                      </p:cBhvr>
+                                      <p:tavLst>
+                                        <p:tav tm="0">
+                                          <p:val>
+                                            <p:strVal val="#ppt_x"/>
+                                          </p:val>
+                                        </p:tav>
+                                        <p:tav tm="100000">
+                                          <p:val>
+                                            <p:strVal val="#ppt_x"/>
+                                          </p:val>
+                                        </p:tav>
+                                      </p:tavLst>
+                                    </p:anim>
+                                    <p:anim calcmode="lin" valueType="num">
+                                      <p:cBhvr additive="base">
+                                        <p:cTn id="12" dur="500" fill="hold"/>
+                                        <p:tgtEl>
+                                          <p:spTgt spid="58370">
+                                            <p:txEl>
+                                              <p:pRg st="2" end="2"/>
+                                            </p:txEl>
+                                          </p:spTgt>
+                                        </p:tgtEl>
+                                        <p:attrNameLst>
+                                          <p:attrName>ppt_y</p:attrName>
+                                        </p:attrNameLst>
+                                      </p:cBhvr>
+                                      <p:tavLst>
+                                        <p:tav tm="0">
+                                          <p:val>
+                                            <p:strVal val="1+#ppt_h/2"/>
+                                          </p:val>
+                                        </p:tav>
+                                        <p:tav tm="100000">
+                                          <p:val>
+                                            <p:strVal val="#ppt_y"/>
+                                          </p:val>
+                                        </p:tav>
+                                      </p:tavLst>
+                                    </p:anim>
+                                  </p:childTnLst>
+                                </p:cTn>
+                              </p:par>
+                            </p:childTnLst>
+                          </p:cTn>
+                        </p:par>
+                      </p:childTnLst>
+                    </p:cTn>
+                  </p:par>
+                  <p:par>
+                    <p:cTn id="13" fill="hold">
+                      <p:stCondLst>
+                        <p:cond delay="indefinite"/>
+                      </p:stCondLst>
+                      <p:childTnLst>
+                        <p:par>
+                          <p:cTn id="14" fill="hold">
+                            <p:stCondLst>
+                              <p:cond delay="0"/>
+                            </p:stCondLst>
+                            <p:childTnLst>
+                              <p:par>
+                                <p:cTn id="15" presetID="2" presetClass="entr" presetSubtype="4" fill="hold" nodeType="clickEffect">
+                                  <p:stCondLst>
+                                    <p:cond delay="0"/>
+                                  </p:stCondLst>
+                                  <p:childTnLst>
+                                    <p:set>
+                                      <p:cBhvr>
+                                        <p:cTn id="16" dur="1" fill="hold">
+                                          <p:stCondLst>
+                                            <p:cond delay="0"/>
+                                          </p:stCondLst>
+                                        </p:cTn>
+                                        <p:tgtEl>
+                                          <p:spTgt spid="58370">
+                                            <p:txEl>
+                                              <p:pRg st="3" end="3"/>
+                                            </p:txEl>
+                                          </p:spTgt>
+                                        </p:tgtEl>
+                                        <p:attrNameLst>
+                                          <p:attrName>style.visibility</p:attrName>
+                                        </p:attrNameLst>
+                                      </p:cBhvr>
+                                      <p:to>
+                                        <p:strVal val="visible"/>
+                                      </p:to>
+                                    </p:set>
+                                    <p:anim calcmode="lin" valueType="num">
+                                      <p:cBhvr additive="base">
+                                        <p:cTn id="17" dur="500" fill="hold"/>
+                                        <p:tgtEl>
+                                          <p:spTgt spid="58370">
+                                            <p:txEl>
+                                              <p:pRg st="3" end="3"/>
+                                            </p:txEl>
+                                          </p:spTgt>
+                                        </p:tgtEl>
+                                        <p:attrNameLst>
+                                          <p:attrName>ppt_x</p:attrName>
+                                        </p:attrNameLst>
+                                      </p:cBhvr>
+                                      <p:tavLst>
+                                        <p:tav tm="0">
+                                          <p:val>
+                                            <p:strVal val="#ppt_x"/>
+                                          </p:val>
+                                        </p:tav>
+                                        <p:tav tm="100000">
+                                          <p:val>
+                                            <p:strVal val="#ppt_x"/>
+                                          </p:val>
+                                        </p:tav>
+                                      </p:tavLst>
+                                    </p:anim>
+                                    <p:anim calcmode="lin" valueType="num">
+                                      <p:cBhvr additive="base">
+                                        <p:cTn id="18" dur="500" fill="hold"/>
+                                        <p:tgtEl>
+                                          <p:spTgt spid="58370">
+                                            <p:txEl>
+                                              <p:pRg st="3" end="3"/>
+                                            </p:txEl>
+                                          </p:spTgt>
+                                        </p:tgtEl>
+                                        <p:attrNameLst>
+                                          <p:attrName>ppt_y</p:attrName>
+                                        </p:attrNameLst>
+                                      </p:cBhvr>
+                                      <p:tavLst>
+                                        <p:tav tm="0">
+                                          <p:val>
+                                            <p:strVal val="1+#ppt_h/2"/>
+                                          </p:val>
+                                        </p:tav>
+                                        <p:tav tm="100000">
+                                          <p:val>
+                                            <p:strVal val="#ppt_y"/>
+                                          </p:val>
+                                        </p:tav>
+                                      </p:tavLst>
+                                    </p:anim>
+                                  </p:childTnLst>
+                                </p:cTn>
+                              </p:par>
+                            </p:childTnLst>
+                          </p:cTn>
+                        </p:par>
+                      </p:childTnLst>
+                    </p:cTn>
+                  </p:par>
+                  <p:par>
+                    <p:cTn id="19" fill="hold">
+                      <p:stCondLst>
+                        <p:cond delay="indefinite"/>
+                      </p:stCondLst>
+                      <p:childTnLst>
+                        <p:par>
+                          <p:cTn id="20" fill="hold">
+                            <p:stCondLst>
+                              <p:cond delay="0"/>
+                            </p:stCondLst>
+                            <p:childTnLst>
+                              <p:par>
+                                <p:cTn id="21" presetID="2" presetClass="entr" presetSubtype="4" fill="hold" nodeType="clickEffect">
+                                  <p:stCondLst>
+                                    <p:cond delay="0"/>
+                                  </p:stCondLst>
+                                  <p:childTnLst>
+                                    <p:set>
+                                      <p:cBhvr>
+                                        <p:cTn id="22" dur="1" fill="hold">
+                                          <p:stCondLst>
+                                            <p:cond delay="0"/>
+                                          </p:stCondLst>
+                                        </p:cTn>
+                                        <p:tgtEl>
+                                          <p:spTgt spid="58370">
+                                            <p:txEl>
+                                              <p:pRg st="4" end="4"/>
+                                            </p:txEl>
+                                          </p:spTgt>
+                                        </p:tgtEl>
+                                        <p:attrNameLst>
+                                          <p:attrName>style.visibility</p:attrName>
+                                        </p:attrNameLst>
+                                      </p:cBhvr>
+                                      <p:to>
+                                        <p:strVal val="visible"/>
+                                      </p:to>
+                                    </p:set>
+                                    <p:anim calcmode="lin" valueType="num">
+                                      <p:cBhvr additive="base">
+                                        <p:cTn id="23" dur="500" fill="hold"/>
+                                        <p:tgtEl>
+                                          <p:spTgt spid="58370">
+                                            <p:txEl>
+                                              <p:pRg st="4" end="4"/>
+                                            </p:txEl>
+                                          </p:spTgt>
+                                        </p:tgtEl>
+                                        <p:attrNameLst>
+                                          <p:attrName>ppt_x</p:attrName>
+                                        </p:attrNameLst>
+                                      </p:cBhvr>
+                                      <p:tavLst>
+                                        <p:tav tm="0">
+                                          <p:val>
+                                            <p:strVal val="#ppt_x"/>
+                                          </p:val>
+                                        </p:tav>
+                                        <p:tav tm="100000">
+                                          <p:val>
+                                            <p:strVal val="#ppt_x"/>
+                                          </p:val>
+                                        </p:tav>
+                                      </p:tavLst>
+                                    </p:anim>
+                                    <p:anim calcmode="lin" valueType="num">
+                                      <p:cBhvr additive="base">
+                                        <p:cTn id="24" dur="500" fill="hold"/>
+                                        <p:tgtEl>
+                                          <p:spTgt spid="58370">
+                                            <p:txEl>
+                                              <p:pRg st="4" end="4"/>
+                                            </p:txEl>
+                                          </p:spTgt>
+                                        </p:tgtEl>
+                                        <p:attrNameLst>
+                                          <p:attrName>ppt_y</p:attrName>
+                                        </p:attrNameLst>
+                                      </p:cBhvr>
+                                      <p:tavLst>
+                                        <p:tav tm="0">
+                                          <p:val>
+                                            <p:strVal val="1+#ppt_h/2"/>
+                                          </p:val>
+                                        </p:tav>
+                                        <p:tav tm="100000">
+                                          <p:val>
+                                            <p:strVal val="#ppt_y"/>
+                                          </p:val>
+                                        </p:tav>
+                                      </p:tavLst>
+                                    </p:anim>
+                                  </p:childTnLst>
+                                </p:cTn>
+                              </p:par>
+                            </p:childTnLst>
+                          </p:cTn>
+                        </p:par>
+                      </p:childTnLst>
+                    </p:cTn>
+                  </p:par>
+                </p:childTnLst>
+              </p:cTn>
+              <p:prevCondLst>
+                <p:cond evt="onPrev" delay="0">
+                  <p:tgtEl>
+                    <p:sldTgt/>
+                  </p:tgtEl>
+                </p:cond>
+              </p:prevCondLst>
+              <p:nextCondLst>
+                <p:cond evt="onNext" delay="0">
+                  <p:tgtEl>
+                    <p:sldTgt/>
+                  </p:tgtEl>
+                </p:cond>
+              </p:nextCondLst>
+            </p:seq>
+          </p:childTnLst>
+        </p:cTn>
+      </p:par>
+    </p:tnLst>
+  </p:timing>
 </p:sld>
 </file>
 
@@ -14625,14 +15417,14 @@
           </a:ln>
           <a:extLst>
             <a:ext uri="{909E8E84-426E-40dd-AFC4-6F175D3DCCD1}">
-              <a14:hiddenFill xmlns:a14="http://schemas.microsoft.com/office/drawing/2010/main" xmlns="">
+              <a14:hiddenFill xmlns="" xmlns:a14="http://schemas.microsoft.com/office/drawing/2010/main">
                 <a:solidFill>
                   <a:srgbClr val="FFFFFF"/>
                 </a:solidFill>
               </a14:hiddenFill>
             </a:ext>
             <a:ext uri="{91240B29-F687-4f45-9708-019B960494DF}">
-              <a14:hiddenLine xmlns:a14="http://schemas.microsoft.com/office/drawing/2010/main" xmlns="" w="9525">
+              <a14:hiddenLine xmlns="" xmlns:a14="http://schemas.microsoft.com/office/drawing/2010/main" w="9525">
                 <a:solidFill>
                   <a:srgbClr val="000000"/>
                 </a:solidFill>
@@ -14942,14 +15734,14 @@
           </a:ln>
           <a:extLst>
             <a:ext uri="{909E8E84-426E-40dd-AFC4-6F175D3DCCD1}">
-              <a14:hiddenFill xmlns:a14="http://schemas.microsoft.com/office/drawing/2010/main" xmlns="">
+              <a14:hiddenFill xmlns="" xmlns:a14="http://schemas.microsoft.com/office/drawing/2010/main">
                 <a:solidFill>
                   <a:srgbClr val="FFFFFF"/>
                 </a:solidFill>
               </a14:hiddenFill>
             </a:ext>
             <a:ext uri="{91240B29-F687-4f45-9708-019B960494DF}">
-              <a14:hiddenLine xmlns:a14="http://schemas.microsoft.com/office/drawing/2010/main" xmlns="" w="9525">
+              <a14:hiddenLine xmlns="" xmlns:a14="http://schemas.microsoft.com/office/drawing/2010/main" w="9525">
                 <a:solidFill>
                   <a:srgbClr val="000000"/>
                 </a:solidFill>
@@ -15133,7 +15925,7 @@
               <a:buNone/>
             </a:pPr>
             <a:r>
-              <a:rPr lang="en-US" altLang="en-US" sz="2000" b="0">
+              <a:rPr lang="en-US" altLang="en-US" sz="2000" b="0" dirty="0">
                 <a:solidFill>
                   <a:srgbClr val="A57133"/>
                 </a:solidFill>
@@ -15165,14 +15957,14 @@
           </a:ln>
           <a:extLst>
             <a:ext uri="{909E8E84-426E-40dd-AFC4-6F175D3DCCD1}">
-              <a14:hiddenFill xmlns:a14="http://schemas.microsoft.com/office/drawing/2010/main" xmlns="">
+              <a14:hiddenFill xmlns="" xmlns:a14="http://schemas.microsoft.com/office/drawing/2010/main">
                 <a:solidFill>
                   <a:srgbClr val="FFFFFF"/>
                 </a:solidFill>
               </a14:hiddenFill>
             </a:ext>
             <a:ext uri="{91240B29-F687-4f45-9708-019B960494DF}">
-              <a14:hiddenLine xmlns:a14="http://schemas.microsoft.com/office/drawing/2010/main" xmlns="" w="9525">
+              <a14:hiddenLine xmlns="" xmlns:a14="http://schemas.microsoft.com/office/drawing/2010/main" w="9525">
                 <a:solidFill>
                   <a:srgbClr val="000000"/>
                 </a:solidFill>
@@ -15356,7 +16148,7 @@
               <a:buNone/>
             </a:pPr>
             <a:r>
-              <a:rPr lang="en-US" altLang="en-US" sz="2000" b="0">
+              <a:rPr lang="en-US" altLang="en-US" sz="2000" b="0" dirty="0">
                 <a:solidFill>
                   <a:srgbClr val="A57133"/>
                 </a:solidFill>
@@ -15388,14 +16180,14 @@
           </a:ln>
           <a:extLst>
             <a:ext uri="{909E8E84-426E-40dd-AFC4-6F175D3DCCD1}">
-              <a14:hiddenFill xmlns:a14="http://schemas.microsoft.com/office/drawing/2010/main" xmlns="">
+              <a14:hiddenFill xmlns="" xmlns:a14="http://schemas.microsoft.com/office/drawing/2010/main">
                 <a:solidFill>
                   <a:srgbClr val="FFFFFF"/>
                 </a:solidFill>
               </a14:hiddenFill>
             </a:ext>
             <a:ext uri="{91240B29-F687-4f45-9708-019B960494DF}">
-              <a14:hiddenLine xmlns:a14="http://schemas.microsoft.com/office/drawing/2010/main" xmlns="" w="9525">
+              <a14:hiddenLine xmlns="" xmlns:a14="http://schemas.microsoft.com/office/drawing/2010/main" w="9525">
                 <a:solidFill>
                   <a:srgbClr val="000000"/>
                 </a:solidFill>
@@ -15579,7 +16371,7 @@
               <a:buNone/>
             </a:pPr>
             <a:r>
-              <a:rPr lang="en-US" altLang="en-US" sz="2000" b="0">
+              <a:rPr lang="en-US" altLang="en-US" sz="2000" b="0" dirty="0">
                 <a:solidFill>
                   <a:srgbClr val="A57133"/>
                 </a:solidFill>
@@ -15616,7 +16408,7 @@
           </a:ln>
           <a:extLst>
             <a:ext uri="{909E8E84-426E-40dd-AFC4-6F175D3DCCD1}">
-              <a14:hiddenFill xmlns:a14="http://schemas.microsoft.com/office/drawing/2010/main" xmlns="">
+              <a14:hiddenFill xmlns="" xmlns:a14="http://schemas.microsoft.com/office/drawing/2010/main">
                 <a:noFill/>
               </a14:hiddenFill>
             </a:ext>
@@ -15657,7 +16449,7 @@
           </a:ln>
           <a:extLst>
             <a:ext uri="{909E8E84-426E-40dd-AFC4-6F175D3DCCD1}">
-              <a14:hiddenFill xmlns:a14="http://schemas.microsoft.com/office/drawing/2010/main" xmlns="">
+              <a14:hiddenFill xmlns="" xmlns:a14="http://schemas.microsoft.com/office/drawing/2010/main">
                 <a:noFill/>
               </a14:hiddenFill>
             </a:ext>
@@ -15698,7 +16490,7 @@
           </a:ln>
           <a:extLst>
             <a:ext uri="{909E8E84-426E-40dd-AFC4-6F175D3DCCD1}">
-              <a14:hiddenFill xmlns:a14="http://schemas.microsoft.com/office/drawing/2010/main" xmlns="">
+              <a14:hiddenFill xmlns="" xmlns:a14="http://schemas.microsoft.com/office/drawing/2010/main">
                 <a:noFill/>
               </a14:hiddenFill>
             </a:ext>
@@ -15734,14 +16526,14 @@
           </a:ln>
           <a:extLst>
             <a:ext uri="{909E8E84-426E-40dd-AFC4-6F175D3DCCD1}">
-              <a14:hiddenFill xmlns:a14="http://schemas.microsoft.com/office/drawing/2010/main" xmlns="">
+              <a14:hiddenFill xmlns="" xmlns:a14="http://schemas.microsoft.com/office/drawing/2010/main">
                 <a:solidFill>
                   <a:srgbClr val="FFFFFF"/>
                 </a:solidFill>
               </a14:hiddenFill>
             </a:ext>
             <a:ext uri="{91240B29-F687-4f45-9708-019B960494DF}">
-              <a14:hiddenLine xmlns:a14="http://schemas.microsoft.com/office/drawing/2010/main" xmlns="" w="9525">
+              <a14:hiddenLine xmlns="" xmlns:a14="http://schemas.microsoft.com/office/drawing/2010/main" w="9525">
                 <a:solidFill>
                   <a:srgbClr val="000000"/>
                 </a:solidFill>
@@ -15925,7 +16717,7 @@
               <a:buNone/>
             </a:pPr>
             <a:r>
-              <a:rPr lang="en-US" altLang="en-US" sz="2000" b="0">
+              <a:rPr lang="en-US" altLang="en-US" sz="2000" b="0" dirty="0">
                 <a:solidFill>
                   <a:srgbClr val="A57133"/>
                 </a:solidFill>
@@ -15962,7 +16754,7 @@
           </a:ln>
           <a:extLst>
             <a:ext uri="{909E8E84-426E-40dd-AFC4-6F175D3DCCD1}">
-              <a14:hiddenFill xmlns:a14="http://schemas.microsoft.com/office/drawing/2010/main" xmlns="">
+              <a14:hiddenFill xmlns="" xmlns:a14="http://schemas.microsoft.com/office/drawing/2010/main">
                 <a:noFill/>
               </a14:hiddenFill>
             </a:ext>
@@ -15998,14 +16790,14 @@
           </a:ln>
           <a:extLst>
             <a:ext uri="{909E8E84-426E-40dd-AFC4-6F175D3DCCD1}">
-              <a14:hiddenFill xmlns:a14="http://schemas.microsoft.com/office/drawing/2010/main" xmlns="">
+              <a14:hiddenFill xmlns="" xmlns:a14="http://schemas.microsoft.com/office/drawing/2010/main">
                 <a:solidFill>
                   <a:srgbClr val="FFFFFF"/>
                 </a:solidFill>
               </a14:hiddenFill>
             </a:ext>
             <a:ext uri="{91240B29-F687-4f45-9708-019B960494DF}">
-              <a14:hiddenLine xmlns:a14="http://schemas.microsoft.com/office/drawing/2010/main" xmlns="" w="9525">
+              <a14:hiddenLine xmlns="" xmlns:a14="http://schemas.microsoft.com/office/drawing/2010/main" w="9525">
                 <a:solidFill>
                   <a:srgbClr val="000000"/>
                 </a:solidFill>
@@ -16226,7 +17018,7 @@
           </a:ln>
           <a:extLst>
             <a:ext uri="{909E8E84-426E-40dd-AFC4-6F175D3DCCD1}">
-              <a14:hiddenFill xmlns:a14="http://schemas.microsoft.com/office/drawing/2010/main" xmlns="">
+              <a14:hiddenFill xmlns="" xmlns:a14="http://schemas.microsoft.com/office/drawing/2010/main">
                 <a:noFill/>
               </a14:hiddenFill>
             </a:ext>
@@ -16262,14 +17054,14 @@
           </a:ln>
           <a:extLst>
             <a:ext uri="{909E8E84-426E-40dd-AFC4-6F175D3DCCD1}">
-              <a14:hiddenFill xmlns:a14="http://schemas.microsoft.com/office/drawing/2010/main" xmlns="">
+              <a14:hiddenFill xmlns="" xmlns:a14="http://schemas.microsoft.com/office/drawing/2010/main">
                 <a:solidFill>
                   <a:srgbClr val="FFFFFF"/>
                 </a:solidFill>
               </a14:hiddenFill>
             </a:ext>
             <a:ext uri="{91240B29-F687-4f45-9708-019B960494DF}">
-              <a14:hiddenLine xmlns:a14="http://schemas.microsoft.com/office/drawing/2010/main" xmlns="" w="9525">
+              <a14:hiddenLine xmlns="" xmlns:a14="http://schemas.microsoft.com/office/drawing/2010/main" w="9525">
                 <a:solidFill>
                   <a:srgbClr val="000000"/>
                 </a:solidFill>
@@ -16453,7 +17245,7 @@
               <a:buNone/>
             </a:pPr>
             <a:r>
-              <a:rPr lang="en-US" altLang="en-US" sz="2000" b="0">
+              <a:rPr lang="en-US" altLang="en-US" sz="2000" b="0" dirty="0">
                 <a:solidFill>
                   <a:srgbClr val="A57133"/>
                 </a:solidFill>
@@ -16490,7 +17282,7 @@
           </a:ln>
           <a:extLst>
             <a:ext uri="{909E8E84-426E-40dd-AFC4-6F175D3DCCD1}">
-              <a14:hiddenFill xmlns:a14="http://schemas.microsoft.com/office/drawing/2010/main" xmlns="">
+              <a14:hiddenFill xmlns="" xmlns:a14="http://schemas.microsoft.com/office/drawing/2010/main">
                 <a:noFill/>
               </a14:hiddenFill>
             </a:ext>
@@ -16532,14 +17324,14 @@
           </a:ln>
           <a:extLst>
             <a:ext uri="{909E8E84-426E-40dd-AFC4-6F175D3DCCD1}">
-              <a14:hiddenFill xmlns:a14="http://schemas.microsoft.com/office/drawing/2010/main" xmlns="">
+              <a14:hiddenFill xmlns="" xmlns:a14="http://schemas.microsoft.com/office/drawing/2010/main">
                 <a:solidFill>
                   <a:srgbClr val="FFFFFF"/>
                 </a:solidFill>
               </a14:hiddenFill>
             </a:ext>
             <a:ext uri="{91240B29-F687-4f45-9708-019B960494DF}">
-              <a14:hiddenLine xmlns:a14="http://schemas.microsoft.com/office/drawing/2010/main" xmlns="" w="9525">
+              <a14:hiddenLine xmlns="" xmlns:a14="http://schemas.microsoft.com/office/drawing/2010/main" w="9525">
                 <a:solidFill>
                   <a:srgbClr val="000000"/>
                 </a:solidFill>
@@ -16717,6 +17509,1034 @@
     <a:masterClrMapping/>
   </p:clrMapOvr>
   <p:transition spd="med"/>
+  <p:timing>
+    <p:tnLst>
+      <p:par>
+        <p:cTn id="1" dur="indefinite" restart="never" nodeType="tmRoot">
+          <p:childTnLst>
+            <p:seq concurrent="1" nextAc="seek">
+              <p:cTn id="2" dur="indefinite" nodeType="mainSeq">
+                <p:childTnLst>
+                  <p:par>
+                    <p:cTn id="3" fill="hold">
+                      <p:stCondLst>
+                        <p:cond delay="indefinite"/>
+                      </p:stCondLst>
+                      <p:childTnLst>
+                        <p:par>
+                          <p:cTn id="4" fill="hold">
+                            <p:stCondLst>
+                              <p:cond delay="0"/>
+                            </p:stCondLst>
+                            <p:childTnLst>
+                              <p:par>
+                                <p:cTn id="5" presetID="2" presetClass="entr" presetSubtype="4" fill="hold" grpId="0" nodeType="clickEffect">
+                                  <p:stCondLst>
+                                    <p:cond delay="0"/>
+                                  </p:stCondLst>
+                                  <p:childTnLst>
+                                    <p:set>
+                                      <p:cBhvr>
+                                        <p:cTn id="6" dur="1" fill="hold">
+                                          <p:stCondLst>
+                                            <p:cond delay="0"/>
+                                          </p:stCondLst>
+                                        </p:cTn>
+                                        <p:tgtEl>
+                                          <p:spTgt spid="54282"/>
+                                        </p:tgtEl>
+                                        <p:attrNameLst>
+                                          <p:attrName>style.visibility</p:attrName>
+                                        </p:attrNameLst>
+                                      </p:cBhvr>
+                                      <p:to>
+                                        <p:strVal val="visible"/>
+                                      </p:to>
+                                    </p:set>
+                                    <p:anim calcmode="lin" valueType="num">
+                                      <p:cBhvr additive="base">
+                                        <p:cTn id="7" dur="500" fill="hold"/>
+                                        <p:tgtEl>
+                                          <p:spTgt spid="54282"/>
+                                        </p:tgtEl>
+                                        <p:attrNameLst>
+                                          <p:attrName>ppt_x</p:attrName>
+                                        </p:attrNameLst>
+                                      </p:cBhvr>
+                                      <p:tavLst>
+                                        <p:tav tm="0">
+                                          <p:val>
+                                            <p:strVal val="#ppt_x"/>
+                                          </p:val>
+                                        </p:tav>
+                                        <p:tav tm="100000">
+                                          <p:val>
+                                            <p:strVal val="#ppt_x"/>
+                                          </p:val>
+                                        </p:tav>
+                                      </p:tavLst>
+                                    </p:anim>
+                                    <p:anim calcmode="lin" valueType="num">
+                                      <p:cBhvr additive="base">
+                                        <p:cTn id="8" dur="500" fill="hold"/>
+                                        <p:tgtEl>
+                                          <p:spTgt spid="54282"/>
+                                        </p:tgtEl>
+                                        <p:attrNameLst>
+                                          <p:attrName>ppt_y</p:attrName>
+                                        </p:attrNameLst>
+                                      </p:cBhvr>
+                                      <p:tavLst>
+                                        <p:tav tm="0">
+                                          <p:val>
+                                            <p:strVal val="1+#ppt_h/2"/>
+                                          </p:val>
+                                        </p:tav>
+                                        <p:tav tm="100000">
+                                          <p:val>
+                                            <p:strVal val="#ppt_y"/>
+                                          </p:val>
+                                        </p:tav>
+                                      </p:tavLst>
+                                    </p:anim>
+                                  </p:childTnLst>
+                                </p:cTn>
+                              </p:par>
+                              <p:par>
+                                <p:cTn id="9" presetID="2" presetClass="entr" presetSubtype="4" fill="hold" grpId="0" nodeType="withEffect">
+                                  <p:stCondLst>
+                                    <p:cond delay="0"/>
+                                  </p:stCondLst>
+                                  <p:childTnLst>
+                                    <p:set>
+                                      <p:cBhvr>
+                                        <p:cTn id="10" dur="1" fill="hold">
+                                          <p:stCondLst>
+                                            <p:cond delay="0"/>
+                                          </p:stCondLst>
+                                        </p:cTn>
+                                        <p:tgtEl>
+                                          <p:spTgt spid="54283"/>
+                                        </p:tgtEl>
+                                        <p:attrNameLst>
+                                          <p:attrName>style.visibility</p:attrName>
+                                        </p:attrNameLst>
+                                      </p:cBhvr>
+                                      <p:to>
+                                        <p:strVal val="visible"/>
+                                      </p:to>
+                                    </p:set>
+                                    <p:anim calcmode="lin" valueType="num">
+                                      <p:cBhvr additive="base">
+                                        <p:cTn id="11" dur="500" fill="hold"/>
+                                        <p:tgtEl>
+                                          <p:spTgt spid="54283"/>
+                                        </p:tgtEl>
+                                        <p:attrNameLst>
+                                          <p:attrName>ppt_x</p:attrName>
+                                        </p:attrNameLst>
+                                      </p:cBhvr>
+                                      <p:tavLst>
+                                        <p:tav tm="0">
+                                          <p:val>
+                                            <p:strVal val="#ppt_x"/>
+                                          </p:val>
+                                        </p:tav>
+                                        <p:tav tm="100000">
+                                          <p:val>
+                                            <p:strVal val="#ppt_x"/>
+                                          </p:val>
+                                        </p:tav>
+                                      </p:tavLst>
+                                    </p:anim>
+                                    <p:anim calcmode="lin" valueType="num">
+                                      <p:cBhvr additive="base">
+                                        <p:cTn id="12" dur="500" fill="hold"/>
+                                        <p:tgtEl>
+                                          <p:spTgt spid="54283"/>
+                                        </p:tgtEl>
+                                        <p:attrNameLst>
+                                          <p:attrName>ppt_y</p:attrName>
+                                        </p:attrNameLst>
+                                      </p:cBhvr>
+                                      <p:tavLst>
+                                        <p:tav tm="0">
+                                          <p:val>
+                                            <p:strVal val="1+#ppt_h/2"/>
+                                          </p:val>
+                                        </p:tav>
+                                        <p:tav tm="100000">
+                                          <p:val>
+                                            <p:strVal val="#ppt_y"/>
+                                          </p:val>
+                                        </p:tav>
+                                      </p:tavLst>
+                                    </p:anim>
+                                  </p:childTnLst>
+                                </p:cTn>
+                              </p:par>
+                            </p:childTnLst>
+                          </p:cTn>
+                        </p:par>
+                      </p:childTnLst>
+                    </p:cTn>
+                  </p:par>
+                  <p:par>
+                    <p:cTn id="13" fill="hold">
+                      <p:stCondLst>
+                        <p:cond delay="indefinite"/>
+                      </p:stCondLst>
+                      <p:childTnLst>
+                        <p:par>
+                          <p:cTn id="14" fill="hold">
+                            <p:stCondLst>
+                              <p:cond delay="0"/>
+                            </p:stCondLst>
+                            <p:childTnLst>
+                              <p:par>
+                                <p:cTn id="15" presetID="2" presetClass="entr" presetSubtype="4" fill="hold" grpId="0" nodeType="clickEffect">
+                                  <p:stCondLst>
+                                    <p:cond delay="0"/>
+                                  </p:stCondLst>
+                                  <p:childTnLst>
+                                    <p:set>
+                                      <p:cBhvr>
+                                        <p:cTn id="16" dur="1" fill="hold">
+                                          <p:stCondLst>
+                                            <p:cond delay="0"/>
+                                          </p:stCondLst>
+                                        </p:cTn>
+                                        <p:tgtEl>
+                                          <p:spTgt spid="54276"/>
+                                        </p:tgtEl>
+                                        <p:attrNameLst>
+                                          <p:attrName>style.visibility</p:attrName>
+                                        </p:attrNameLst>
+                                      </p:cBhvr>
+                                      <p:to>
+                                        <p:strVal val="visible"/>
+                                      </p:to>
+                                    </p:set>
+                                    <p:anim calcmode="lin" valueType="num">
+                                      <p:cBhvr additive="base">
+                                        <p:cTn id="17" dur="500" fill="hold"/>
+                                        <p:tgtEl>
+                                          <p:spTgt spid="54276"/>
+                                        </p:tgtEl>
+                                        <p:attrNameLst>
+                                          <p:attrName>ppt_x</p:attrName>
+                                        </p:attrNameLst>
+                                      </p:cBhvr>
+                                      <p:tavLst>
+                                        <p:tav tm="0">
+                                          <p:val>
+                                            <p:strVal val="#ppt_x"/>
+                                          </p:val>
+                                        </p:tav>
+                                        <p:tav tm="100000">
+                                          <p:val>
+                                            <p:strVal val="#ppt_x"/>
+                                          </p:val>
+                                        </p:tav>
+                                      </p:tavLst>
+                                    </p:anim>
+                                    <p:anim calcmode="lin" valueType="num">
+                                      <p:cBhvr additive="base">
+                                        <p:cTn id="18" dur="500" fill="hold"/>
+                                        <p:tgtEl>
+                                          <p:spTgt spid="54276"/>
+                                        </p:tgtEl>
+                                        <p:attrNameLst>
+                                          <p:attrName>ppt_y</p:attrName>
+                                        </p:attrNameLst>
+                                      </p:cBhvr>
+                                      <p:tavLst>
+                                        <p:tav tm="0">
+                                          <p:val>
+                                            <p:strVal val="1+#ppt_h/2"/>
+                                          </p:val>
+                                        </p:tav>
+                                        <p:tav tm="100000">
+                                          <p:val>
+                                            <p:strVal val="#ppt_y"/>
+                                          </p:val>
+                                        </p:tav>
+                                      </p:tavLst>
+                                    </p:anim>
+                                  </p:childTnLst>
+                                </p:cTn>
+                              </p:par>
+                              <p:par>
+                                <p:cTn id="19" presetID="2" presetClass="entr" presetSubtype="4" fill="hold" grpId="0" nodeType="withEffect">
+                                  <p:stCondLst>
+                                    <p:cond delay="0"/>
+                                  </p:stCondLst>
+                                  <p:childTnLst>
+                                    <p:set>
+                                      <p:cBhvr>
+                                        <p:cTn id="20" dur="1" fill="hold">
+                                          <p:stCondLst>
+                                            <p:cond delay="0"/>
+                                          </p:stCondLst>
+                                        </p:cTn>
+                                        <p:tgtEl>
+                                          <p:spTgt spid="54279"/>
+                                        </p:tgtEl>
+                                        <p:attrNameLst>
+                                          <p:attrName>style.visibility</p:attrName>
+                                        </p:attrNameLst>
+                                      </p:cBhvr>
+                                      <p:to>
+                                        <p:strVal val="visible"/>
+                                      </p:to>
+                                    </p:set>
+                                    <p:anim calcmode="lin" valueType="num">
+                                      <p:cBhvr additive="base">
+                                        <p:cTn id="21" dur="500" fill="hold"/>
+                                        <p:tgtEl>
+                                          <p:spTgt spid="54279"/>
+                                        </p:tgtEl>
+                                        <p:attrNameLst>
+                                          <p:attrName>ppt_x</p:attrName>
+                                        </p:attrNameLst>
+                                      </p:cBhvr>
+                                      <p:tavLst>
+                                        <p:tav tm="0">
+                                          <p:val>
+                                            <p:strVal val="#ppt_x"/>
+                                          </p:val>
+                                        </p:tav>
+                                        <p:tav tm="100000">
+                                          <p:val>
+                                            <p:strVal val="#ppt_x"/>
+                                          </p:val>
+                                        </p:tav>
+                                      </p:tavLst>
+                                    </p:anim>
+                                    <p:anim calcmode="lin" valueType="num">
+                                      <p:cBhvr additive="base">
+                                        <p:cTn id="22" dur="500" fill="hold"/>
+                                        <p:tgtEl>
+                                          <p:spTgt spid="54279"/>
+                                        </p:tgtEl>
+                                        <p:attrNameLst>
+                                          <p:attrName>ppt_y</p:attrName>
+                                        </p:attrNameLst>
+                                      </p:cBhvr>
+                                      <p:tavLst>
+                                        <p:tav tm="0">
+                                          <p:val>
+                                            <p:strVal val="1+#ppt_h/2"/>
+                                          </p:val>
+                                        </p:tav>
+                                        <p:tav tm="100000">
+                                          <p:val>
+                                            <p:strVal val="#ppt_y"/>
+                                          </p:val>
+                                        </p:tav>
+                                      </p:tavLst>
+                                    </p:anim>
+                                  </p:childTnLst>
+                                </p:cTn>
+                              </p:par>
+                            </p:childTnLst>
+                          </p:cTn>
+                        </p:par>
+                      </p:childTnLst>
+                    </p:cTn>
+                  </p:par>
+                  <p:par>
+                    <p:cTn id="23" fill="hold">
+                      <p:stCondLst>
+                        <p:cond delay="indefinite"/>
+                      </p:stCondLst>
+                      <p:childTnLst>
+                        <p:par>
+                          <p:cTn id="24" fill="hold">
+                            <p:stCondLst>
+                              <p:cond delay="0"/>
+                            </p:stCondLst>
+                            <p:childTnLst>
+                              <p:par>
+                                <p:cTn id="25" presetID="2" presetClass="entr" presetSubtype="4" fill="hold" grpId="0" nodeType="clickEffect">
+                                  <p:stCondLst>
+                                    <p:cond delay="0"/>
+                                  </p:stCondLst>
+                                  <p:childTnLst>
+                                    <p:set>
+                                      <p:cBhvr>
+                                        <p:cTn id="26" dur="1" fill="hold">
+                                          <p:stCondLst>
+                                            <p:cond delay="0"/>
+                                          </p:stCondLst>
+                                        </p:cTn>
+                                        <p:tgtEl>
+                                          <p:spTgt spid="54277"/>
+                                        </p:tgtEl>
+                                        <p:attrNameLst>
+                                          <p:attrName>style.visibility</p:attrName>
+                                        </p:attrNameLst>
+                                      </p:cBhvr>
+                                      <p:to>
+                                        <p:strVal val="visible"/>
+                                      </p:to>
+                                    </p:set>
+                                    <p:anim calcmode="lin" valueType="num">
+                                      <p:cBhvr additive="base">
+                                        <p:cTn id="27" dur="500" fill="hold"/>
+                                        <p:tgtEl>
+                                          <p:spTgt spid="54277"/>
+                                        </p:tgtEl>
+                                        <p:attrNameLst>
+                                          <p:attrName>ppt_x</p:attrName>
+                                        </p:attrNameLst>
+                                      </p:cBhvr>
+                                      <p:tavLst>
+                                        <p:tav tm="0">
+                                          <p:val>
+                                            <p:strVal val="#ppt_x"/>
+                                          </p:val>
+                                        </p:tav>
+                                        <p:tav tm="100000">
+                                          <p:val>
+                                            <p:strVal val="#ppt_x"/>
+                                          </p:val>
+                                        </p:tav>
+                                      </p:tavLst>
+                                    </p:anim>
+                                    <p:anim calcmode="lin" valueType="num">
+                                      <p:cBhvr additive="base">
+                                        <p:cTn id="28" dur="500" fill="hold"/>
+                                        <p:tgtEl>
+                                          <p:spTgt spid="54277"/>
+                                        </p:tgtEl>
+                                        <p:attrNameLst>
+                                          <p:attrName>ppt_y</p:attrName>
+                                        </p:attrNameLst>
+                                      </p:cBhvr>
+                                      <p:tavLst>
+                                        <p:tav tm="0">
+                                          <p:val>
+                                            <p:strVal val="1+#ppt_h/2"/>
+                                          </p:val>
+                                        </p:tav>
+                                        <p:tav tm="100000">
+                                          <p:val>
+                                            <p:strVal val="#ppt_y"/>
+                                          </p:val>
+                                        </p:tav>
+                                      </p:tavLst>
+                                    </p:anim>
+                                  </p:childTnLst>
+                                </p:cTn>
+                              </p:par>
+                              <p:par>
+                                <p:cTn id="29" presetID="2" presetClass="entr" presetSubtype="4" fill="hold" grpId="0" nodeType="withEffect">
+                                  <p:stCondLst>
+                                    <p:cond delay="0"/>
+                                  </p:stCondLst>
+                                  <p:childTnLst>
+                                    <p:set>
+                                      <p:cBhvr>
+                                        <p:cTn id="30" dur="1" fill="hold">
+                                          <p:stCondLst>
+                                            <p:cond delay="0"/>
+                                          </p:stCondLst>
+                                        </p:cTn>
+                                        <p:tgtEl>
+                                          <p:spTgt spid="54280"/>
+                                        </p:tgtEl>
+                                        <p:attrNameLst>
+                                          <p:attrName>style.visibility</p:attrName>
+                                        </p:attrNameLst>
+                                      </p:cBhvr>
+                                      <p:to>
+                                        <p:strVal val="visible"/>
+                                      </p:to>
+                                    </p:set>
+                                    <p:anim calcmode="lin" valueType="num">
+                                      <p:cBhvr additive="base">
+                                        <p:cTn id="31" dur="500" fill="hold"/>
+                                        <p:tgtEl>
+                                          <p:spTgt spid="54280"/>
+                                        </p:tgtEl>
+                                        <p:attrNameLst>
+                                          <p:attrName>ppt_x</p:attrName>
+                                        </p:attrNameLst>
+                                      </p:cBhvr>
+                                      <p:tavLst>
+                                        <p:tav tm="0">
+                                          <p:val>
+                                            <p:strVal val="#ppt_x"/>
+                                          </p:val>
+                                        </p:tav>
+                                        <p:tav tm="100000">
+                                          <p:val>
+                                            <p:strVal val="#ppt_x"/>
+                                          </p:val>
+                                        </p:tav>
+                                      </p:tavLst>
+                                    </p:anim>
+                                    <p:anim calcmode="lin" valueType="num">
+                                      <p:cBhvr additive="base">
+                                        <p:cTn id="32" dur="500" fill="hold"/>
+                                        <p:tgtEl>
+                                          <p:spTgt spid="54280"/>
+                                        </p:tgtEl>
+                                        <p:attrNameLst>
+                                          <p:attrName>ppt_y</p:attrName>
+                                        </p:attrNameLst>
+                                      </p:cBhvr>
+                                      <p:tavLst>
+                                        <p:tav tm="0">
+                                          <p:val>
+                                            <p:strVal val="1+#ppt_h/2"/>
+                                          </p:val>
+                                        </p:tav>
+                                        <p:tav tm="100000">
+                                          <p:val>
+                                            <p:strVal val="#ppt_y"/>
+                                          </p:val>
+                                        </p:tav>
+                                      </p:tavLst>
+                                    </p:anim>
+                                  </p:childTnLst>
+                                </p:cTn>
+                              </p:par>
+                            </p:childTnLst>
+                          </p:cTn>
+                        </p:par>
+                      </p:childTnLst>
+                    </p:cTn>
+                  </p:par>
+                  <p:par>
+                    <p:cTn id="33" fill="hold">
+                      <p:stCondLst>
+                        <p:cond delay="indefinite"/>
+                      </p:stCondLst>
+                      <p:childTnLst>
+                        <p:par>
+                          <p:cTn id="34" fill="hold">
+                            <p:stCondLst>
+                              <p:cond delay="0"/>
+                            </p:stCondLst>
+                            <p:childTnLst>
+                              <p:par>
+                                <p:cTn id="35" presetID="2" presetClass="entr" presetSubtype="4" fill="hold" grpId="0" nodeType="clickEffect">
+                                  <p:stCondLst>
+                                    <p:cond delay="0"/>
+                                  </p:stCondLst>
+                                  <p:childTnLst>
+                                    <p:set>
+                                      <p:cBhvr>
+                                        <p:cTn id="36" dur="1" fill="hold">
+                                          <p:stCondLst>
+                                            <p:cond delay="0"/>
+                                          </p:stCondLst>
+                                        </p:cTn>
+                                        <p:tgtEl>
+                                          <p:spTgt spid="54278"/>
+                                        </p:tgtEl>
+                                        <p:attrNameLst>
+                                          <p:attrName>style.visibility</p:attrName>
+                                        </p:attrNameLst>
+                                      </p:cBhvr>
+                                      <p:to>
+                                        <p:strVal val="visible"/>
+                                      </p:to>
+                                    </p:set>
+                                    <p:anim calcmode="lin" valueType="num">
+                                      <p:cBhvr additive="base">
+                                        <p:cTn id="37" dur="500" fill="hold"/>
+                                        <p:tgtEl>
+                                          <p:spTgt spid="54278"/>
+                                        </p:tgtEl>
+                                        <p:attrNameLst>
+                                          <p:attrName>ppt_x</p:attrName>
+                                        </p:attrNameLst>
+                                      </p:cBhvr>
+                                      <p:tavLst>
+                                        <p:tav tm="0">
+                                          <p:val>
+                                            <p:strVal val="#ppt_x"/>
+                                          </p:val>
+                                        </p:tav>
+                                        <p:tav tm="100000">
+                                          <p:val>
+                                            <p:strVal val="#ppt_x"/>
+                                          </p:val>
+                                        </p:tav>
+                                      </p:tavLst>
+                                    </p:anim>
+                                    <p:anim calcmode="lin" valueType="num">
+                                      <p:cBhvr additive="base">
+                                        <p:cTn id="38" dur="500" fill="hold"/>
+                                        <p:tgtEl>
+                                          <p:spTgt spid="54278"/>
+                                        </p:tgtEl>
+                                        <p:attrNameLst>
+                                          <p:attrName>ppt_y</p:attrName>
+                                        </p:attrNameLst>
+                                      </p:cBhvr>
+                                      <p:tavLst>
+                                        <p:tav tm="0">
+                                          <p:val>
+                                            <p:strVal val="1+#ppt_h/2"/>
+                                          </p:val>
+                                        </p:tav>
+                                        <p:tav tm="100000">
+                                          <p:val>
+                                            <p:strVal val="#ppt_y"/>
+                                          </p:val>
+                                        </p:tav>
+                                      </p:tavLst>
+                                    </p:anim>
+                                  </p:childTnLst>
+                                </p:cTn>
+                              </p:par>
+                              <p:par>
+                                <p:cTn id="39" presetID="2" presetClass="entr" presetSubtype="4" fill="hold" grpId="0" nodeType="withEffect">
+                                  <p:stCondLst>
+                                    <p:cond delay="0"/>
+                                  </p:stCondLst>
+                                  <p:childTnLst>
+                                    <p:set>
+                                      <p:cBhvr>
+                                        <p:cTn id="40" dur="1" fill="hold">
+                                          <p:stCondLst>
+                                            <p:cond delay="0"/>
+                                          </p:stCondLst>
+                                        </p:cTn>
+                                        <p:tgtEl>
+                                          <p:spTgt spid="54281"/>
+                                        </p:tgtEl>
+                                        <p:attrNameLst>
+                                          <p:attrName>style.visibility</p:attrName>
+                                        </p:attrNameLst>
+                                      </p:cBhvr>
+                                      <p:to>
+                                        <p:strVal val="visible"/>
+                                      </p:to>
+                                    </p:set>
+                                    <p:anim calcmode="lin" valueType="num">
+                                      <p:cBhvr additive="base">
+                                        <p:cTn id="41" dur="500" fill="hold"/>
+                                        <p:tgtEl>
+                                          <p:spTgt spid="54281"/>
+                                        </p:tgtEl>
+                                        <p:attrNameLst>
+                                          <p:attrName>ppt_x</p:attrName>
+                                        </p:attrNameLst>
+                                      </p:cBhvr>
+                                      <p:tavLst>
+                                        <p:tav tm="0">
+                                          <p:val>
+                                            <p:strVal val="#ppt_x"/>
+                                          </p:val>
+                                        </p:tav>
+                                        <p:tav tm="100000">
+                                          <p:val>
+                                            <p:strVal val="#ppt_x"/>
+                                          </p:val>
+                                        </p:tav>
+                                      </p:tavLst>
+                                    </p:anim>
+                                    <p:anim calcmode="lin" valueType="num">
+                                      <p:cBhvr additive="base">
+                                        <p:cTn id="42" dur="500" fill="hold"/>
+                                        <p:tgtEl>
+                                          <p:spTgt spid="54281"/>
+                                        </p:tgtEl>
+                                        <p:attrNameLst>
+                                          <p:attrName>ppt_y</p:attrName>
+                                        </p:attrNameLst>
+                                      </p:cBhvr>
+                                      <p:tavLst>
+                                        <p:tav tm="0">
+                                          <p:val>
+                                            <p:strVal val="1+#ppt_h/2"/>
+                                          </p:val>
+                                        </p:tav>
+                                        <p:tav tm="100000">
+                                          <p:val>
+                                            <p:strVal val="#ppt_y"/>
+                                          </p:val>
+                                        </p:tav>
+                                      </p:tavLst>
+                                    </p:anim>
+                                  </p:childTnLst>
+                                </p:cTn>
+                              </p:par>
+                            </p:childTnLst>
+                          </p:cTn>
+                        </p:par>
+                      </p:childTnLst>
+                    </p:cTn>
+                  </p:par>
+                  <p:par>
+                    <p:cTn id="43" fill="hold">
+                      <p:stCondLst>
+                        <p:cond delay="indefinite"/>
+                      </p:stCondLst>
+                      <p:childTnLst>
+                        <p:par>
+                          <p:cTn id="44" fill="hold">
+                            <p:stCondLst>
+                              <p:cond delay="0"/>
+                            </p:stCondLst>
+                            <p:childTnLst>
+                              <p:par>
+                                <p:cTn id="45" presetID="2" presetClass="entr" presetSubtype="4" fill="hold" grpId="0" nodeType="clickEffect">
+                                  <p:stCondLst>
+                                    <p:cond delay="0"/>
+                                  </p:stCondLst>
+                                  <p:childTnLst>
+                                    <p:set>
+                                      <p:cBhvr>
+                                        <p:cTn id="46" dur="1" fill="hold">
+                                          <p:stCondLst>
+                                            <p:cond delay="0"/>
+                                          </p:stCondLst>
+                                        </p:cTn>
+                                        <p:tgtEl>
+                                          <p:spTgt spid="54286"/>
+                                        </p:tgtEl>
+                                        <p:attrNameLst>
+                                          <p:attrName>style.visibility</p:attrName>
+                                        </p:attrNameLst>
+                                      </p:cBhvr>
+                                      <p:to>
+                                        <p:strVal val="visible"/>
+                                      </p:to>
+                                    </p:set>
+                                    <p:anim calcmode="lin" valueType="num">
+                                      <p:cBhvr additive="base">
+                                        <p:cTn id="47" dur="500" fill="hold"/>
+                                        <p:tgtEl>
+                                          <p:spTgt spid="54286"/>
+                                        </p:tgtEl>
+                                        <p:attrNameLst>
+                                          <p:attrName>ppt_x</p:attrName>
+                                        </p:attrNameLst>
+                                      </p:cBhvr>
+                                      <p:tavLst>
+                                        <p:tav tm="0">
+                                          <p:val>
+                                            <p:strVal val="#ppt_x"/>
+                                          </p:val>
+                                        </p:tav>
+                                        <p:tav tm="100000">
+                                          <p:val>
+                                            <p:strVal val="#ppt_x"/>
+                                          </p:val>
+                                        </p:tav>
+                                      </p:tavLst>
+                                    </p:anim>
+                                    <p:anim calcmode="lin" valueType="num">
+                                      <p:cBhvr additive="base">
+                                        <p:cTn id="48" dur="500" fill="hold"/>
+                                        <p:tgtEl>
+                                          <p:spTgt spid="54286"/>
+                                        </p:tgtEl>
+                                        <p:attrNameLst>
+                                          <p:attrName>ppt_y</p:attrName>
+                                        </p:attrNameLst>
+                                      </p:cBhvr>
+                                      <p:tavLst>
+                                        <p:tav tm="0">
+                                          <p:val>
+                                            <p:strVal val="1+#ppt_h/2"/>
+                                          </p:val>
+                                        </p:tav>
+                                        <p:tav tm="100000">
+                                          <p:val>
+                                            <p:strVal val="#ppt_y"/>
+                                          </p:val>
+                                        </p:tav>
+                                      </p:tavLst>
+                                    </p:anim>
+                                  </p:childTnLst>
+                                </p:cTn>
+                              </p:par>
+                              <p:par>
+                                <p:cTn id="49" presetID="2" presetClass="entr" presetSubtype="4" fill="hold" grpId="0" nodeType="withEffect">
+                                  <p:stCondLst>
+                                    <p:cond delay="0"/>
+                                  </p:stCondLst>
+                                  <p:childTnLst>
+                                    <p:set>
+                                      <p:cBhvr>
+                                        <p:cTn id="50" dur="1" fill="hold">
+                                          <p:stCondLst>
+                                            <p:cond delay="0"/>
+                                          </p:stCondLst>
+                                        </p:cTn>
+                                        <p:tgtEl>
+                                          <p:spTgt spid="54287"/>
+                                        </p:tgtEl>
+                                        <p:attrNameLst>
+                                          <p:attrName>style.visibility</p:attrName>
+                                        </p:attrNameLst>
+                                      </p:cBhvr>
+                                      <p:to>
+                                        <p:strVal val="visible"/>
+                                      </p:to>
+                                    </p:set>
+                                    <p:anim calcmode="lin" valueType="num">
+                                      <p:cBhvr additive="base">
+                                        <p:cTn id="51" dur="500" fill="hold"/>
+                                        <p:tgtEl>
+                                          <p:spTgt spid="54287"/>
+                                        </p:tgtEl>
+                                        <p:attrNameLst>
+                                          <p:attrName>ppt_x</p:attrName>
+                                        </p:attrNameLst>
+                                      </p:cBhvr>
+                                      <p:tavLst>
+                                        <p:tav tm="0">
+                                          <p:val>
+                                            <p:strVal val="#ppt_x"/>
+                                          </p:val>
+                                        </p:tav>
+                                        <p:tav tm="100000">
+                                          <p:val>
+                                            <p:strVal val="#ppt_x"/>
+                                          </p:val>
+                                        </p:tav>
+                                      </p:tavLst>
+                                    </p:anim>
+                                    <p:anim calcmode="lin" valueType="num">
+                                      <p:cBhvr additive="base">
+                                        <p:cTn id="52" dur="500" fill="hold"/>
+                                        <p:tgtEl>
+                                          <p:spTgt spid="54287"/>
+                                        </p:tgtEl>
+                                        <p:attrNameLst>
+                                          <p:attrName>ppt_y</p:attrName>
+                                        </p:attrNameLst>
+                                      </p:cBhvr>
+                                      <p:tavLst>
+                                        <p:tav tm="0">
+                                          <p:val>
+                                            <p:strVal val="1+#ppt_h/2"/>
+                                          </p:val>
+                                        </p:tav>
+                                        <p:tav tm="100000">
+                                          <p:val>
+                                            <p:strVal val="#ppt_y"/>
+                                          </p:val>
+                                        </p:tav>
+                                      </p:tavLst>
+                                    </p:anim>
+                                  </p:childTnLst>
+                                </p:cTn>
+                              </p:par>
+                            </p:childTnLst>
+                          </p:cTn>
+                        </p:par>
+                      </p:childTnLst>
+                    </p:cTn>
+                  </p:par>
+                  <p:par>
+                    <p:cTn id="53" fill="hold">
+                      <p:stCondLst>
+                        <p:cond delay="indefinite"/>
+                      </p:stCondLst>
+                      <p:childTnLst>
+                        <p:par>
+                          <p:cTn id="54" fill="hold">
+                            <p:stCondLst>
+                              <p:cond delay="0"/>
+                            </p:stCondLst>
+                            <p:childTnLst>
+                              <p:par>
+                                <p:cTn id="55" presetID="2" presetClass="entr" presetSubtype="4" fill="hold" grpId="0" nodeType="clickEffect">
+                                  <p:stCondLst>
+                                    <p:cond delay="0"/>
+                                  </p:stCondLst>
+                                  <p:childTnLst>
+                                    <p:set>
+                                      <p:cBhvr>
+                                        <p:cTn id="56" dur="1" fill="hold">
+                                          <p:stCondLst>
+                                            <p:cond delay="0"/>
+                                          </p:stCondLst>
+                                        </p:cTn>
+                                        <p:tgtEl>
+                                          <p:spTgt spid="54284"/>
+                                        </p:tgtEl>
+                                        <p:attrNameLst>
+                                          <p:attrName>style.visibility</p:attrName>
+                                        </p:attrNameLst>
+                                      </p:cBhvr>
+                                      <p:to>
+                                        <p:strVal val="visible"/>
+                                      </p:to>
+                                    </p:set>
+                                    <p:anim calcmode="lin" valueType="num">
+                                      <p:cBhvr additive="base">
+                                        <p:cTn id="57" dur="500" fill="hold"/>
+                                        <p:tgtEl>
+                                          <p:spTgt spid="54284"/>
+                                        </p:tgtEl>
+                                        <p:attrNameLst>
+                                          <p:attrName>ppt_x</p:attrName>
+                                        </p:attrNameLst>
+                                      </p:cBhvr>
+                                      <p:tavLst>
+                                        <p:tav tm="0">
+                                          <p:val>
+                                            <p:strVal val="#ppt_x"/>
+                                          </p:val>
+                                        </p:tav>
+                                        <p:tav tm="100000">
+                                          <p:val>
+                                            <p:strVal val="#ppt_x"/>
+                                          </p:val>
+                                        </p:tav>
+                                      </p:tavLst>
+                                    </p:anim>
+                                    <p:anim calcmode="lin" valueType="num">
+                                      <p:cBhvr additive="base">
+                                        <p:cTn id="58" dur="500" fill="hold"/>
+                                        <p:tgtEl>
+                                          <p:spTgt spid="54284"/>
+                                        </p:tgtEl>
+                                        <p:attrNameLst>
+                                          <p:attrName>ppt_y</p:attrName>
+                                        </p:attrNameLst>
+                                      </p:cBhvr>
+                                      <p:tavLst>
+                                        <p:tav tm="0">
+                                          <p:val>
+                                            <p:strVal val="1+#ppt_h/2"/>
+                                          </p:val>
+                                        </p:tav>
+                                        <p:tav tm="100000">
+                                          <p:val>
+                                            <p:strVal val="#ppt_y"/>
+                                          </p:val>
+                                        </p:tav>
+                                      </p:tavLst>
+                                    </p:anim>
+                                  </p:childTnLst>
+                                </p:cTn>
+                              </p:par>
+                              <p:par>
+                                <p:cTn id="59" presetID="2" presetClass="entr" presetSubtype="4" fill="hold" grpId="0" nodeType="withEffect">
+                                  <p:stCondLst>
+                                    <p:cond delay="0"/>
+                                  </p:stCondLst>
+                                  <p:childTnLst>
+                                    <p:set>
+                                      <p:cBhvr>
+                                        <p:cTn id="60" dur="1" fill="hold">
+                                          <p:stCondLst>
+                                            <p:cond delay="0"/>
+                                          </p:stCondLst>
+                                        </p:cTn>
+                                        <p:tgtEl>
+                                          <p:spTgt spid="54285"/>
+                                        </p:tgtEl>
+                                        <p:attrNameLst>
+                                          <p:attrName>style.visibility</p:attrName>
+                                        </p:attrNameLst>
+                                      </p:cBhvr>
+                                      <p:to>
+                                        <p:strVal val="visible"/>
+                                      </p:to>
+                                    </p:set>
+                                    <p:anim calcmode="lin" valueType="num">
+                                      <p:cBhvr additive="base">
+                                        <p:cTn id="61" dur="500" fill="hold"/>
+                                        <p:tgtEl>
+                                          <p:spTgt spid="54285"/>
+                                        </p:tgtEl>
+                                        <p:attrNameLst>
+                                          <p:attrName>ppt_x</p:attrName>
+                                        </p:attrNameLst>
+                                      </p:cBhvr>
+                                      <p:tavLst>
+                                        <p:tav tm="0">
+                                          <p:val>
+                                            <p:strVal val="#ppt_x"/>
+                                          </p:val>
+                                        </p:tav>
+                                        <p:tav tm="100000">
+                                          <p:val>
+                                            <p:strVal val="#ppt_x"/>
+                                          </p:val>
+                                        </p:tav>
+                                      </p:tavLst>
+                                    </p:anim>
+                                    <p:anim calcmode="lin" valueType="num">
+                                      <p:cBhvr additive="base">
+                                        <p:cTn id="62" dur="500" fill="hold"/>
+                                        <p:tgtEl>
+                                          <p:spTgt spid="54285"/>
+                                        </p:tgtEl>
+                                        <p:attrNameLst>
+                                          <p:attrName>ppt_y</p:attrName>
+                                        </p:attrNameLst>
+                                      </p:cBhvr>
+                                      <p:tavLst>
+                                        <p:tav tm="0">
+                                          <p:val>
+                                            <p:strVal val="1+#ppt_h/2"/>
+                                          </p:val>
+                                        </p:tav>
+                                        <p:tav tm="100000">
+                                          <p:val>
+                                            <p:strVal val="#ppt_y"/>
+                                          </p:val>
+                                        </p:tav>
+                                      </p:tavLst>
+                                    </p:anim>
+                                  </p:childTnLst>
+                                </p:cTn>
+                              </p:par>
+                            </p:childTnLst>
+                          </p:cTn>
+                        </p:par>
+                      </p:childTnLst>
+                    </p:cTn>
+                  </p:par>
+                </p:childTnLst>
+              </p:cTn>
+              <p:prevCondLst>
+                <p:cond evt="onPrev" delay="0">
+                  <p:tgtEl>
+                    <p:sldTgt/>
+                  </p:tgtEl>
+                </p:cond>
+              </p:prevCondLst>
+              <p:nextCondLst>
+                <p:cond evt="onNext" delay="0">
+                  <p:tgtEl>
+                    <p:sldTgt/>
+                  </p:tgtEl>
+                </p:cond>
+              </p:nextCondLst>
+            </p:seq>
+          </p:childTnLst>
+        </p:cTn>
+      </p:par>
+    </p:tnLst>
+    <p:bldLst>
+      <p:bldP spid="54276" grpId="0"/>
+      <p:bldP spid="54277" grpId="0"/>
+      <p:bldP spid="54278" grpId="0"/>
+      <p:bldP spid="54279" grpId="0" animBg="1"/>
+      <p:bldP spid="54280" grpId="0" animBg="1"/>
+      <p:bldP spid="54281" grpId="0" animBg="1"/>
+      <p:bldP spid="54282" grpId="0"/>
+      <p:bldP spid="54283" grpId="0" animBg="1"/>
+      <p:bldP spid="54284" grpId="0"/>
+      <p:bldP spid="54285" grpId="0" animBg="1"/>
+      <p:bldP spid="54286" grpId="0"/>
+      <p:bldP spid="54287" grpId="0" animBg="1"/>
+    </p:bldLst>
+  </p:timing>
 </p:sld>
 </file>
 
@@ -16944,6 +18764,49 @@
               <a:ea typeface="Courier New" charset="0"/>
               <a:cs typeface="Courier New" charset="0"/>
             </a:endParaRPr>
+          </a:p>
+        </p:txBody>
+      </p:sp>
+      <p:sp>
+        <p:nvSpPr>
+          <p:cNvPr id="4" name="TextBox 3">
+            <a:extLst>
+              <a:ext uri="{FF2B5EF4-FFF2-40B4-BE49-F238E27FC236}">
+                <a16:creationId xmlns:a16="http://schemas.microsoft.com/office/drawing/2014/main" id="{3140F48C-F21B-FBCD-CB11-9481E4C881BA}"/>
+              </a:ext>
+            </a:extLst>
+          </p:cNvPr>
+          <p:cNvSpPr txBox="1"/>
+          <p:nvPr/>
+        </p:nvSpPr>
+        <p:spPr>
+          <a:xfrm>
+            <a:off x="1293541" y="5988205"/>
+            <a:ext cx="7631769" cy="369332"/>
+          </a:xfrm>
+          <a:prstGeom prst="rect">
+            <a:avLst/>
+          </a:prstGeom>
+          <a:noFill/>
+        </p:spPr>
+        <p:txBody>
+          <a:bodyPr wrap="none" rtlCol="0">
+            <a:spAutoFit/>
+          </a:bodyPr>
+          <a:lstStyle/>
+          <a:p>
+            <a:r>
+              <a:rPr lang="en-US" dirty="0"/>
+              <a:t>TODO : ADD MORE HERE – EXAMPLE USING NEWPRICE THEN This.  </a:t>
+            </a:r>
+            <a:r>
+              <a:rPr lang="en-US" dirty="0" err="1"/>
+              <a:t>Colour</a:t>
+            </a:r>
+            <a:r>
+              <a:rPr lang="en-US" dirty="0"/>
+              <a:t> code </a:t>
+            </a:r>
           </a:p>
         </p:txBody>
       </p:sp>
@@ -17027,14 +18890,14 @@
           </a:ln>
           <a:extLst>
             <a:ext uri="{909E8E84-426E-40dd-AFC4-6F175D3DCCD1}">
-              <a14:hiddenFill xmlns:a14="http://schemas.microsoft.com/office/drawing/2010/main" xmlns="">
+              <a14:hiddenFill xmlns="" xmlns:a14="http://schemas.microsoft.com/office/drawing/2010/main">
                 <a:solidFill>
                   <a:srgbClr val="FFFFFF"/>
                 </a:solidFill>
               </a14:hiddenFill>
             </a:ext>
             <a:ext uri="{91240B29-F687-4f45-9708-019B960494DF}">
-              <a14:hiddenLine xmlns:a14="http://schemas.microsoft.com/office/drawing/2010/main" xmlns="" w="9525">
+              <a14:hiddenLine xmlns="" xmlns:a14="http://schemas.microsoft.com/office/drawing/2010/main" w="9525">
                 <a:solidFill>
                   <a:srgbClr val="000000"/>
                 </a:solidFill>
@@ -17772,14 +19635,14 @@
             </a:ln>
             <a:extLst>
               <a:ext uri="{909E8E84-426E-40dd-AFC4-6F175D3DCCD1}">
-                <a14:hiddenFill xmlns:a14="http://schemas.microsoft.com/office/drawing/2010/main" xmlns="">
+                <a14:hiddenFill xmlns="" xmlns:a14="http://schemas.microsoft.com/office/drawing/2010/main">
                   <a:solidFill>
                     <a:srgbClr val="FFFFFF"/>
                   </a:solidFill>
                 </a14:hiddenFill>
               </a:ext>
               <a:ext uri="{91240B29-F687-4f45-9708-019B960494DF}">
-                <a14:hiddenLine xmlns:a14="http://schemas.microsoft.com/office/drawing/2010/main" xmlns="" w="9525">
+                <a14:hiddenLine xmlns="" xmlns:a14="http://schemas.microsoft.com/office/drawing/2010/main" w="9525">
                   <a:solidFill>
                     <a:schemeClr val="tx1"/>
                   </a:solidFill>
@@ -18010,14 +19873,14 @@
             </a:ln>
             <a:extLst>
               <a:ext uri="{909E8E84-426E-40dd-AFC4-6F175D3DCCD1}">
-                <a14:hiddenFill xmlns:a14="http://schemas.microsoft.com/office/drawing/2010/main" xmlns="">
+                <a14:hiddenFill xmlns="" xmlns:a14="http://schemas.microsoft.com/office/drawing/2010/main">
                   <a:solidFill>
                     <a:srgbClr val="FFFFFF"/>
                   </a:solidFill>
                 </a14:hiddenFill>
               </a:ext>
               <a:ext uri="{91240B29-F687-4f45-9708-019B960494DF}">
-                <a14:hiddenLine xmlns:a14="http://schemas.microsoft.com/office/drawing/2010/main" xmlns="" w="25400">
+                <a14:hiddenLine xmlns="" xmlns:a14="http://schemas.microsoft.com/office/drawing/2010/main" w="25400">
                   <a:solidFill>
                     <a:srgbClr val="FFFFFF"/>
                   </a:solidFill>
@@ -18852,14 +20715,14 @@
           </a:ln>
           <a:extLst>
             <a:ext uri="{909E8E84-426E-40dd-AFC4-6F175D3DCCD1}">
-              <a14:hiddenFill xmlns:a14="http://schemas.microsoft.com/office/drawing/2010/main" xmlns="">
+              <a14:hiddenFill xmlns="" xmlns:a14="http://schemas.microsoft.com/office/drawing/2010/main">
                 <a:solidFill>
                   <a:srgbClr val="FFFFFF"/>
                 </a:solidFill>
               </a14:hiddenFill>
             </a:ext>
             <a:ext uri="{91240B29-F687-4f45-9708-019B960494DF}">
-              <a14:hiddenLine xmlns:a14="http://schemas.microsoft.com/office/drawing/2010/main" xmlns="" w="9525">
+              <a14:hiddenLine xmlns="" xmlns:a14="http://schemas.microsoft.com/office/drawing/2010/main" w="9525">
                 <a:solidFill>
                   <a:schemeClr val="tx1"/>
                 </a:solidFill>
@@ -19077,14 +20940,14 @@
           </a:ln>
           <a:extLst>
             <a:ext uri="{909E8E84-426E-40dd-AFC4-6F175D3DCCD1}">
-              <a14:hiddenFill xmlns:a14="http://schemas.microsoft.com/office/drawing/2010/main" xmlns="">
+              <a14:hiddenFill xmlns="" xmlns:a14="http://schemas.microsoft.com/office/drawing/2010/main">
                 <a:solidFill>
                   <a:srgbClr val="FFFFFF"/>
                 </a:solidFill>
               </a14:hiddenFill>
             </a:ext>
             <a:ext uri="{91240B29-F687-4f45-9708-019B960494DF}">
-              <a14:hiddenLine xmlns:a14="http://schemas.microsoft.com/office/drawing/2010/main" xmlns="" w="9525">
+              <a14:hiddenLine xmlns="" xmlns:a14="http://schemas.microsoft.com/office/drawing/2010/main" w="9525">
                 <a:solidFill>
                   <a:schemeClr val="tx1"/>
                 </a:solidFill>
@@ -19685,12 +21548,7 @@
             <p:ph idx="1"/>
           </p:nvPr>
         </p:nvSpPr>
-        <p:spPr>
-          <a:xfrm>
-            <a:off x="609600" y="1600200"/>
-            <a:ext cx="10972800" cy="4525963"/>
-          </a:xfrm>
-        </p:spPr>
+        <p:spPr/>
         <p:txBody>
           <a:bodyPr vert="horz" wrap="square" lIns="91440" tIns="91439" rIns="233680" bIns="91439" numCol="1" anchor="t" anchorCtr="0" compatLnSpc="1">
             <a:prstTxWarp prst="textNoShape">
@@ -20444,14 +22302,14 @@
           </a:ln>
           <a:extLst>
             <a:ext uri="{909E8E84-426E-40dd-AFC4-6F175D3DCCD1}">
-              <a14:hiddenFill xmlns:a14="http://schemas.microsoft.com/office/drawing/2010/main" xmlns="">
+              <a14:hiddenFill xmlns="" xmlns:a14="http://schemas.microsoft.com/office/drawing/2010/main">
                 <a:solidFill>
                   <a:srgbClr val="FFFFFF"/>
                 </a:solidFill>
               </a14:hiddenFill>
             </a:ext>
             <a:ext uri="{91240B29-F687-4f45-9708-019B960494DF}">
-              <a14:hiddenLine xmlns:a14="http://schemas.microsoft.com/office/drawing/2010/main" xmlns="" w="9525">
+              <a14:hiddenLine xmlns="" xmlns:a14="http://schemas.microsoft.com/office/drawing/2010/main" w="9525">
                 <a:solidFill>
                   <a:srgbClr val="000000"/>
                 </a:solidFill>
@@ -20777,14 +22635,14 @@
           </a:ln>
           <a:extLst>
             <a:ext uri="{909E8E84-426E-40dd-AFC4-6F175D3DCCD1}">
-              <a14:hiddenFill xmlns:a14="http://schemas.microsoft.com/office/drawing/2010/main" xmlns="">
+              <a14:hiddenFill xmlns="" xmlns:a14="http://schemas.microsoft.com/office/drawing/2010/main">
                 <a:solidFill>
                   <a:srgbClr val="FFFFFF"/>
                 </a:solidFill>
               </a14:hiddenFill>
             </a:ext>
             <a:ext uri="{91240B29-F687-4f45-9708-019B960494DF}">
-              <a14:hiddenLine xmlns:a14="http://schemas.microsoft.com/office/drawing/2010/main" xmlns="" w="9525">
+              <a14:hiddenLine xmlns="" xmlns:a14="http://schemas.microsoft.com/office/drawing/2010/main" w="9525">
                 <a:solidFill>
                   <a:srgbClr val="000000"/>
                 </a:solidFill>
@@ -21144,14 +23002,14 @@
           </a:ln>
           <a:extLst>
             <a:ext uri="{909E8E84-426E-40dd-AFC4-6F175D3DCCD1}">
-              <a14:hiddenFill xmlns:a14="http://schemas.microsoft.com/office/drawing/2010/main" xmlns="">
+              <a14:hiddenFill xmlns="" xmlns:a14="http://schemas.microsoft.com/office/drawing/2010/main">
                 <a:solidFill>
                   <a:srgbClr val="FFFFFF"/>
                 </a:solidFill>
               </a14:hiddenFill>
             </a:ext>
             <a:ext uri="{91240B29-F687-4f45-9708-019B960494DF}">
-              <a14:hiddenLine xmlns:a14="http://schemas.microsoft.com/office/drawing/2010/main" xmlns="" w="9525">
+              <a14:hiddenLine xmlns="" xmlns:a14="http://schemas.microsoft.com/office/drawing/2010/main" w="9525">
                 <a:solidFill>
                   <a:srgbClr val="000000"/>
                 </a:solidFill>
@@ -21396,14 +23254,14 @@
           </a:ln>
           <a:extLst>
             <a:ext uri="{909E8E84-426E-40dd-AFC4-6F175D3DCCD1}">
-              <a14:hiddenFill xmlns:a14="http://schemas.microsoft.com/office/drawing/2010/main" xmlns="">
+              <a14:hiddenFill xmlns="" xmlns:a14="http://schemas.microsoft.com/office/drawing/2010/main">
                 <a:solidFill>
                   <a:srgbClr val="FFFFFF"/>
                 </a:solidFill>
               </a14:hiddenFill>
             </a:ext>
             <a:ext uri="{91240B29-F687-4f45-9708-019B960494DF}">
-              <a14:hiddenLine xmlns:a14="http://schemas.microsoft.com/office/drawing/2010/main" xmlns="" w="9525">
+              <a14:hiddenLine xmlns="" xmlns:a14="http://schemas.microsoft.com/office/drawing/2010/main" w="9525">
                 <a:solidFill>
                   <a:srgbClr val="000000"/>
                 </a:solidFill>
@@ -21633,14 +23491,14 @@
           </a:ln>
           <a:extLst>
             <a:ext uri="{909E8E84-426E-40dd-AFC4-6F175D3DCCD1}">
-              <a14:hiddenFill xmlns:a14="http://schemas.microsoft.com/office/drawing/2010/main" xmlns="">
+              <a14:hiddenFill xmlns="" xmlns:a14="http://schemas.microsoft.com/office/drawing/2010/main">
                 <a:solidFill>
                   <a:srgbClr val="FFFFFF"/>
                 </a:solidFill>
               </a14:hiddenFill>
             </a:ext>
             <a:ext uri="{91240B29-F687-4f45-9708-019B960494DF}">
-              <a14:hiddenLine xmlns:a14="http://schemas.microsoft.com/office/drawing/2010/main" xmlns="" w="9525">
+              <a14:hiddenLine xmlns="" xmlns:a14="http://schemas.microsoft.com/office/drawing/2010/main" w="9525">
                 <a:solidFill>
                   <a:srgbClr val="000000"/>
                 </a:solidFill>
@@ -21856,14 +23714,14 @@
           </a:ln>
           <a:extLst>
             <a:ext uri="{909E8E84-426E-40dd-AFC4-6F175D3DCCD1}">
-              <a14:hiddenFill xmlns:a14="http://schemas.microsoft.com/office/drawing/2010/main" xmlns="">
+              <a14:hiddenFill xmlns="" xmlns:a14="http://schemas.microsoft.com/office/drawing/2010/main">
                 <a:solidFill>
                   <a:srgbClr val="FFFFFF"/>
                 </a:solidFill>
               </a14:hiddenFill>
             </a:ext>
             <a:ext uri="{91240B29-F687-4f45-9708-019B960494DF}">
-              <a14:hiddenLine xmlns:a14="http://schemas.microsoft.com/office/drawing/2010/main" xmlns="" w="9525">
+              <a14:hiddenLine xmlns="" xmlns:a14="http://schemas.microsoft.com/office/drawing/2010/main" w="9525">
                 <a:solidFill>
                   <a:srgbClr val="000000"/>
                 </a:solidFill>
@@ -22079,14 +23937,14 @@
           </a:ln>
           <a:extLst>
             <a:ext uri="{909E8E84-426E-40dd-AFC4-6F175D3DCCD1}">
-              <a14:hiddenFill xmlns:a14="http://schemas.microsoft.com/office/drawing/2010/main" xmlns="">
+              <a14:hiddenFill xmlns="" xmlns:a14="http://schemas.microsoft.com/office/drawing/2010/main">
                 <a:solidFill>
                   <a:srgbClr val="FFFFFF"/>
                 </a:solidFill>
               </a14:hiddenFill>
             </a:ext>
             <a:ext uri="{91240B29-F687-4f45-9708-019B960494DF}">
-              <a14:hiddenLine xmlns:a14="http://schemas.microsoft.com/office/drawing/2010/main" xmlns="" w="9525">
+              <a14:hiddenLine xmlns="" xmlns:a14="http://schemas.microsoft.com/office/drawing/2010/main" w="9525">
                 <a:solidFill>
                   <a:srgbClr val="000000"/>
                 </a:solidFill>
@@ -22336,7 +24194,7 @@
           </a:ln>
           <a:extLst>
             <a:ext uri="{909E8E84-426E-40dd-AFC4-6F175D3DCCD1}">
-              <a14:hiddenFill xmlns:a14="http://schemas.microsoft.com/office/drawing/2010/main" xmlns="">
+              <a14:hiddenFill xmlns="" xmlns:a14="http://schemas.microsoft.com/office/drawing/2010/main">
                 <a:noFill/>
               </a14:hiddenFill>
             </a:ext>
@@ -22377,7 +24235,7 @@
           </a:ln>
           <a:extLst>
             <a:ext uri="{909E8E84-426E-40dd-AFC4-6F175D3DCCD1}">
-              <a14:hiddenFill xmlns:a14="http://schemas.microsoft.com/office/drawing/2010/main" xmlns="">
+              <a14:hiddenFill xmlns="" xmlns:a14="http://schemas.microsoft.com/office/drawing/2010/main">
                 <a:noFill/>
               </a14:hiddenFill>
             </a:ext>
@@ -22418,7 +24276,7 @@
           </a:ln>
           <a:extLst>
             <a:ext uri="{909E8E84-426E-40dd-AFC4-6F175D3DCCD1}">
-              <a14:hiddenFill xmlns:a14="http://schemas.microsoft.com/office/drawing/2010/main" xmlns="">
+              <a14:hiddenFill xmlns="" xmlns:a14="http://schemas.microsoft.com/office/drawing/2010/main">
                 <a:noFill/>
               </a14:hiddenFill>
             </a:ext>
@@ -22459,7 +24317,7 @@
           </a:ln>
           <a:extLst>
             <a:ext uri="{909E8E84-426E-40dd-AFC4-6F175D3DCCD1}">
-              <a14:hiddenFill xmlns:a14="http://schemas.microsoft.com/office/drawing/2010/main" xmlns="">
+              <a14:hiddenFill xmlns="" xmlns:a14="http://schemas.microsoft.com/office/drawing/2010/main">
                 <a:noFill/>
               </a14:hiddenFill>
             </a:ext>
@@ -22500,7 +24358,7 @@
           </a:ln>
           <a:extLst>
             <a:ext uri="{909E8E84-426E-40dd-AFC4-6F175D3DCCD1}">
-              <a14:hiddenFill xmlns:a14="http://schemas.microsoft.com/office/drawing/2010/main" xmlns="">
+              <a14:hiddenFill xmlns="" xmlns:a14="http://schemas.microsoft.com/office/drawing/2010/main">
                 <a:noFill/>
               </a14:hiddenFill>
             </a:ext>
@@ -22541,7 +24399,7 @@
           </a:ln>
           <a:extLst>
             <a:ext uri="{909E8E84-426E-40dd-AFC4-6F175D3DCCD1}">
-              <a14:hiddenFill xmlns:a14="http://schemas.microsoft.com/office/drawing/2010/main" xmlns="">
+              <a14:hiddenFill xmlns="" xmlns:a14="http://schemas.microsoft.com/office/drawing/2010/main">
                 <a:solidFill>
                   <a:srgbClr val="FFFFFF"/>
                 </a:solidFill>
@@ -22690,7 +24548,7 @@
           </a:ln>
           <a:extLst>
             <a:ext uri="{909E8E84-426E-40dd-AFC4-6F175D3DCCD1}">
-              <a14:hiddenFill xmlns:a14="http://schemas.microsoft.com/office/drawing/2010/main" xmlns="">
+              <a14:hiddenFill xmlns="" xmlns:a14="http://schemas.microsoft.com/office/drawing/2010/main">
                 <a:solidFill>
                   <a:srgbClr val="FFFFFF"/>
                 </a:solidFill>
@@ -22887,14 +24745,14 @@
           </a:ln>
           <a:extLst>
             <a:ext uri="{909E8E84-426E-40dd-AFC4-6F175D3DCCD1}">
-              <a14:hiddenFill xmlns:a14="http://schemas.microsoft.com/office/drawing/2010/main" xmlns="">
+              <a14:hiddenFill xmlns="" xmlns:a14="http://schemas.microsoft.com/office/drawing/2010/main">
                 <a:solidFill>
                   <a:srgbClr val="FFFFFF"/>
                 </a:solidFill>
               </a14:hiddenFill>
             </a:ext>
             <a:ext uri="{91240B29-F687-4f45-9708-019B960494DF}">
-              <a14:hiddenLine xmlns:a14="http://schemas.microsoft.com/office/drawing/2010/main" xmlns="" w="9525">
+              <a14:hiddenLine xmlns="" xmlns:a14="http://schemas.microsoft.com/office/drawing/2010/main" w="9525">
                 <a:solidFill>
                   <a:srgbClr val="000000"/>
                 </a:solidFill>
@@ -25471,14 +27329,14 @@
           <a:noFill/>
           <a:extLst>
             <a:ext uri="{909E8E84-426E-40dd-AFC4-6F175D3DCCD1}">
-              <a14:hiddenFill xmlns:a14="http://schemas.microsoft.com/office/drawing/2010/main" xmlns="">
+              <a14:hiddenFill xmlns="" xmlns:a14="http://schemas.microsoft.com/office/drawing/2010/main">
                 <a:solidFill>
                   <a:srgbClr val="FFFFFF"/>
                 </a:solidFill>
               </a14:hiddenFill>
             </a:ext>
             <a:ext uri="{91240B29-F687-4f45-9708-019B960494DF}">
-              <a14:hiddenLine xmlns:a14="http://schemas.microsoft.com/office/drawing/2010/main" xmlns="" w="9525">
+              <a14:hiddenLine xmlns="" xmlns:a14="http://schemas.microsoft.com/office/drawing/2010/main" w="9525">
                 <a:solidFill>
                   <a:srgbClr val="000000"/>
                 </a:solidFill>
@@ -25690,14 +27548,14 @@
           </a:ln>
           <a:extLst>
             <a:ext uri="{909E8E84-426E-40dd-AFC4-6F175D3DCCD1}">
-              <a14:hiddenFill xmlns:a14="http://schemas.microsoft.com/office/drawing/2010/main" xmlns="">
+              <a14:hiddenFill xmlns="" xmlns:a14="http://schemas.microsoft.com/office/drawing/2010/main">
                 <a:solidFill>
                   <a:srgbClr val="FFFFFF"/>
                 </a:solidFill>
               </a14:hiddenFill>
             </a:ext>
             <a:ext uri="{91240B29-F687-4f45-9708-019B960494DF}">
-              <a14:hiddenLine xmlns:a14="http://schemas.microsoft.com/office/drawing/2010/main" xmlns="" w="9525">
+              <a14:hiddenLine xmlns="" xmlns:a14="http://schemas.microsoft.com/office/drawing/2010/main" w="9525">
                 <a:solidFill>
                   <a:srgbClr val="000000"/>
                 </a:solidFill>
@@ -25989,14 +27847,14 @@
           </a:ln>
           <a:extLst>
             <a:ext uri="{909E8E84-426E-40dd-AFC4-6F175D3DCCD1}">
-              <a14:hiddenFill xmlns:a14="http://schemas.microsoft.com/office/drawing/2010/main" xmlns="">
+              <a14:hiddenFill xmlns="" xmlns:a14="http://schemas.microsoft.com/office/drawing/2010/main">
                 <a:solidFill>
                   <a:srgbClr val="FFFFFF"/>
                 </a:solidFill>
               </a14:hiddenFill>
             </a:ext>
             <a:ext uri="{91240B29-F687-4f45-9708-019B960494DF}">
-              <a14:hiddenLine xmlns:a14="http://schemas.microsoft.com/office/drawing/2010/main" xmlns="" w="9525">
+              <a14:hiddenLine xmlns="" xmlns:a14="http://schemas.microsoft.com/office/drawing/2010/main" w="9525">
                 <a:solidFill>
                   <a:srgbClr val="000000"/>
                 </a:solidFill>
@@ -26212,14 +28070,14 @@
           </a:ln>
           <a:extLst>
             <a:ext uri="{909E8E84-426E-40dd-AFC4-6F175D3DCCD1}">
-              <a14:hiddenFill xmlns:a14="http://schemas.microsoft.com/office/drawing/2010/main" xmlns="">
+              <a14:hiddenFill xmlns="" xmlns:a14="http://schemas.microsoft.com/office/drawing/2010/main">
                 <a:solidFill>
                   <a:srgbClr val="FFFFFF"/>
                 </a:solidFill>
               </a14:hiddenFill>
             </a:ext>
             <a:ext uri="{91240B29-F687-4f45-9708-019B960494DF}">
-              <a14:hiddenLine xmlns:a14="http://schemas.microsoft.com/office/drawing/2010/main" xmlns="" w="9525">
+              <a14:hiddenLine xmlns="" xmlns:a14="http://schemas.microsoft.com/office/drawing/2010/main" w="9525">
                 <a:solidFill>
                   <a:srgbClr val="000000"/>
                 </a:solidFill>
@@ -26435,14 +28293,14 @@
           </a:ln>
           <a:extLst>
             <a:ext uri="{909E8E84-426E-40dd-AFC4-6F175D3DCCD1}">
-              <a14:hiddenFill xmlns:a14="http://schemas.microsoft.com/office/drawing/2010/main" xmlns="">
+              <a14:hiddenFill xmlns="" xmlns:a14="http://schemas.microsoft.com/office/drawing/2010/main">
                 <a:solidFill>
                   <a:srgbClr val="FFFFFF"/>
                 </a:solidFill>
               </a14:hiddenFill>
             </a:ext>
             <a:ext uri="{91240B29-F687-4f45-9708-019B960494DF}">
-              <a14:hiddenLine xmlns:a14="http://schemas.microsoft.com/office/drawing/2010/main" xmlns="" w="9525">
+              <a14:hiddenLine xmlns="" xmlns:a14="http://schemas.microsoft.com/office/drawing/2010/main" w="9525">
                 <a:solidFill>
                   <a:srgbClr val="000000"/>
                 </a:solidFill>
@@ -26663,7 +28521,7 @@
           </a:ln>
           <a:extLst>
             <a:ext uri="{909E8E84-426E-40dd-AFC4-6F175D3DCCD1}">
-              <a14:hiddenFill xmlns:a14="http://schemas.microsoft.com/office/drawing/2010/main" xmlns="">
+              <a14:hiddenFill xmlns="" xmlns:a14="http://schemas.microsoft.com/office/drawing/2010/main">
                 <a:solidFill>
                   <a:srgbClr val="FFFFFF"/>
                 </a:solidFill>
@@ -26807,14 +28665,14 @@
           </a:ln>
           <a:extLst>
             <a:ext uri="{909E8E84-426E-40dd-AFC4-6F175D3DCCD1}">
-              <a14:hiddenFill xmlns:a14="http://schemas.microsoft.com/office/drawing/2010/main" xmlns="">
+              <a14:hiddenFill xmlns="" xmlns:a14="http://schemas.microsoft.com/office/drawing/2010/main">
                 <a:solidFill>
                   <a:srgbClr val="FFFFFF"/>
                 </a:solidFill>
               </a14:hiddenFill>
             </a:ext>
             <a:ext uri="{91240B29-F687-4f45-9708-019B960494DF}">
-              <a14:hiddenLine xmlns:a14="http://schemas.microsoft.com/office/drawing/2010/main" xmlns="" w="9525">
+              <a14:hiddenLine xmlns="" xmlns:a14="http://schemas.microsoft.com/office/drawing/2010/main" w="9525">
                 <a:solidFill>
                   <a:srgbClr val="000000"/>
                 </a:solidFill>
@@ -27030,14 +28888,14 @@
           </a:ln>
           <a:extLst>
             <a:ext uri="{909E8E84-426E-40dd-AFC4-6F175D3DCCD1}">
-              <a14:hiddenFill xmlns:a14="http://schemas.microsoft.com/office/drawing/2010/main" xmlns="">
+              <a14:hiddenFill xmlns="" xmlns:a14="http://schemas.microsoft.com/office/drawing/2010/main">
                 <a:solidFill>
                   <a:srgbClr val="FFFFFF"/>
                 </a:solidFill>
               </a14:hiddenFill>
             </a:ext>
             <a:ext uri="{91240B29-F687-4f45-9708-019B960494DF}">
-              <a14:hiddenLine xmlns:a14="http://schemas.microsoft.com/office/drawing/2010/main" xmlns="" w="9525">
+              <a14:hiddenLine xmlns="" xmlns:a14="http://schemas.microsoft.com/office/drawing/2010/main" w="9525">
                 <a:solidFill>
                   <a:srgbClr val="000000"/>
                 </a:solidFill>
@@ -27258,7 +29116,7 @@
           </a:ln>
           <a:extLst>
             <a:ext uri="{909E8E84-426E-40dd-AFC4-6F175D3DCCD1}">
-              <a14:hiddenFill xmlns:a14="http://schemas.microsoft.com/office/drawing/2010/main" xmlns="">
+              <a14:hiddenFill xmlns="" xmlns:a14="http://schemas.microsoft.com/office/drawing/2010/main">
                 <a:noFill/>
               </a14:hiddenFill>
             </a:ext>
@@ -27299,7 +29157,7 @@
           </a:ln>
           <a:extLst>
             <a:ext uri="{909E8E84-426E-40dd-AFC4-6F175D3DCCD1}">
-              <a14:hiddenFill xmlns:a14="http://schemas.microsoft.com/office/drawing/2010/main" xmlns="">
+              <a14:hiddenFill xmlns="" xmlns:a14="http://schemas.microsoft.com/office/drawing/2010/main">
                 <a:noFill/>
               </a14:hiddenFill>
             </a:ext>
@@ -27340,7 +29198,7 @@
           </a:ln>
           <a:extLst>
             <a:ext uri="{909E8E84-426E-40dd-AFC4-6F175D3DCCD1}">
-              <a14:hiddenFill xmlns:a14="http://schemas.microsoft.com/office/drawing/2010/main" xmlns="">
+              <a14:hiddenFill xmlns="" xmlns:a14="http://schemas.microsoft.com/office/drawing/2010/main">
                 <a:noFill/>
               </a14:hiddenFill>
             </a:ext>
@@ -27381,7 +29239,7 @@
           </a:ln>
           <a:extLst>
             <a:ext uri="{909E8E84-426E-40dd-AFC4-6F175D3DCCD1}">
-              <a14:hiddenFill xmlns:a14="http://schemas.microsoft.com/office/drawing/2010/main" xmlns="">
+              <a14:hiddenFill xmlns="" xmlns:a14="http://schemas.microsoft.com/office/drawing/2010/main">
                 <a:noFill/>
               </a14:hiddenFill>
             </a:ext>
@@ -27422,7 +29280,7 @@
           </a:ln>
           <a:extLst>
             <a:ext uri="{909E8E84-426E-40dd-AFC4-6F175D3DCCD1}">
-              <a14:hiddenFill xmlns:a14="http://schemas.microsoft.com/office/drawing/2010/main" xmlns="">
+              <a14:hiddenFill xmlns="" xmlns:a14="http://schemas.microsoft.com/office/drawing/2010/main">
                 <a:noFill/>
               </a14:hiddenFill>
             </a:ext>
@@ -27458,14 +29316,14 @@
           </a:ln>
           <a:extLst>
             <a:ext uri="{909E8E84-426E-40dd-AFC4-6F175D3DCCD1}">
-              <a14:hiddenFill xmlns:a14="http://schemas.microsoft.com/office/drawing/2010/main" xmlns="">
+              <a14:hiddenFill xmlns="" xmlns:a14="http://schemas.microsoft.com/office/drawing/2010/main">
                 <a:solidFill>
                   <a:srgbClr val="FFFFFF"/>
                 </a:solidFill>
               </a14:hiddenFill>
             </a:ext>
             <a:ext uri="{91240B29-F687-4f45-9708-019B960494DF}">
-              <a14:hiddenLine xmlns:a14="http://schemas.microsoft.com/office/drawing/2010/main" xmlns="" w="9525">
+              <a14:hiddenLine xmlns="" xmlns:a14="http://schemas.microsoft.com/office/drawing/2010/main" w="9525">
                 <a:solidFill>
                   <a:srgbClr val="000000"/>
                 </a:solidFill>
@@ -27686,7 +29544,7 @@
           </a:ln>
           <a:extLst>
             <a:ext uri="{909E8E84-426E-40dd-AFC4-6F175D3DCCD1}">
-              <a14:hiddenFill xmlns:a14="http://schemas.microsoft.com/office/drawing/2010/main" xmlns="">
+              <a14:hiddenFill xmlns="" xmlns:a14="http://schemas.microsoft.com/office/drawing/2010/main">
                 <a:noFill/>
               </a14:hiddenFill>
             </a:ext>
@@ -28457,14 +30315,14 @@
           </a:ln>
           <a:extLst>
             <a:ext uri="{909E8E84-426E-40dd-AFC4-6F175D3DCCD1}">
-              <a14:hiddenFill xmlns:a14="http://schemas.microsoft.com/office/drawing/2010/main" xmlns="">
+              <a14:hiddenFill xmlns="" xmlns:a14="http://schemas.microsoft.com/office/drawing/2010/main">
                 <a:solidFill>
                   <a:srgbClr val="FFFFFF"/>
                 </a:solidFill>
               </a14:hiddenFill>
             </a:ext>
             <a:ext uri="{91240B29-F687-4f45-9708-019B960494DF}">
-              <a14:hiddenLine xmlns:a14="http://schemas.microsoft.com/office/drawing/2010/main" xmlns="" w="9525">
+              <a14:hiddenLine xmlns="" xmlns:a14="http://schemas.microsoft.com/office/drawing/2010/main" w="9525">
                 <a:solidFill>
                   <a:schemeClr val="tx1"/>
                 </a:solidFill>
@@ -29104,14 +30962,14 @@
           </a:ln>
           <a:extLst>
             <a:ext uri="{909E8E84-426E-40dd-AFC4-6F175D3DCCD1}">
-              <a14:hiddenFill xmlns="" xmlns:a14="http://schemas.microsoft.com/office/drawing/2010/main">
+              <a14:hiddenFill xmlns:a14="http://schemas.microsoft.com/office/drawing/2010/main" xmlns="">
                 <a:solidFill>
                   <a:srgbClr val="FFFFFF"/>
                 </a:solidFill>
               </a14:hiddenFill>
             </a:ext>
             <a:ext uri="{91240B29-F687-4f45-9708-019B960494DF}">
-              <a14:hiddenLine xmlns="" xmlns:a14="http://schemas.microsoft.com/office/drawing/2010/main" w="9525">
+              <a14:hiddenLine xmlns:a14="http://schemas.microsoft.com/office/drawing/2010/main" xmlns="" w="9525">
                 <a:solidFill>
                   <a:schemeClr val="tx1"/>
                 </a:solidFill>
@@ -29628,7 +31486,7 @@
           </a:ln>
           <a:extLst>
             <a:ext uri="{909E8E84-426E-40dd-AFC4-6F175D3DCCD1}">
-              <a14:hiddenFill xmlns:a14="http://schemas.microsoft.com/office/drawing/2010/main" xmlns="">
+              <a14:hiddenFill xmlns="" xmlns:a14="http://schemas.microsoft.com/office/drawing/2010/main">
                 <a:solidFill>
                   <a:srgbClr val="FFFFFF"/>
                 </a:solidFill>
@@ -29852,7 +31710,7 @@
           </a:ln>
           <a:extLst>
             <a:ext uri="{909E8E84-426E-40dd-AFC4-6F175D3DCCD1}">
-              <a14:hiddenFill xmlns:a14="http://schemas.microsoft.com/office/drawing/2010/main" xmlns="">
+              <a14:hiddenFill xmlns="" xmlns:a14="http://schemas.microsoft.com/office/drawing/2010/main">
                 <a:solidFill>
                   <a:srgbClr val="FFFFFF"/>
                 </a:solidFill>
@@ -30076,7 +31934,7 @@
           </a:ln>
           <a:extLst>
             <a:ext uri="{909E8E84-426E-40dd-AFC4-6F175D3DCCD1}">
-              <a14:hiddenFill xmlns:a14="http://schemas.microsoft.com/office/drawing/2010/main" xmlns="">
+              <a14:hiddenFill xmlns="" xmlns:a14="http://schemas.microsoft.com/office/drawing/2010/main">
                 <a:solidFill>
                   <a:srgbClr val="FFFFFF"/>
                 </a:solidFill>
@@ -30300,7 +32158,7 @@
           </a:ln>
           <a:extLst>
             <a:ext uri="{909E8E84-426E-40dd-AFC4-6F175D3DCCD1}">
-              <a14:hiddenFill xmlns:a14="http://schemas.microsoft.com/office/drawing/2010/main" xmlns="">
+              <a14:hiddenFill xmlns="" xmlns:a14="http://schemas.microsoft.com/office/drawing/2010/main">
                 <a:solidFill>
                   <a:srgbClr val="FFFFFF"/>
                 </a:solidFill>
@@ -30524,7 +32382,7 @@
           </a:ln>
           <a:extLst>
             <a:ext uri="{909E8E84-426E-40dd-AFC4-6F175D3DCCD1}">
-              <a14:hiddenFill xmlns:a14="http://schemas.microsoft.com/office/drawing/2010/main" xmlns="">
+              <a14:hiddenFill xmlns="" xmlns:a14="http://schemas.microsoft.com/office/drawing/2010/main">
                 <a:solidFill>
                   <a:srgbClr val="FFFFFF"/>
                 </a:solidFill>
